--- a/0603_Good/ppt/DCSP_about.pptx
+++ b/0603_Good/ppt/DCSP_about.pptx
@@ -6,17 +6,16 @@
     <p:sldMasterId id="2147483672" r:id="rId5"/>
   </p:sldMasterIdLst>
   <p:notesMasterIdLst>
-    <p:notesMasterId r:id="rId14"/>
+    <p:notesMasterId r:id="rId13"/>
   </p:notesMasterIdLst>
   <p:sldIdLst>
     <p:sldId id="336" r:id="rId6"/>
     <p:sldId id="258" r:id="rId7"/>
     <p:sldId id="362" r:id="rId8"/>
-    <p:sldId id="365" r:id="rId9"/>
-    <p:sldId id="366" r:id="rId10"/>
-    <p:sldId id="368" r:id="rId11"/>
-    <p:sldId id="369" r:id="rId12"/>
-    <p:sldId id="370" r:id="rId13"/>
+    <p:sldId id="372" r:id="rId9"/>
+    <p:sldId id="373" r:id="rId10"/>
+    <p:sldId id="374" r:id="rId11"/>
+    <p:sldId id="371" r:id="rId12"/>
   </p:sldIdLst>
   <p:sldSz cx="9144000" cy="6858000" type="screen4x3"/>
   <p:notesSz cx="6858000" cy="9144000"/>
@@ -208,7 +207,7 @@
           <a:p>
             <a:fld id="{08F4BCEA-3FF4-4CB2-B00C-F3A2A72C868C}" type="datetimeFigureOut">
               <a:rPr lang="ko-KR" altLang="en-US" smtClean="0"/>
-              <a:t>2026-05-24</a:t>
+              <a:t>2026-06-03</a:t>
             </a:fld>
             <a:endParaRPr lang="ko-KR" altLang="en-US"/>
           </a:p>
@@ -688,7 +687,7 @@
         <p:cNvPr id="1" name="">
           <a:extLst>
             <a:ext uri="{FF2B5EF4-FFF2-40B4-BE49-F238E27FC236}">
-              <a16:creationId xmlns:a16="http://schemas.microsoft.com/office/drawing/2014/main" id="{123A60C0-FBA6-20F8-001D-68CBFF32440C}"/>
+              <a16:creationId xmlns:a16="http://schemas.microsoft.com/office/drawing/2014/main" id="{3BAFFFC6-A7C3-6003-B764-890BE3309B8E}"/>
             </a:ext>
           </a:extLst>
         </p:cNvPr>
@@ -708,7 +707,7 @@
           <p:cNvPr id="2" name="슬라이드 이미지 개체 틀 1">
             <a:extLst>
               <a:ext uri="{FF2B5EF4-FFF2-40B4-BE49-F238E27FC236}">
-                <a16:creationId xmlns:a16="http://schemas.microsoft.com/office/drawing/2014/main" id="{34BD10E0-5DCF-E742-B664-CA75BE2684C5}"/>
+                <a16:creationId xmlns:a16="http://schemas.microsoft.com/office/drawing/2014/main" id="{77AEDA85-0FD6-B95F-37A4-44C234486979}"/>
               </a:ext>
             </a:extLst>
           </p:cNvPr>
@@ -726,7 +725,7 @@
           <p:cNvPr id="3" name="슬라이드 노트 개체 틀 2">
             <a:extLst>
               <a:ext uri="{FF2B5EF4-FFF2-40B4-BE49-F238E27FC236}">
-                <a16:creationId xmlns:a16="http://schemas.microsoft.com/office/drawing/2014/main" id="{3A073E74-39D4-3AB4-E429-A41DED37C1BD}"/>
+                <a16:creationId xmlns:a16="http://schemas.microsoft.com/office/drawing/2014/main" id="{26FBC6C0-2082-89EE-7936-FD6F4A644DE6}"/>
               </a:ext>
             </a:extLst>
           </p:cNvPr>
@@ -764,7 +763,7 @@
           <p:cNvPr id="4" name="슬라이드 번호 개체 틀 3">
             <a:extLst>
               <a:ext uri="{FF2B5EF4-FFF2-40B4-BE49-F238E27FC236}">
-                <a16:creationId xmlns:a16="http://schemas.microsoft.com/office/drawing/2014/main" id="{441015B9-B567-5556-16AC-9D530B7270EA}"/>
+                <a16:creationId xmlns:a16="http://schemas.microsoft.com/office/drawing/2014/main" id="{2957FA14-5EFF-AFB9-D77A-167B5188430B}"/>
               </a:ext>
             </a:extLst>
           </p:cNvPr>
@@ -791,7 +790,7 @@
     </p:spTree>
     <p:extLst>
       <p:ext uri="{BB962C8B-B14F-4D97-AF65-F5344CB8AC3E}">
-        <p14:creationId xmlns:p14="http://schemas.microsoft.com/office/powerpoint/2010/main" val="4188723385"/>
+        <p14:creationId xmlns:p14="http://schemas.microsoft.com/office/powerpoint/2010/main" val="722597464"/>
       </p:ext>
     </p:extLst>
   </p:cSld>
@@ -809,7 +808,7 @@
         <p:cNvPr id="1" name="">
           <a:extLst>
             <a:ext uri="{FF2B5EF4-FFF2-40B4-BE49-F238E27FC236}">
-              <a16:creationId xmlns:a16="http://schemas.microsoft.com/office/drawing/2014/main" id="{E99697F0-A9F3-28A1-DE3D-171E08F988F0}"/>
+              <a16:creationId xmlns:a16="http://schemas.microsoft.com/office/drawing/2014/main" id="{6CBDA33F-B5C3-9894-692C-B78BC3B992A2}"/>
             </a:ext>
           </a:extLst>
         </p:cNvPr>
@@ -829,7 +828,7 @@
           <p:cNvPr id="2" name="슬라이드 이미지 개체 틀 1">
             <a:extLst>
               <a:ext uri="{FF2B5EF4-FFF2-40B4-BE49-F238E27FC236}">
-                <a16:creationId xmlns:a16="http://schemas.microsoft.com/office/drawing/2014/main" id="{A91FAE3A-C6FF-8567-CDDD-C353F8165361}"/>
+                <a16:creationId xmlns:a16="http://schemas.microsoft.com/office/drawing/2014/main" id="{E8B010D0-4969-C31E-5478-B45CFAB3E840}"/>
               </a:ext>
             </a:extLst>
           </p:cNvPr>
@@ -847,7 +846,7 @@
           <p:cNvPr id="3" name="슬라이드 노트 개체 틀 2">
             <a:extLst>
               <a:ext uri="{FF2B5EF4-FFF2-40B4-BE49-F238E27FC236}">
-                <a16:creationId xmlns:a16="http://schemas.microsoft.com/office/drawing/2014/main" id="{730AF6E3-F966-67B1-B710-7D5F1F5D6864}"/>
+                <a16:creationId xmlns:a16="http://schemas.microsoft.com/office/drawing/2014/main" id="{EC44FB05-2586-8C56-2831-776EF8C5C891}"/>
               </a:ext>
             </a:extLst>
           </p:cNvPr>
@@ -885,7 +884,7 @@
           <p:cNvPr id="4" name="슬라이드 번호 개체 틀 3">
             <a:extLst>
               <a:ext uri="{FF2B5EF4-FFF2-40B4-BE49-F238E27FC236}">
-                <a16:creationId xmlns:a16="http://schemas.microsoft.com/office/drawing/2014/main" id="{84F4F99F-00D0-90C1-D78C-EFEEB6941639}"/>
+                <a16:creationId xmlns:a16="http://schemas.microsoft.com/office/drawing/2014/main" id="{D683604B-D9C3-33B0-8779-B01E4A64A187}"/>
               </a:ext>
             </a:extLst>
           </p:cNvPr>
@@ -912,7 +911,7 @@
     </p:spTree>
     <p:extLst>
       <p:ext uri="{BB962C8B-B14F-4D97-AF65-F5344CB8AC3E}">
-        <p14:creationId xmlns:p14="http://schemas.microsoft.com/office/powerpoint/2010/main" val="1279937378"/>
+        <p14:creationId xmlns:p14="http://schemas.microsoft.com/office/powerpoint/2010/main" val="3897913046"/>
       </p:ext>
     </p:extLst>
   </p:cSld>
@@ -930,7 +929,7 @@
         <p:cNvPr id="1" name="">
           <a:extLst>
             <a:ext uri="{FF2B5EF4-FFF2-40B4-BE49-F238E27FC236}">
-              <a16:creationId xmlns:a16="http://schemas.microsoft.com/office/drawing/2014/main" id="{DDDACFE0-2641-1385-46BD-93EE2C5BA350}"/>
+              <a16:creationId xmlns:a16="http://schemas.microsoft.com/office/drawing/2014/main" id="{3F3B5F9C-2324-5ABA-675D-82C45CEAB243}"/>
             </a:ext>
           </a:extLst>
         </p:cNvPr>
@@ -950,7 +949,7 @@
           <p:cNvPr id="2" name="슬라이드 이미지 개체 틀 1">
             <a:extLst>
               <a:ext uri="{FF2B5EF4-FFF2-40B4-BE49-F238E27FC236}">
-                <a16:creationId xmlns:a16="http://schemas.microsoft.com/office/drawing/2014/main" id="{01406477-AEFB-A669-24B5-141883EC3502}"/>
+                <a16:creationId xmlns:a16="http://schemas.microsoft.com/office/drawing/2014/main" id="{B1766512-6D1E-5637-7FB6-145B2BC2F76E}"/>
               </a:ext>
             </a:extLst>
           </p:cNvPr>
@@ -968,7 +967,7 @@
           <p:cNvPr id="3" name="슬라이드 노트 개체 틀 2">
             <a:extLst>
               <a:ext uri="{FF2B5EF4-FFF2-40B4-BE49-F238E27FC236}">
-                <a16:creationId xmlns:a16="http://schemas.microsoft.com/office/drawing/2014/main" id="{2092BC38-224C-1BE9-B8F1-5A3A8151CAA2}"/>
+                <a16:creationId xmlns:a16="http://schemas.microsoft.com/office/drawing/2014/main" id="{90282F23-1481-2EB5-07C4-F32AE9B8E0E3}"/>
               </a:ext>
             </a:extLst>
           </p:cNvPr>
@@ -1006,7 +1005,7 @@
           <p:cNvPr id="4" name="슬라이드 번호 개체 틀 3">
             <a:extLst>
               <a:ext uri="{FF2B5EF4-FFF2-40B4-BE49-F238E27FC236}">
-                <a16:creationId xmlns:a16="http://schemas.microsoft.com/office/drawing/2014/main" id="{307B763D-2B28-BF9B-9242-D88426A1E8AC}"/>
+                <a16:creationId xmlns:a16="http://schemas.microsoft.com/office/drawing/2014/main" id="{3BB7820B-2738-EB31-1F5A-31599CF83BC4}"/>
               </a:ext>
             </a:extLst>
           </p:cNvPr>
@@ -1033,7 +1032,7 @@
     </p:spTree>
     <p:extLst>
       <p:ext uri="{BB962C8B-B14F-4D97-AF65-F5344CB8AC3E}">
-        <p14:creationId xmlns:p14="http://schemas.microsoft.com/office/powerpoint/2010/main" val="3895080849"/>
+        <p14:creationId xmlns:p14="http://schemas.microsoft.com/office/powerpoint/2010/main" val="3735902976"/>
       </p:ext>
     </p:extLst>
   </p:cSld>
@@ -1051,7 +1050,7 @@
         <p:cNvPr id="1" name="">
           <a:extLst>
             <a:ext uri="{FF2B5EF4-FFF2-40B4-BE49-F238E27FC236}">
-              <a16:creationId xmlns:a16="http://schemas.microsoft.com/office/drawing/2014/main" id="{AD317BE6-E90D-506D-AF11-90D14000BF00}"/>
+              <a16:creationId xmlns:a16="http://schemas.microsoft.com/office/drawing/2014/main" id="{36A974EB-9DA0-BE80-7C3F-E63C66CFCC9A}"/>
             </a:ext>
           </a:extLst>
         </p:cNvPr>
@@ -1071,7 +1070,7 @@
           <p:cNvPr id="2" name="슬라이드 이미지 개체 틀 1">
             <a:extLst>
               <a:ext uri="{FF2B5EF4-FFF2-40B4-BE49-F238E27FC236}">
-                <a16:creationId xmlns:a16="http://schemas.microsoft.com/office/drawing/2014/main" id="{749F90EE-247C-EAC1-FB56-50DCAC848840}"/>
+                <a16:creationId xmlns:a16="http://schemas.microsoft.com/office/drawing/2014/main" id="{DDC3DEA4-2F72-28E1-2724-0525E9A84FB6}"/>
               </a:ext>
             </a:extLst>
           </p:cNvPr>
@@ -1089,7 +1088,7 @@
           <p:cNvPr id="3" name="슬라이드 노트 개체 틀 2">
             <a:extLst>
               <a:ext uri="{FF2B5EF4-FFF2-40B4-BE49-F238E27FC236}">
-                <a16:creationId xmlns:a16="http://schemas.microsoft.com/office/drawing/2014/main" id="{B374ECBD-16FC-9E34-D4AA-E0B60D7FFE20}"/>
+                <a16:creationId xmlns:a16="http://schemas.microsoft.com/office/drawing/2014/main" id="{C0F7F7E1-5278-7BBB-1F79-FD9FCAAD1D3B}"/>
               </a:ext>
             </a:extLst>
           </p:cNvPr>
@@ -1127,7 +1126,7 @@
           <p:cNvPr id="4" name="슬라이드 번호 개체 틀 3">
             <a:extLst>
               <a:ext uri="{FF2B5EF4-FFF2-40B4-BE49-F238E27FC236}">
-                <a16:creationId xmlns:a16="http://schemas.microsoft.com/office/drawing/2014/main" id="{20EEDCAA-2662-7269-3724-8091B210CC1A}"/>
+                <a16:creationId xmlns:a16="http://schemas.microsoft.com/office/drawing/2014/main" id="{FB1F79FA-38AB-2B9F-6467-C361FE58E11D}"/>
               </a:ext>
             </a:extLst>
           </p:cNvPr>
@@ -1154,128 +1153,7 @@
     </p:spTree>
     <p:extLst>
       <p:ext uri="{BB962C8B-B14F-4D97-AF65-F5344CB8AC3E}">
-        <p14:creationId xmlns:p14="http://schemas.microsoft.com/office/powerpoint/2010/main" val="2811684457"/>
-      </p:ext>
-    </p:extLst>
-  </p:cSld>
-  <p:clrMapOvr>
-    <a:masterClrMapping/>
-  </p:clrMapOvr>
-</p:notes>
-</file>
-
-<file path=ppt/notesSlides/notesSlide7.xml><?xml version="1.0" encoding="utf-8"?>
-<p:notes xmlns:a="http://schemas.openxmlformats.org/drawingml/2006/main" xmlns:r="http://schemas.openxmlformats.org/officeDocument/2006/relationships" xmlns:p="http://schemas.openxmlformats.org/presentationml/2006/main">
-  <p:cSld>
-    <p:spTree>
-      <p:nvGrpSpPr>
-        <p:cNvPr id="1" name="">
-          <a:extLst>
-            <a:ext uri="{FF2B5EF4-FFF2-40B4-BE49-F238E27FC236}">
-              <a16:creationId xmlns:a16="http://schemas.microsoft.com/office/drawing/2014/main" id="{1DB2A219-8F16-EDB9-7B7D-21D43E2B58F6}"/>
-            </a:ext>
-          </a:extLst>
-        </p:cNvPr>
-        <p:cNvGrpSpPr/>
-        <p:nvPr/>
-      </p:nvGrpSpPr>
-      <p:grpSpPr>
-        <a:xfrm>
-          <a:off x="0" y="0"/>
-          <a:ext cx="0" cy="0"/>
-          <a:chOff x="0" y="0"/>
-          <a:chExt cx="0" cy="0"/>
-        </a:xfrm>
-      </p:grpSpPr>
-      <p:sp>
-        <p:nvSpPr>
-          <p:cNvPr id="2" name="슬라이드 이미지 개체 틀 1">
-            <a:extLst>
-              <a:ext uri="{FF2B5EF4-FFF2-40B4-BE49-F238E27FC236}">
-                <a16:creationId xmlns:a16="http://schemas.microsoft.com/office/drawing/2014/main" id="{2F660F8F-4B79-FD72-92EB-850B13CA4F96}"/>
-              </a:ext>
-            </a:extLst>
-          </p:cNvPr>
-          <p:cNvSpPr>
-            <a:spLocks noGrp="1" noRot="1" noChangeAspect="1"/>
-          </p:cNvSpPr>
-          <p:nvPr>
-            <p:ph type="sldImg"/>
-          </p:nvPr>
-        </p:nvSpPr>
-        <p:spPr/>
-      </p:sp>
-      <p:sp>
-        <p:nvSpPr>
-          <p:cNvPr id="3" name="슬라이드 노트 개체 틀 2">
-            <a:extLst>
-              <a:ext uri="{FF2B5EF4-FFF2-40B4-BE49-F238E27FC236}">
-                <a16:creationId xmlns:a16="http://schemas.microsoft.com/office/drawing/2014/main" id="{05346DE6-503F-F667-380E-8BE9C74B3AC9}"/>
-              </a:ext>
-            </a:extLst>
-          </p:cNvPr>
-          <p:cNvSpPr>
-            <a:spLocks noGrp="1"/>
-          </p:cNvSpPr>
-          <p:nvPr>
-            <p:ph type="body" idx="1"/>
-          </p:nvPr>
-        </p:nvSpPr>
-        <p:spPr/>
-        <p:txBody>
-          <a:bodyPr/>
-          <a:lstStyle/>
-          <a:p>
-            <a:pPr algn="just" latinLnBrk="1">
-              <a:lnSpc>
-                <a:spcPct val="107000"/>
-              </a:lnSpc>
-              <a:spcAft>
-                <a:spcPts val="800"/>
-              </a:spcAft>
-            </a:pPr>
-            <a:endParaRPr lang="ko-KR" altLang="ko-KR" sz="1800" kern="100" dirty="0">
-              <a:effectLst/>
-              <a:latin typeface="맑은 고딕" panose="020B0503020000020004" pitchFamily="50" charset="-127"/>
-              <a:ea typeface="맑은 고딕" panose="020B0503020000020004" pitchFamily="50" charset="-127"/>
-              <a:cs typeface="Times New Roman" panose="02020603050405020304" pitchFamily="18" charset="0"/>
-            </a:endParaRPr>
-          </a:p>
-        </p:txBody>
-      </p:sp>
-      <p:sp>
-        <p:nvSpPr>
-          <p:cNvPr id="4" name="슬라이드 번호 개체 틀 3">
-            <a:extLst>
-              <a:ext uri="{FF2B5EF4-FFF2-40B4-BE49-F238E27FC236}">
-                <a16:creationId xmlns:a16="http://schemas.microsoft.com/office/drawing/2014/main" id="{E37AA8B0-0EA3-A42B-05A7-4D3C9D6F64D6}"/>
-              </a:ext>
-            </a:extLst>
-          </p:cNvPr>
-          <p:cNvSpPr>
-            <a:spLocks noGrp="1"/>
-          </p:cNvSpPr>
-          <p:nvPr>
-            <p:ph type="sldNum" sz="quarter" idx="5"/>
-          </p:nvPr>
-        </p:nvSpPr>
-        <p:spPr/>
-        <p:txBody>
-          <a:bodyPr/>
-          <a:lstStyle/>
-          <a:p>
-            <a:fld id="{9C89E238-56E2-498F-AF52-A01BE2759D45}" type="slidenum">
-              <a:rPr lang="ko-KR" altLang="en-US" smtClean="0"/>
-              <a:t>8</a:t>
-            </a:fld>
-            <a:endParaRPr lang="ko-KR" altLang="en-US"/>
-          </a:p>
-        </p:txBody>
-      </p:sp>
-    </p:spTree>
-    <p:extLst>
-      <p:ext uri="{BB962C8B-B14F-4D97-AF65-F5344CB8AC3E}">
-        <p14:creationId xmlns:p14="http://schemas.microsoft.com/office/powerpoint/2010/main" val="1383355518"/>
+        <p14:creationId xmlns:p14="http://schemas.microsoft.com/office/powerpoint/2010/main" val="298870507"/>
       </p:ext>
     </p:extLst>
   </p:cSld>
@@ -1517,7 +1395,7 @@
             <a:fld id="{E82DF42D-C26A-4375-B368-FAF0EBA87C58}" type="datetime1">
               <a:rPr lang="ko-KR" altLang="en-US" smtClean="0"/>
               <a:pPr/>
-              <a:t>2026-05-24</a:t>
+              <a:t>2026-06-03</a:t>
             </a:fld>
             <a:endParaRPr lang="ko-KR" altLang="en-US"/>
           </a:p>
@@ -2068,7 +1946,7 @@
           <a:p>
             <a:fld id="{36D93B1B-B5EE-4A23-BCBF-70303C04E53B}" type="datetime1">
               <a:rPr lang="ko-KR" altLang="en-US" smtClean="0"/>
-              <a:t>2026-05-24</a:t>
+              <a:t>2026-06-03</a:t>
             </a:fld>
             <a:endParaRPr lang="ko-KR" altLang="en-US"/>
           </a:p>
@@ -2238,7 +2116,7 @@
           <a:p>
             <a:fld id="{87D9A68F-B257-41D6-8EEE-71F3321D82BB}" type="datetime1">
               <a:rPr lang="ko-KR" altLang="en-US" smtClean="0"/>
-              <a:t>2026-05-24</a:t>
+              <a:t>2026-06-03</a:t>
             </a:fld>
             <a:endParaRPr lang="ko-KR" altLang="en-US"/>
           </a:p>
@@ -2418,7 +2296,7 @@
           <a:p>
             <a:fld id="{47152ABA-F8E3-411C-9195-D1577316D2A8}" type="datetime1">
               <a:rPr lang="ko-KR" altLang="en-US" smtClean="0"/>
-              <a:t>2026-05-24</a:t>
+              <a:t>2026-06-03</a:t>
             </a:fld>
             <a:endParaRPr lang="ko-KR" altLang="en-US"/>
           </a:p>
@@ -2626,7 +2504,7 @@
           <a:p>
             <a:fld id="{19698F1D-BA91-4187-8533-6A2018F40157}" type="datetime1">
               <a:rPr lang="ko-KR" altLang="en-US" smtClean="0"/>
-              <a:t>2026-05-24</a:t>
+              <a:t>2026-06-03</a:t>
             </a:fld>
             <a:endParaRPr lang="ko-KR" altLang="en-US"/>
           </a:p>
@@ -2824,7 +2702,7 @@
           <a:p>
             <a:fld id="{7BC5BA26-696B-4FA3-868F-42D610F6768C}" type="datetime1">
               <a:rPr lang="ko-KR" altLang="en-US" smtClean="0"/>
-              <a:t>2026-05-24</a:t>
+              <a:t>2026-06-03</a:t>
             </a:fld>
             <a:endParaRPr lang="ko-KR" altLang="en-US"/>
           </a:p>
@@ -3099,7 +2977,7 @@
           <a:p>
             <a:fld id="{8E6BEB65-7B45-4057-8EC6-19CD3BF64D90}" type="datetime1">
               <a:rPr lang="ko-KR" altLang="en-US" smtClean="0"/>
-              <a:t>2026-05-24</a:t>
+              <a:t>2026-06-03</a:t>
             </a:fld>
             <a:endParaRPr lang="ko-KR" altLang="en-US"/>
           </a:p>
@@ -3364,7 +3242,7 @@
           <a:p>
             <a:fld id="{85918932-96FD-4B52-9C59-83E087F8E6AC}" type="datetime1">
               <a:rPr lang="ko-KR" altLang="en-US" smtClean="0"/>
-              <a:t>2026-05-24</a:t>
+              <a:t>2026-06-03</a:t>
             </a:fld>
             <a:endParaRPr lang="ko-KR" altLang="en-US"/>
           </a:p>
@@ -3776,7 +3654,7 @@
           <a:p>
             <a:fld id="{9BF1E07A-12F4-4ECE-9405-EBF8A6551431}" type="datetime1">
               <a:rPr lang="ko-KR" altLang="en-US" smtClean="0"/>
-              <a:t>2026-05-24</a:t>
+              <a:t>2026-06-03</a:t>
             </a:fld>
             <a:endParaRPr lang="ko-KR" altLang="en-US"/>
           </a:p>
@@ -3917,7 +3795,7 @@
           <a:p>
             <a:fld id="{DBE4BB8F-A6C9-4BA9-A949-A06A4111CE3B}" type="datetime1">
               <a:rPr lang="ko-KR" altLang="en-US" smtClean="0"/>
-              <a:t>2026-05-24</a:t>
+              <a:t>2026-06-03</a:t>
             </a:fld>
             <a:endParaRPr lang="ko-KR" altLang="en-US"/>
           </a:p>
@@ -4030,7 +3908,7 @@
           <a:p>
             <a:fld id="{ACCE0811-276B-423F-81CD-5A35C7424D97}" type="datetime1">
               <a:rPr lang="ko-KR" altLang="en-US" smtClean="0"/>
-              <a:t>2026-05-24</a:t>
+              <a:t>2026-06-03</a:t>
             </a:fld>
             <a:endParaRPr lang="ko-KR" altLang="en-US"/>
           </a:p>
@@ -4238,7 +4116,7 @@
           <a:p>
             <a:fld id="{75E63B77-7ECA-415E-97DE-FE3290E3277D}" type="datetime1">
               <a:rPr lang="ko-KR" altLang="en-US" smtClean="0"/>
-              <a:t>2026-05-24</a:t>
+              <a:t>2026-06-03</a:t>
             </a:fld>
             <a:endParaRPr lang="ko-KR" altLang="en-US"/>
           </a:p>
@@ -4761,7 +4639,7 @@
           <a:p>
             <a:fld id="{F6E19317-9191-4210-AE7C-5208CD2DD4DD}" type="datetime1">
               <a:rPr lang="ko-KR" altLang="en-US" smtClean="0"/>
-              <a:t>2026-05-24</a:t>
+              <a:t>2026-06-03</a:t>
             </a:fld>
             <a:endParaRPr lang="ko-KR" altLang="en-US"/>
           </a:p>
@@ -5049,7 +4927,7 @@
           <a:p>
             <a:fld id="{F9AAA930-387F-4297-88AA-EB30CC424A44}" type="datetime1">
               <a:rPr lang="ko-KR" altLang="en-US" smtClean="0"/>
-              <a:t>2026-05-24</a:t>
+              <a:t>2026-06-03</a:t>
             </a:fld>
             <a:endParaRPr lang="ko-KR" altLang="en-US"/>
           </a:p>
@@ -5247,7 +5125,7 @@
           <a:p>
             <a:fld id="{58CEDD14-F7CF-4BA6-AC42-D4C3C89F586C}" type="datetime1">
               <a:rPr lang="ko-KR" altLang="en-US" smtClean="0"/>
-              <a:t>2026-05-24</a:t>
+              <a:t>2026-06-03</a:t>
             </a:fld>
             <a:endParaRPr lang="ko-KR" altLang="en-US"/>
           </a:p>
@@ -5455,7 +5333,7 @@
           <a:p>
             <a:fld id="{CB84D0FF-9CFE-4932-90E4-9E220B9E9B2A}" type="datetime1">
               <a:rPr lang="ko-KR" altLang="en-US" smtClean="0"/>
-              <a:t>2026-05-24</a:t>
+              <a:t>2026-06-03</a:t>
             </a:fld>
             <a:endParaRPr lang="ko-KR" altLang="en-US"/>
           </a:p>
@@ -5659,7 +5537,7 @@
           <a:p>
             <a:fld id="{507513CD-06CD-4242-9C49-C8065E960F5A}" type="datetime1">
               <a:rPr lang="ko-KR" altLang="en-US" smtClean="0"/>
-              <a:t>2026-05-24</a:t>
+              <a:t>2026-06-03</a:t>
             </a:fld>
             <a:endParaRPr lang="ko-KR" altLang="en-US"/>
           </a:p>
@@ -5987,7 +5865,7 @@
           <a:p>
             <a:fld id="{0D5928A6-7617-4A41-8036-7AA98D2D9BA0}" type="datetime1">
               <a:rPr lang="ko-KR" altLang="en-US" smtClean="0"/>
-              <a:t>2026-05-24</a:t>
+              <a:t>2026-06-03</a:t>
             </a:fld>
             <a:endParaRPr lang="ko-KR" altLang="en-US"/>
           </a:p>
@@ -6302,7 +6180,7 @@
           <a:p>
             <a:fld id="{0F0F934D-8911-4B98-B20D-63994CDF9AB9}" type="datetime1">
               <a:rPr lang="ko-KR" altLang="en-US" smtClean="0"/>
-              <a:t>2026-05-24</a:t>
+              <a:t>2026-06-03</a:t>
             </a:fld>
             <a:endParaRPr lang="ko-KR" altLang="en-US"/>
           </a:p>
@@ -6669,7 +6547,7 @@
           <a:p>
             <a:fld id="{39CD2CCF-FDBC-49C0-A2AA-CC222EB88CCD}" type="datetime1">
               <a:rPr lang="ko-KR" altLang="en-US" smtClean="0"/>
-              <a:t>2026-05-24</a:t>
+              <a:t>2026-06-03</a:t>
             </a:fld>
             <a:endParaRPr lang="ko-KR" altLang="en-US"/>
           </a:p>
@@ -6793,7 +6671,7 @@
           <a:p>
             <a:fld id="{6733BDC7-1D08-4E86-A061-822402492D30}" type="datetime1">
               <a:rPr lang="ko-KR" altLang="en-US" smtClean="0"/>
-              <a:t>2026-05-24</a:t>
+              <a:t>2026-06-03</a:t>
             </a:fld>
             <a:endParaRPr lang="ko-KR" altLang="en-US"/>
           </a:p>
@@ -6888,7 +6766,7 @@
           <a:p>
             <a:fld id="{060EF629-35CE-4F7E-BA1E-91B974FCD5E4}" type="datetime1">
               <a:rPr lang="ko-KR" altLang="en-US" smtClean="0"/>
-              <a:t>2026-05-24</a:t>
+              <a:t>2026-06-03</a:t>
             </a:fld>
             <a:endParaRPr lang="ko-KR" altLang="en-US"/>
           </a:p>
@@ -7165,7 +7043,7 @@
           <a:p>
             <a:fld id="{5B1081CF-D999-4982-B77B-692A70A6EC26}" type="datetime1">
               <a:rPr lang="ko-KR" altLang="en-US" smtClean="0"/>
-              <a:t>2026-05-24</a:t>
+              <a:t>2026-06-03</a:t>
             </a:fld>
             <a:endParaRPr lang="ko-KR" altLang="en-US"/>
           </a:p>
@@ -7378,7 +7256,7 @@
           <a:p>
             <a:fld id="{BD21F774-DA95-4AD4-A682-08F75A053250}" type="datetime1">
               <a:rPr lang="ko-KR" altLang="en-US" smtClean="0"/>
-              <a:t>2026-05-24</a:t>
+              <a:t>2026-06-03</a:t>
             </a:fld>
             <a:endParaRPr lang="ko-KR" altLang="en-US"/>
           </a:p>
@@ -7936,7 +7814,7 @@
           <a:p>
             <a:fld id="{16FFC6AE-FB71-4C7E-AAD4-D04A58C5072D}" type="datetime1">
               <a:rPr lang="ko-KR" altLang="en-US" smtClean="0"/>
-              <a:t>2026-05-24</a:t>
+              <a:t>2026-06-03</a:t>
             </a:fld>
             <a:endParaRPr lang="ko-KR" altLang="en-US"/>
           </a:p>
@@ -8380,7 +8258,7 @@
                 <a:latin typeface="맑은 고딕" panose="020B0503020000020004" pitchFamily="50" charset="-127"/>
                 <a:cs typeface="Times New Roman" panose="02020603050405020304" pitchFamily="18" charset="0"/>
               </a:rPr>
-              <a:t>Flow chart of System</a:t>
+              <a:t>Designation</a:t>
             </a:r>
             <a:endParaRPr lang="ko-KR" altLang="en-US" dirty="0"/>
           </a:p>
@@ -8791,15 +8669,7 @@
           <a:p>
             <a:r>
               <a:rPr lang="en-US" altLang="ko-KR" sz="1400" b="1" dirty="0"/>
-              <a:t>3. Generate Bode</a:t>
-            </a:r>
-            <a:r>
-              <a:rPr lang="ko-KR" altLang="en-US" sz="1400" b="1" dirty="0"/>
-              <a:t> </a:t>
-            </a:r>
-            <a:r>
-              <a:rPr lang="en-US" altLang="ko-KR" sz="1400" b="1" dirty="0"/>
-              <a:t>Plot</a:t>
+              <a:t>3. Design of Controller</a:t>
             </a:r>
             <a:endParaRPr lang="ko-KR" altLang="en-US" sz="1400" b="1" dirty="0"/>
           </a:p>
@@ -8860,15 +8730,7 @@
           <a:p>
             <a:r>
               <a:rPr lang="en-US" altLang="ko-KR" sz="1400" b="1" dirty="0"/>
-              <a:t>4. Obtain </a:t>
-            </a:r>
-            <a:r>
-              <a:rPr lang="en-US" altLang="ko-KR" sz="1400" b="1" dirty="0" err="1"/>
-              <a:t>Transfer_function</a:t>
-            </a:r>
-            <a:r>
-              <a:rPr lang="en-US" altLang="ko-KR" sz="1400" b="1" dirty="0"/>
-              <a:t> &amp; Validation</a:t>
+              <a:t>4. Performance Analysis</a:t>
             </a:r>
             <a:endParaRPr lang="ko-KR" altLang="en-US" sz="1400" b="1" dirty="0"/>
           </a:p>
@@ -8902,6 +8764,128 @@
               <a:t>Digital Control and Signal Processing Final Project</a:t>
             </a:r>
             <a:endParaRPr lang="ko-KR" altLang="en-US" sz="1600" dirty="0"/>
+          </a:p>
+        </p:txBody>
+      </p:sp>
+      <p:sp>
+        <p:nvSpPr>
+          <p:cNvPr id="2" name="사각형: 둥근 모서리 1">
+            <a:extLst>
+              <a:ext uri="{FF2B5EF4-FFF2-40B4-BE49-F238E27FC236}">
+                <a16:creationId xmlns:a16="http://schemas.microsoft.com/office/drawing/2014/main" id="{03A97CFF-4012-6449-6287-CDCFB800F789}"/>
+              </a:ext>
+            </a:extLst>
+          </p:cNvPr>
+          <p:cNvSpPr/>
+          <p:nvPr/>
+        </p:nvSpPr>
+        <p:spPr>
+          <a:xfrm>
+            <a:off x="3729990" y="2612643"/>
+            <a:ext cx="4975860" cy="365125"/>
+          </a:xfrm>
+          <a:prstGeom prst="roundRect">
+            <a:avLst>
+              <a:gd name="adj" fmla="val 50000"/>
+            </a:avLst>
+          </a:prstGeom>
+          <a:solidFill>
+            <a:schemeClr val="accent1">
+              <a:lumMod val="75000"/>
+            </a:schemeClr>
+          </a:solidFill>
+          <a:ln w="6350">
+            <a:solidFill>
+              <a:schemeClr val="tx1"/>
+            </a:solidFill>
+          </a:ln>
+        </p:spPr>
+        <p:style>
+          <a:lnRef idx="2">
+            <a:schemeClr val="accent1">
+              <a:shade val="50000"/>
+            </a:schemeClr>
+          </a:lnRef>
+          <a:fillRef idx="1">
+            <a:schemeClr val="accent1"/>
+          </a:fillRef>
+          <a:effectRef idx="0">
+            <a:schemeClr val="accent1"/>
+          </a:effectRef>
+          <a:fontRef idx="minor">
+            <a:schemeClr val="lt1"/>
+          </a:fontRef>
+        </p:style>
+        <p:txBody>
+          <a:bodyPr rtlCol="0" anchor="ctr"/>
+          <a:lstStyle/>
+          <a:p>
+            <a:r>
+              <a:rPr lang="en-US" altLang="ko-KR" sz="1400" b="1" dirty="0"/>
+              <a:t>1. Sensor Modeling</a:t>
+            </a:r>
+            <a:endParaRPr lang="ko-KR" altLang="en-US" sz="1400" b="1" dirty="0"/>
+          </a:p>
+        </p:txBody>
+      </p:sp>
+      <p:sp>
+        <p:nvSpPr>
+          <p:cNvPr id="4" name="사각형: 둥근 모서리 3">
+            <a:extLst>
+              <a:ext uri="{FF2B5EF4-FFF2-40B4-BE49-F238E27FC236}">
+                <a16:creationId xmlns:a16="http://schemas.microsoft.com/office/drawing/2014/main" id="{2CE2C9C4-D8F2-7B03-3534-4882AD362622}"/>
+              </a:ext>
+            </a:extLst>
+          </p:cNvPr>
+          <p:cNvSpPr/>
+          <p:nvPr/>
+        </p:nvSpPr>
+        <p:spPr>
+          <a:xfrm>
+            <a:off x="3729990" y="3207276"/>
+            <a:ext cx="4975860" cy="365125"/>
+          </a:xfrm>
+          <a:prstGeom prst="roundRect">
+            <a:avLst>
+              <a:gd name="adj" fmla="val 50000"/>
+            </a:avLst>
+          </a:prstGeom>
+          <a:solidFill>
+            <a:schemeClr val="bg2">
+              <a:lumMod val="50000"/>
+            </a:schemeClr>
+          </a:solidFill>
+          <a:ln w="6350">
+            <a:solidFill>
+              <a:schemeClr val="tx1"/>
+            </a:solidFill>
+          </a:ln>
+        </p:spPr>
+        <p:style>
+          <a:lnRef idx="2">
+            <a:schemeClr val="accent1">
+              <a:shade val="50000"/>
+            </a:schemeClr>
+          </a:lnRef>
+          <a:fillRef idx="1">
+            <a:schemeClr val="accent1"/>
+          </a:fillRef>
+          <a:effectRef idx="0">
+            <a:schemeClr val="accent1"/>
+          </a:effectRef>
+          <a:fontRef idx="minor">
+            <a:schemeClr val="lt1"/>
+          </a:fontRef>
+        </p:style>
+        <p:txBody>
+          <a:bodyPr rtlCol="0" anchor="ctr"/>
+          <a:lstStyle/>
+          <a:p>
+            <a:r>
+              <a:rPr lang="en-US" altLang="ko-KR" sz="1400" b="1" dirty="0"/>
+              <a:t>2. Structure of Controller</a:t>
+            </a:r>
+            <a:endParaRPr lang="ko-KR" altLang="en-US" sz="1400" b="1" dirty="0"/>
           </a:p>
         </p:txBody>
       </p:sp>
@@ -8977,88 +8961,16 @@
                 <a:latin typeface="+mn-lt"/>
                 <a:ea typeface="나눔스퀘어 Bold" panose="020B0600000101010101" pitchFamily="50" charset="-127"/>
               </a:rPr>
-              <a:t>3</a:t>
-            </a:r>
-            <a:r>
-              <a:rPr lang="en-US" altLang="ko-KR" sz="2400" b="1" dirty="0">
-                <a:latin typeface="+mn-lt"/>
-                <a:ea typeface="나눔스퀘어 Bold" panose="020B0600000101010101" pitchFamily="50" charset="-127"/>
+              <a:t>1. Sensor Modeling / 2. </a:t>
+            </a:r>
+            <a:r>
+              <a:rPr lang="en-US" altLang="ko-KR" b="1" dirty="0">
+                <a:latin typeface="+mj-ea"/>
               </a:rPr>
-              <a:t>. Obtaining Transfer Function &amp; Validation</a:t>
-            </a:r>
-            <a:endParaRPr lang="ko-KR" altLang="en-US" dirty="0">
-              <a:latin typeface="+mn-lt"/>
-            </a:endParaRPr>
-          </a:p>
-        </p:txBody>
-      </p:sp>
-      <p:sp>
-        <p:nvSpPr>
-          <p:cNvPr id="10" name="제목 6">
-            <a:extLst>
-              <a:ext uri="{FF2B5EF4-FFF2-40B4-BE49-F238E27FC236}">
-                <a16:creationId xmlns:a16="http://schemas.microsoft.com/office/drawing/2014/main" id="{7153BE5D-9B14-FBAB-6B26-066B2B93F22D}"/>
-              </a:ext>
-            </a:extLst>
-          </p:cNvPr>
-          <p:cNvSpPr txBox="1">
-            <a:spLocks/>
-          </p:cNvSpPr>
-          <p:nvPr/>
-        </p:nvSpPr>
-        <p:spPr>
-          <a:xfrm>
-            <a:off x="495300" y="902940"/>
-            <a:ext cx="3236690" cy="413292"/>
-          </a:xfrm>
-          <a:prstGeom prst="rect">
-            <a:avLst/>
-          </a:prstGeom>
-        </p:spPr>
-        <p:txBody>
-          <a:bodyPr vert="horz" lIns="91440" tIns="45720" rIns="91440" bIns="45720" rtlCol="0" anchor="ctr">
-            <a:normAutofit fontScale="97500"/>
-          </a:bodyPr>
-          <a:lstStyle>
-            <a:lvl1pPr algn="l" defTabSz="914400" rtl="0" eaLnBrk="1" latinLnBrk="1" hangingPunct="1">
-              <a:lnSpc>
-                <a:spcPct val="90000"/>
-              </a:lnSpc>
-              <a:spcBef>
-                <a:spcPct val="0"/>
-              </a:spcBef>
-              <a:buNone/>
-              <a:defRPr sz="2400" kern="1200">
-                <a:solidFill>
-                  <a:schemeClr val="tx1"/>
-                </a:solidFill>
-                <a:latin typeface="+mj-lt"/>
-                <a:ea typeface="+mj-ea"/>
-                <a:cs typeface="+mj-cs"/>
-              </a:defRPr>
-            </a:lvl1pPr>
-          </a:lstStyle>
-          <a:p>
-            <a:r>
-              <a:rPr lang="en-US" altLang="ko-KR" sz="1600" b="1" dirty="0">
-                <a:latin typeface="+mn-lt"/>
-              </a:rPr>
-              <a:t>Obtaining </a:t>
-            </a:r>
-            <a:r>
-              <a:rPr lang="en-US" altLang="ko-KR" sz="1600" b="1" dirty="0" err="1">
-                <a:latin typeface="+mn-lt"/>
-              </a:rPr>
-              <a:t>freq_responses</a:t>
-            </a:r>
-            <a:r>
-              <a:rPr lang="en-US" altLang="ko-KR" sz="1600" b="1" dirty="0">
-                <a:latin typeface="+mn-lt"/>
-              </a:rPr>
-              <a:t> of Motor </a:t>
-            </a:r>
-            <a:endParaRPr lang="ko-KR" altLang="en-US" sz="1600" b="1" dirty="0">
-              <a:latin typeface="+mn-lt"/>
+              <a:t>Structure of Controller</a:t>
+            </a:r>
+            <a:endParaRPr lang="ko-KR" altLang="en-US" b="1" dirty="0">
+              <a:latin typeface="+mj-ea"/>
             </a:endParaRPr>
           </a:p>
         </p:txBody>
@@ -9092,174 +9004,12 @@
           </a:p>
         </p:txBody>
       </p:sp>
-      <p:sp>
-        <p:nvSpPr>
-          <p:cNvPr id="9" name="Rectangle 8">
+      <p:pic>
+        <p:nvPicPr>
+          <p:cNvPr id="6" name="그림 5">
             <a:extLst>
               <a:ext uri="{FF2B5EF4-FFF2-40B4-BE49-F238E27FC236}">
-                <a16:creationId xmlns:a16="http://schemas.microsoft.com/office/drawing/2014/main" id="{64B73D05-605A-870F-905C-7D62040E8ADB}"/>
-              </a:ext>
-            </a:extLst>
-          </p:cNvPr>
-          <p:cNvSpPr>
-            <a:spLocks noChangeArrowheads="1"/>
-          </p:cNvSpPr>
-          <p:nvPr/>
-        </p:nvSpPr>
-        <p:spPr bwMode="auto">
-          <a:xfrm>
-            <a:off x="6809293" y="3928388"/>
-            <a:ext cx="2985220" cy="1058688"/>
-          </a:xfrm>
-          <a:prstGeom prst="rect">
-            <a:avLst/>
-          </a:prstGeom>
-          <a:noFill/>
-          <a:ln>
-            <a:noFill/>
-          </a:ln>
-          <a:effectLst/>
-          <a:extLst>
-            <a:ext uri="{909E8E84-426E-40DD-AFC4-6F175D3DCCD1}">
-              <a14:hiddenFill xmlns:a14="http://schemas.microsoft.com/office/drawing/2010/main">
-                <a:solidFill>
-                  <a:schemeClr val="accent1"/>
-                </a:solidFill>
-              </a14:hiddenFill>
-            </a:ext>
-            <a:ext uri="{91240B29-F687-4F45-9708-019B960494DF}">
-              <a14:hiddenLine xmlns:a14="http://schemas.microsoft.com/office/drawing/2010/main" w="9525">
-                <a:solidFill>
-                  <a:schemeClr val="tx1"/>
-                </a:solidFill>
-                <a:miter lim="800000"/>
-                <a:headEnd/>
-                <a:tailEnd/>
-              </a14:hiddenLine>
-            </a:ext>
-            <a:ext uri="{AF507438-7753-43E0-B8FC-AC1667EBCBE1}">
-              <a14:hiddenEffects xmlns:a14="http://schemas.microsoft.com/office/drawing/2010/main">
-                <a:effectLst>
-                  <a:outerShdw dist="35921" dir="2700000" algn="ctr" rotWithShape="0">
-                    <a:schemeClr val="bg2"/>
-                  </a:outerShdw>
-                </a:effectLst>
-              </a14:hiddenEffects>
-            </a:ext>
-          </a:extLst>
-        </p:spPr>
-        <p:txBody>
-          <a:bodyPr vert="horz" wrap="square" lIns="68580" tIns="34290" rIns="68580" bIns="34290" numCol="1" anchor="ctr" anchorCtr="0" compatLnSpc="1">
-            <a:prstTxWarp prst="textNoShape">
-              <a:avLst/>
-            </a:prstTxWarp>
-            <a:spAutoFit/>
-          </a:bodyPr>
-          <a:lstStyle/>
-          <a:p>
-            <a:pPr marL="214313" indent="-214313" defTabSz="685800" eaLnBrk="0" fontAlgn="base" hangingPunct="0">
-              <a:lnSpc>
-                <a:spcPct val="150000"/>
-              </a:lnSpc>
-              <a:spcBef>
-                <a:spcPct val="0"/>
-              </a:spcBef>
-              <a:spcAft>
-                <a:spcPct val="0"/>
-              </a:spcAft>
-              <a:buFont typeface="Wingdings" pitchFamily="2" charset="2"/>
-              <a:buChar char="§"/>
-            </a:pPr>
-            <a:r>
-              <a:rPr lang="en-US" altLang="ko-KR" sz="1100" dirty="0">
-                <a:cs typeface="Arial" panose="020B0604020202020204" pitchFamily="34" charset="0"/>
-              </a:rPr>
-              <a:t>Range of Check: 0.2 – 5.8 [Hz]</a:t>
-            </a:r>
-          </a:p>
-          <a:p>
-            <a:pPr marL="214313" indent="-214313" defTabSz="685800" eaLnBrk="0" fontAlgn="base" hangingPunct="0">
-              <a:lnSpc>
-                <a:spcPct val="150000"/>
-              </a:lnSpc>
-              <a:spcBef>
-                <a:spcPct val="0"/>
-              </a:spcBef>
-              <a:spcAft>
-                <a:spcPct val="0"/>
-              </a:spcAft>
-              <a:buFont typeface="Wingdings" pitchFamily="2" charset="2"/>
-              <a:buChar char="§"/>
-            </a:pPr>
-            <a:r>
-              <a:rPr lang="en-US" altLang="ko-KR" sz="1100" dirty="0">
-                <a:cs typeface="Arial" panose="020B0604020202020204" pitchFamily="34" charset="0"/>
-              </a:rPr>
-              <a:t>Bandwidth: ~ 3.0 [Hz]</a:t>
-            </a:r>
-          </a:p>
-          <a:p>
-            <a:pPr marL="214313" indent="-214313" defTabSz="685800" eaLnBrk="0" fontAlgn="base" hangingPunct="0">
-              <a:lnSpc>
-                <a:spcPct val="150000"/>
-              </a:lnSpc>
-              <a:spcBef>
-                <a:spcPct val="0"/>
-              </a:spcBef>
-              <a:spcAft>
-                <a:spcPct val="0"/>
-              </a:spcAft>
-              <a:buFont typeface="Wingdings" pitchFamily="2" charset="2"/>
-              <a:buChar char="§"/>
-            </a:pPr>
-            <a:r>
-              <a:rPr lang="en-US" altLang="ko-KR" sz="1100" dirty="0" err="1">
-                <a:cs typeface="Arial" panose="020B0604020202020204" pitchFamily="34" charset="0"/>
-              </a:rPr>
-              <a:t>System_order</a:t>
-            </a:r>
-            <a:r>
-              <a:rPr lang="en-US" altLang="ko-KR" sz="1100" dirty="0">
-                <a:cs typeface="Arial" panose="020B0604020202020204" pitchFamily="34" charset="0"/>
-              </a:rPr>
-              <a:t>: 1st</a:t>
-            </a:r>
-          </a:p>
-          <a:p>
-            <a:pPr marL="214313" indent="-214313" defTabSz="685800" eaLnBrk="0" fontAlgn="base" hangingPunct="0">
-              <a:lnSpc>
-                <a:spcPct val="150000"/>
-              </a:lnSpc>
-              <a:spcBef>
-                <a:spcPct val="0"/>
-              </a:spcBef>
-              <a:spcAft>
-                <a:spcPct val="0"/>
-              </a:spcAft>
-              <a:buFont typeface="Wingdings" pitchFamily="2" charset="2"/>
-              <a:buChar char="§"/>
-            </a:pPr>
-            <a:r>
-              <a:rPr lang="en-US" altLang="ko-KR" sz="1100" dirty="0" err="1">
-                <a:cs typeface="Arial" panose="020B0604020202020204" pitchFamily="34" charset="0"/>
-              </a:rPr>
-              <a:t>DC_gain</a:t>
-            </a:r>
-            <a:r>
-              <a:rPr lang="en-US" altLang="ko-KR" sz="1100" dirty="0">
-                <a:cs typeface="Arial" panose="020B0604020202020204" pitchFamily="34" charset="0"/>
-              </a:rPr>
-              <a:t>: ~ 1112.43 [deg/sec]</a:t>
-            </a:r>
-          </a:p>
-        </p:txBody>
-      </p:sp>
-      <p:pic>
-        <p:nvPicPr>
-          <p:cNvPr id="8" name="그림 7">
-            <a:extLst>
-              <a:ext uri="{FF2B5EF4-FFF2-40B4-BE49-F238E27FC236}">
-                <a16:creationId xmlns:a16="http://schemas.microsoft.com/office/drawing/2014/main" id="{ECE337FD-A38A-A5BD-7B07-8575F55B2DBB}"/>
+                <a16:creationId xmlns:a16="http://schemas.microsoft.com/office/drawing/2014/main" id="{4D1CEA34-45CD-122C-2429-ECF20E6806F1}"/>
               </a:ext>
             </a:extLst>
           </p:cNvPr>
@@ -9276,14 +9026,847 @@
         </p:blipFill>
         <p:spPr>
           <a:xfrm>
-            <a:off x="261138" y="1530293"/>
-            <a:ext cx="6548155" cy="4189309"/>
+            <a:off x="293699" y="956281"/>
+            <a:ext cx="8556601" cy="1823603"/>
           </a:xfrm>
           <a:prstGeom prst="rect">
             <a:avLst/>
           </a:prstGeom>
         </p:spPr>
       </p:pic>
+      <mc:AlternateContent xmlns:mc="http://schemas.openxmlformats.org/markup-compatibility/2006">
+        <mc:Choice xmlns:a14="http://schemas.microsoft.com/office/drawing/2010/main" Requires="a14">
+          <p:sp>
+            <p:nvSpPr>
+              <p:cNvPr id="11" name="제목 6">
+                <a:extLst>
+                  <a:ext uri="{FF2B5EF4-FFF2-40B4-BE49-F238E27FC236}">
+                    <a16:creationId xmlns:a16="http://schemas.microsoft.com/office/drawing/2014/main" id="{C54F41C7-8B9B-48DB-03D2-4BB66BAADA78}"/>
+                  </a:ext>
+                </a:extLst>
+              </p:cNvPr>
+              <p:cNvSpPr txBox="1">
+                <a:spLocks/>
+              </p:cNvSpPr>
+              <p:nvPr/>
+            </p:nvSpPr>
+            <p:spPr>
+              <a:xfrm>
+                <a:off x="293699" y="3257477"/>
+                <a:ext cx="6322060" cy="2621280"/>
+              </a:xfrm>
+              <a:prstGeom prst="rect">
+                <a:avLst/>
+              </a:prstGeom>
+            </p:spPr>
+            <p:txBody>
+              <a:bodyPr vert="horz" lIns="91440" tIns="45720" rIns="91440" bIns="45720" rtlCol="0" anchor="t" anchorCtr="0">
+                <a:normAutofit fontScale="97500"/>
+              </a:bodyPr>
+              <a:lstStyle>
+                <a:lvl1pPr algn="l" defTabSz="914400" rtl="0" eaLnBrk="1" latinLnBrk="1" hangingPunct="1">
+                  <a:lnSpc>
+                    <a:spcPct val="90000"/>
+                  </a:lnSpc>
+                  <a:spcBef>
+                    <a:spcPct val="0"/>
+                  </a:spcBef>
+                  <a:buNone/>
+                  <a:defRPr sz="2400" kern="1200">
+                    <a:solidFill>
+                      <a:schemeClr val="tx1"/>
+                    </a:solidFill>
+                    <a:latin typeface="+mj-lt"/>
+                    <a:ea typeface="+mj-ea"/>
+                    <a:cs typeface="+mj-cs"/>
+                  </a:defRPr>
+                </a:lvl1pPr>
+              </a:lstStyle>
+              <a:p>
+                <a:r>
+                  <a:rPr lang="en-US" altLang="ko-KR" sz="1600" b="1" dirty="0">
+                    <a:latin typeface="+mn-lt"/>
+                  </a:rPr>
+                  <a:t>Closed loop Transfer function: </a:t>
+                </a:r>
+              </a:p>
+              <a:p>
+                <a:endParaRPr lang="en-US" altLang="ko-KR" sz="1600" b="1" dirty="0">
+                  <a:latin typeface="+mn-lt"/>
+                </a:endParaRPr>
+              </a:p>
+              <a:p>
+                <a:pPr marL="285750" indent="-285750">
+                  <a:buFont typeface="Arial" panose="020B0604020202020204" pitchFamily="34" charset="0"/>
+                  <a:buChar char="•"/>
+                </a:pPr>
+                <a14:m>
+                  <m:oMath xmlns:m="http://schemas.openxmlformats.org/officeDocument/2006/math">
+                    <m:sSub>
+                      <m:sSubPr>
+                        <m:ctrlPr>
+                          <a:rPr lang="en-US" altLang="ko-KR" sz="1800" i="1" smtClean="0">
+                            <a:latin typeface="Cambria Math" panose="02040503050406030204" pitchFamily="18" charset="0"/>
+                          </a:rPr>
+                        </m:ctrlPr>
+                      </m:sSubPr>
+                      <m:e>
+                        <m:r>
+                          <a:rPr lang="en-US" altLang="ko-KR" sz="1800" b="0" i="1" smtClean="0">
+                            <a:latin typeface="Cambria Math" panose="02040503050406030204" pitchFamily="18" charset="0"/>
+                          </a:rPr>
+                          <m:t>𝐺</m:t>
+                        </m:r>
+                      </m:e>
+                      <m:sub>
+                        <m:r>
+                          <a:rPr lang="en-US" altLang="ko-KR" sz="1800" b="0" i="1" smtClean="0">
+                            <a:latin typeface="Cambria Math" panose="02040503050406030204" pitchFamily="18" charset="0"/>
+                          </a:rPr>
+                          <m:t>𝑐𝑙</m:t>
+                        </m:r>
+                      </m:sub>
+                    </m:sSub>
+                    <m:r>
+                      <a:rPr lang="en-US" altLang="ko-KR" sz="1800" b="0" i="1" smtClean="0">
+                        <a:latin typeface="Cambria Math" panose="02040503050406030204" pitchFamily="18" charset="0"/>
+                      </a:rPr>
+                      <m:t>=</m:t>
+                    </m:r>
+                    <m:f>
+                      <m:fPr>
+                        <m:ctrlPr>
+                          <a:rPr lang="en-US" altLang="ko-KR" sz="1800" i="1" smtClean="0">
+                            <a:latin typeface="Cambria Math" panose="02040503050406030204" pitchFamily="18" charset="0"/>
+                          </a:rPr>
+                        </m:ctrlPr>
+                      </m:fPr>
+                      <m:num>
+                        <m:sSub>
+                          <m:sSubPr>
+                            <m:ctrlPr>
+                              <a:rPr lang="en-US" altLang="ko-KR" sz="1800" i="1" smtClean="0">
+                                <a:latin typeface="Cambria Math" panose="02040503050406030204" pitchFamily="18" charset="0"/>
+                              </a:rPr>
+                            </m:ctrlPr>
+                          </m:sSubPr>
+                          <m:e>
+                            <m:r>
+                              <a:rPr lang="en-US" altLang="ko-KR" sz="1800" b="0" i="1" smtClean="0">
+                                <a:latin typeface="Cambria Math" panose="02040503050406030204" pitchFamily="18" charset="0"/>
+                              </a:rPr>
+                              <m:t>𝐾</m:t>
+                            </m:r>
+                          </m:e>
+                          <m:sub>
+                            <m:r>
+                              <a:rPr lang="en-US" altLang="ko-KR" sz="1800" b="0" i="1" smtClean="0">
+                                <a:latin typeface="Cambria Math" panose="02040503050406030204" pitchFamily="18" charset="0"/>
+                              </a:rPr>
+                              <m:t>𝑝</m:t>
+                            </m:r>
+                          </m:sub>
+                        </m:sSub>
+                        <m:sSub>
+                          <m:sSubPr>
+                            <m:ctrlPr>
+                              <a:rPr lang="en-US" altLang="ko-KR" sz="1800" i="1" smtClean="0">
+                                <a:latin typeface="Cambria Math" panose="02040503050406030204" pitchFamily="18" charset="0"/>
+                              </a:rPr>
+                            </m:ctrlPr>
+                          </m:sSubPr>
+                          <m:e>
+                            <m:r>
+                              <a:rPr lang="en-US" altLang="ko-KR" sz="1800" b="0" i="1" smtClean="0">
+                                <a:latin typeface="Cambria Math" panose="02040503050406030204" pitchFamily="18" charset="0"/>
+                              </a:rPr>
+                              <m:t>𝐾</m:t>
+                            </m:r>
+                          </m:e>
+                          <m:sub>
+                            <m:r>
+                              <a:rPr lang="en-US" altLang="ko-KR" sz="1800" b="0" i="1" smtClean="0">
+                                <a:latin typeface="Cambria Math" panose="02040503050406030204" pitchFamily="18" charset="0"/>
+                              </a:rPr>
+                              <m:t>𝑚</m:t>
+                            </m:r>
+                          </m:sub>
+                        </m:sSub>
+                      </m:num>
+                      <m:den>
+                        <m:sSup>
+                          <m:sSupPr>
+                            <m:ctrlPr>
+                              <a:rPr lang="en-US" altLang="ko-KR" sz="1800" i="1" smtClean="0">
+                                <a:latin typeface="Cambria Math" panose="02040503050406030204" pitchFamily="18" charset="0"/>
+                              </a:rPr>
+                            </m:ctrlPr>
+                          </m:sSupPr>
+                          <m:e>
+                            <m:r>
+                              <a:rPr lang="en-US" altLang="ko-KR" sz="1800" b="0" i="1" smtClean="0">
+                                <a:latin typeface="Cambria Math" panose="02040503050406030204" pitchFamily="18" charset="0"/>
+                              </a:rPr>
+                              <m:t>𝑠</m:t>
+                            </m:r>
+                          </m:e>
+                          <m:sup>
+                            <m:r>
+                              <a:rPr lang="en-US" altLang="ko-KR" sz="1800" b="0" i="1" smtClean="0">
+                                <a:latin typeface="Cambria Math" panose="02040503050406030204" pitchFamily="18" charset="0"/>
+                              </a:rPr>
+                              <m:t>2</m:t>
+                            </m:r>
+                          </m:sup>
+                        </m:sSup>
+                        <m:r>
+                          <a:rPr lang="en-US" altLang="ko-KR" sz="1800" b="0" i="1" smtClean="0">
+                            <a:latin typeface="Cambria Math" panose="02040503050406030204" pitchFamily="18" charset="0"/>
+                          </a:rPr>
+                          <m:t>+</m:t>
+                        </m:r>
+                        <m:d>
+                          <m:dPr>
+                            <m:ctrlPr>
+                              <a:rPr lang="en-US" altLang="ko-KR" sz="1800" i="1" smtClean="0">
+                                <a:latin typeface="Cambria Math" panose="02040503050406030204" pitchFamily="18" charset="0"/>
+                              </a:rPr>
+                            </m:ctrlPr>
+                          </m:dPr>
+                          <m:e>
+                            <m:sSub>
+                              <m:sSubPr>
+                                <m:ctrlPr>
+                                  <a:rPr lang="en-US" altLang="ko-KR" sz="1800" i="1" smtClean="0">
+                                    <a:latin typeface="Cambria Math" panose="02040503050406030204" pitchFamily="18" charset="0"/>
+                                  </a:rPr>
+                                </m:ctrlPr>
+                              </m:sSubPr>
+                              <m:e>
+                                <m:r>
+                                  <a:rPr lang="en-US" altLang="ko-KR" sz="1800" b="0" i="1" smtClean="0">
+                                    <a:latin typeface="Cambria Math" panose="02040503050406030204" pitchFamily="18" charset="0"/>
+                                  </a:rPr>
+                                  <m:t>𝑃</m:t>
+                                </m:r>
+                              </m:e>
+                              <m:sub>
+                                <m:r>
+                                  <a:rPr lang="en-US" altLang="ko-KR" sz="1800" b="0" i="1" smtClean="0">
+                                    <a:latin typeface="Cambria Math" panose="02040503050406030204" pitchFamily="18" charset="0"/>
+                                  </a:rPr>
+                                  <m:t>𝑚</m:t>
+                                </m:r>
+                              </m:sub>
+                            </m:sSub>
+                            <m:r>
+                              <a:rPr lang="en-US" altLang="ko-KR" sz="1800" b="0" i="1" smtClean="0">
+                                <a:latin typeface="Cambria Math" panose="02040503050406030204" pitchFamily="18" charset="0"/>
+                              </a:rPr>
+                              <m:t>+</m:t>
+                            </m:r>
+                            <m:sSub>
+                              <m:sSubPr>
+                                <m:ctrlPr>
+                                  <a:rPr lang="en-US" altLang="ko-KR" sz="1800" i="1" smtClean="0">
+                                    <a:latin typeface="Cambria Math" panose="02040503050406030204" pitchFamily="18" charset="0"/>
+                                  </a:rPr>
+                                </m:ctrlPr>
+                              </m:sSubPr>
+                              <m:e>
+                                <m:r>
+                                  <a:rPr lang="en-US" altLang="ko-KR" sz="1800" b="0" i="1" smtClean="0">
+                                    <a:latin typeface="Cambria Math" panose="02040503050406030204" pitchFamily="18" charset="0"/>
+                                  </a:rPr>
+                                  <m:t>𝐾</m:t>
+                                </m:r>
+                              </m:e>
+                              <m:sub>
+                                <m:r>
+                                  <a:rPr lang="en-US" altLang="ko-KR" sz="1800" b="0" i="1" smtClean="0">
+                                    <a:latin typeface="Cambria Math" panose="02040503050406030204" pitchFamily="18" charset="0"/>
+                                  </a:rPr>
+                                  <m:t>𝑚</m:t>
+                                </m:r>
+                              </m:sub>
+                            </m:sSub>
+                            <m:sSub>
+                              <m:sSubPr>
+                                <m:ctrlPr>
+                                  <a:rPr lang="en-US" altLang="ko-KR" sz="1800" i="1" smtClean="0">
+                                    <a:latin typeface="Cambria Math" panose="02040503050406030204" pitchFamily="18" charset="0"/>
+                                  </a:rPr>
+                                </m:ctrlPr>
+                              </m:sSubPr>
+                              <m:e>
+                                <m:r>
+                                  <a:rPr lang="en-US" altLang="ko-KR" sz="1800" b="0" i="1" smtClean="0">
+                                    <a:latin typeface="Cambria Math" panose="02040503050406030204" pitchFamily="18" charset="0"/>
+                                  </a:rPr>
+                                  <m:t>𝐾</m:t>
+                                </m:r>
+                              </m:e>
+                              <m:sub>
+                                <m:r>
+                                  <a:rPr lang="en-US" altLang="ko-KR" sz="1800" b="0" i="1" smtClean="0">
+                                    <a:latin typeface="Cambria Math" panose="02040503050406030204" pitchFamily="18" charset="0"/>
+                                  </a:rPr>
+                                  <m:t>𝑑</m:t>
+                                </m:r>
+                              </m:sub>
+                            </m:sSub>
+                          </m:e>
+                        </m:d>
+                        <m:r>
+                          <a:rPr lang="en-US" altLang="ko-KR" sz="1800" b="0" i="1" smtClean="0">
+                            <a:latin typeface="Cambria Math" panose="02040503050406030204" pitchFamily="18" charset="0"/>
+                          </a:rPr>
+                          <m:t>𝑠</m:t>
+                        </m:r>
+                        <m:r>
+                          <a:rPr lang="en-US" altLang="ko-KR" sz="1800" b="0" i="1" smtClean="0">
+                            <a:latin typeface="Cambria Math" panose="02040503050406030204" pitchFamily="18" charset="0"/>
+                          </a:rPr>
+                          <m:t>+</m:t>
+                        </m:r>
+                        <m:sSub>
+                          <m:sSubPr>
+                            <m:ctrlPr>
+                              <a:rPr lang="en-US" altLang="ko-KR" sz="1800" i="1" smtClean="0">
+                                <a:latin typeface="Cambria Math" panose="02040503050406030204" pitchFamily="18" charset="0"/>
+                              </a:rPr>
+                            </m:ctrlPr>
+                          </m:sSubPr>
+                          <m:e>
+                            <m:r>
+                              <a:rPr lang="en-US" altLang="ko-KR" sz="1800" b="0" i="1" smtClean="0">
+                                <a:latin typeface="Cambria Math" panose="02040503050406030204" pitchFamily="18" charset="0"/>
+                              </a:rPr>
+                              <m:t>𝐾</m:t>
+                            </m:r>
+                          </m:e>
+                          <m:sub>
+                            <m:r>
+                              <a:rPr lang="en-US" altLang="ko-KR" sz="1800" b="0" i="1" smtClean="0">
+                                <a:latin typeface="Cambria Math" panose="02040503050406030204" pitchFamily="18" charset="0"/>
+                              </a:rPr>
+                              <m:t>𝑚</m:t>
+                            </m:r>
+                          </m:sub>
+                        </m:sSub>
+                        <m:sSub>
+                          <m:sSubPr>
+                            <m:ctrlPr>
+                              <a:rPr lang="en-US" altLang="ko-KR" sz="1800" i="1" smtClean="0">
+                                <a:latin typeface="Cambria Math" panose="02040503050406030204" pitchFamily="18" charset="0"/>
+                              </a:rPr>
+                            </m:ctrlPr>
+                          </m:sSubPr>
+                          <m:e>
+                            <m:r>
+                              <a:rPr lang="en-US" altLang="ko-KR" sz="1800" b="0" i="1" smtClean="0">
+                                <a:latin typeface="Cambria Math" panose="02040503050406030204" pitchFamily="18" charset="0"/>
+                              </a:rPr>
+                              <m:t>𝐾</m:t>
+                            </m:r>
+                          </m:e>
+                          <m:sub>
+                            <m:r>
+                              <a:rPr lang="en-US" altLang="ko-KR" sz="1800" b="0" i="1" smtClean="0">
+                                <a:latin typeface="Cambria Math" panose="02040503050406030204" pitchFamily="18" charset="0"/>
+                              </a:rPr>
+                              <m:t>𝑝</m:t>
+                            </m:r>
+                          </m:sub>
+                        </m:sSub>
+                      </m:den>
+                    </m:f>
+                    <m:r>
+                      <a:rPr lang="en-US" altLang="ko-KR" sz="1800" b="0" i="1" smtClean="0">
+                        <a:latin typeface="Cambria Math" panose="02040503050406030204" pitchFamily="18" charset="0"/>
+                      </a:rPr>
+                      <m:t>=</m:t>
+                    </m:r>
+                    <m:f>
+                      <m:fPr>
+                        <m:ctrlPr>
+                          <a:rPr lang="en-US" altLang="ko-KR" sz="1800" i="1" smtClean="0">
+                            <a:latin typeface="Cambria Math" panose="02040503050406030204" pitchFamily="18" charset="0"/>
+                            <a:ea typeface="Cambria Math" panose="02040503050406030204" pitchFamily="18" charset="0"/>
+                          </a:rPr>
+                        </m:ctrlPr>
+                      </m:fPr>
+                      <m:num>
+                        <m:r>
+                          <a:rPr lang="en-US" altLang="ko-KR" sz="1800" b="0" i="1">
+                            <a:latin typeface="Cambria Math" panose="02040503050406030204" pitchFamily="18" charset="0"/>
+                            <a:ea typeface="Cambria Math" panose="02040503050406030204" pitchFamily="18" charset="0"/>
+                          </a:rPr>
+                          <m:t>∎</m:t>
+                        </m:r>
+                      </m:num>
+                      <m:den>
+                        <m:sSup>
+                          <m:sSupPr>
+                            <m:ctrlPr>
+                              <a:rPr lang="en-US" altLang="ko-KR" sz="1800" i="1" smtClean="0">
+                                <a:latin typeface="Cambria Math" panose="02040503050406030204" pitchFamily="18" charset="0"/>
+                                <a:ea typeface="Cambria Math" panose="02040503050406030204" pitchFamily="18" charset="0"/>
+                              </a:rPr>
+                            </m:ctrlPr>
+                          </m:sSupPr>
+                          <m:e>
+                            <m:r>
+                              <a:rPr lang="en-US" altLang="ko-KR" sz="1800" b="0" i="1" smtClean="0">
+                                <a:latin typeface="Cambria Math" panose="02040503050406030204" pitchFamily="18" charset="0"/>
+                                <a:ea typeface="Cambria Math" panose="02040503050406030204" pitchFamily="18" charset="0"/>
+                              </a:rPr>
+                              <m:t>𝑠</m:t>
+                            </m:r>
+                          </m:e>
+                          <m:sup>
+                            <m:r>
+                              <a:rPr lang="en-US" altLang="ko-KR" sz="1800" b="0" i="1" smtClean="0">
+                                <a:latin typeface="Cambria Math" panose="02040503050406030204" pitchFamily="18" charset="0"/>
+                                <a:ea typeface="Cambria Math" panose="02040503050406030204" pitchFamily="18" charset="0"/>
+                              </a:rPr>
+                              <m:t>2</m:t>
+                            </m:r>
+                          </m:sup>
+                        </m:sSup>
+                        <m:r>
+                          <a:rPr lang="en-US" altLang="ko-KR" sz="1800" b="0" i="1" smtClean="0">
+                            <a:latin typeface="Cambria Math" panose="02040503050406030204" pitchFamily="18" charset="0"/>
+                            <a:ea typeface="Cambria Math" panose="02040503050406030204" pitchFamily="18" charset="0"/>
+                          </a:rPr>
+                          <m:t>+2</m:t>
+                        </m:r>
+                        <m:r>
+                          <a:rPr lang="en-US" altLang="ko-KR" sz="1800" b="0" i="1" smtClean="0">
+                            <a:latin typeface="Cambria Math" panose="02040503050406030204" pitchFamily="18" charset="0"/>
+                            <a:ea typeface="Cambria Math" panose="02040503050406030204" pitchFamily="18" charset="0"/>
+                          </a:rPr>
+                          <m:t>𝜁</m:t>
+                        </m:r>
+                        <m:sSub>
+                          <m:sSubPr>
+                            <m:ctrlPr>
+                              <a:rPr lang="en-US" altLang="ko-KR" sz="1800" i="1" smtClean="0">
+                                <a:latin typeface="Cambria Math" panose="02040503050406030204" pitchFamily="18" charset="0"/>
+                                <a:ea typeface="Cambria Math" panose="02040503050406030204" pitchFamily="18" charset="0"/>
+                              </a:rPr>
+                            </m:ctrlPr>
+                          </m:sSubPr>
+                          <m:e>
+                            <m:r>
+                              <a:rPr lang="en-US" altLang="ko-KR" sz="1800" b="0" i="1" smtClean="0">
+                                <a:latin typeface="Cambria Math" panose="02040503050406030204" pitchFamily="18" charset="0"/>
+                                <a:ea typeface="Cambria Math" panose="02040503050406030204" pitchFamily="18" charset="0"/>
+                              </a:rPr>
+                              <m:t>𝜔</m:t>
+                            </m:r>
+                          </m:e>
+                          <m:sub>
+                            <m:r>
+                              <a:rPr lang="en-US" altLang="ko-KR" sz="1800" b="0" i="1" smtClean="0">
+                                <a:latin typeface="Cambria Math" panose="02040503050406030204" pitchFamily="18" charset="0"/>
+                                <a:ea typeface="Cambria Math" panose="02040503050406030204" pitchFamily="18" charset="0"/>
+                              </a:rPr>
+                              <m:t>𝑐</m:t>
+                            </m:r>
+                          </m:sub>
+                        </m:sSub>
+                        <m:r>
+                          <a:rPr lang="en-US" altLang="ko-KR" sz="1800" b="0" i="1" smtClean="0">
+                            <a:latin typeface="Cambria Math" panose="02040503050406030204" pitchFamily="18" charset="0"/>
+                            <a:ea typeface="Cambria Math" panose="02040503050406030204" pitchFamily="18" charset="0"/>
+                          </a:rPr>
+                          <m:t>𝑠</m:t>
+                        </m:r>
+                        <m:r>
+                          <a:rPr lang="en-US" altLang="ko-KR" sz="1800" b="0" i="1" smtClean="0">
+                            <a:latin typeface="Cambria Math" panose="02040503050406030204" pitchFamily="18" charset="0"/>
+                            <a:ea typeface="Cambria Math" panose="02040503050406030204" pitchFamily="18" charset="0"/>
+                          </a:rPr>
+                          <m:t>+</m:t>
+                        </m:r>
+                        <m:sSubSup>
+                          <m:sSubSupPr>
+                            <m:ctrlPr>
+                              <a:rPr lang="en-US" altLang="ko-KR" sz="1800" i="1" smtClean="0">
+                                <a:latin typeface="Cambria Math" panose="02040503050406030204" pitchFamily="18" charset="0"/>
+                                <a:ea typeface="Cambria Math" panose="02040503050406030204" pitchFamily="18" charset="0"/>
+                              </a:rPr>
+                            </m:ctrlPr>
+                          </m:sSubSupPr>
+                          <m:e>
+                            <m:r>
+                              <a:rPr lang="en-US" altLang="ko-KR" sz="1800" b="0" i="1" smtClean="0">
+                                <a:latin typeface="Cambria Math" panose="02040503050406030204" pitchFamily="18" charset="0"/>
+                                <a:ea typeface="Cambria Math" panose="02040503050406030204" pitchFamily="18" charset="0"/>
+                              </a:rPr>
+                              <m:t>𝜔</m:t>
+                            </m:r>
+                          </m:e>
+                          <m:sub>
+                            <m:r>
+                              <a:rPr lang="en-US" altLang="ko-KR" sz="1800" b="0" i="1" smtClean="0">
+                                <a:latin typeface="Cambria Math" panose="02040503050406030204" pitchFamily="18" charset="0"/>
+                                <a:ea typeface="Cambria Math" panose="02040503050406030204" pitchFamily="18" charset="0"/>
+                              </a:rPr>
+                              <m:t>𝑐</m:t>
+                            </m:r>
+                          </m:sub>
+                          <m:sup>
+                            <m:r>
+                              <a:rPr lang="en-US" altLang="ko-KR" sz="1800" b="0" i="1" smtClean="0">
+                                <a:latin typeface="Cambria Math" panose="02040503050406030204" pitchFamily="18" charset="0"/>
+                                <a:ea typeface="Cambria Math" panose="02040503050406030204" pitchFamily="18" charset="0"/>
+                              </a:rPr>
+                              <m:t>2</m:t>
+                            </m:r>
+                          </m:sup>
+                        </m:sSubSup>
+                      </m:den>
+                    </m:f>
+                  </m:oMath>
+                </a14:m>
+                <a:endParaRPr lang="en-US" altLang="ko-KR" sz="1800" dirty="0">
+                  <a:latin typeface="+mn-lt"/>
+                </a:endParaRPr>
+              </a:p>
+              <a:p>
+                <a:pPr marL="285750" indent="-285750">
+                  <a:buFont typeface="Arial" panose="020B0604020202020204" pitchFamily="34" charset="0"/>
+                  <a:buChar char="•"/>
+                </a:pPr>
+                <a:endParaRPr lang="en-US" altLang="ko-KR" sz="1800" dirty="0">
+                  <a:latin typeface="+mn-lt"/>
+                </a:endParaRPr>
+              </a:p>
+              <a:p>
+                <a:pPr marL="285750" indent="-285750">
+                  <a:buFont typeface="Arial" panose="020B0604020202020204" pitchFamily="34" charset="0"/>
+                  <a:buChar char="•"/>
+                </a:pPr>
+                <a14:m>
+                  <m:oMath xmlns:m="http://schemas.openxmlformats.org/officeDocument/2006/math">
+                    <m:sSub>
+                      <m:sSubPr>
+                        <m:ctrlPr>
+                          <a:rPr lang="en-US" altLang="ko-KR" sz="1800" i="1">
+                            <a:latin typeface="Cambria Math" panose="02040503050406030204" pitchFamily="18" charset="0"/>
+                          </a:rPr>
+                        </m:ctrlPr>
+                      </m:sSubPr>
+                      <m:e>
+                        <m:r>
+                          <a:rPr lang="en-US" altLang="ko-KR" sz="1800" i="1">
+                            <a:latin typeface="Cambria Math" panose="02040503050406030204" pitchFamily="18" charset="0"/>
+                          </a:rPr>
+                          <m:t>𝐾</m:t>
+                        </m:r>
+                      </m:e>
+                      <m:sub>
+                        <m:r>
+                          <a:rPr lang="en-US" altLang="ko-KR" sz="1800" i="1">
+                            <a:latin typeface="Cambria Math" panose="02040503050406030204" pitchFamily="18" charset="0"/>
+                          </a:rPr>
+                          <m:t>𝑝</m:t>
+                        </m:r>
+                      </m:sub>
+                    </m:sSub>
+                    <m:r>
+                      <a:rPr lang="en-US" altLang="ko-KR" sz="1800" i="1">
+                        <a:latin typeface="Cambria Math" panose="02040503050406030204" pitchFamily="18" charset="0"/>
+                      </a:rPr>
+                      <m:t>=</m:t>
+                    </m:r>
+                    <m:f>
+                      <m:fPr>
+                        <m:ctrlPr>
+                          <a:rPr lang="en-US" altLang="ko-KR" sz="1800" i="1">
+                            <a:latin typeface="Cambria Math" panose="02040503050406030204" pitchFamily="18" charset="0"/>
+                          </a:rPr>
+                        </m:ctrlPr>
+                      </m:fPr>
+                      <m:num>
+                        <m:sSubSup>
+                          <m:sSubSupPr>
+                            <m:ctrlPr>
+                              <a:rPr lang="en-US" altLang="ko-KR" sz="1800" i="1">
+                                <a:latin typeface="Cambria Math" panose="02040503050406030204" pitchFamily="18" charset="0"/>
+                              </a:rPr>
+                            </m:ctrlPr>
+                          </m:sSubSupPr>
+                          <m:e>
+                            <m:r>
+                              <a:rPr lang="en-US" altLang="ko-KR" sz="1800" i="1">
+                                <a:latin typeface="Cambria Math" panose="02040503050406030204" pitchFamily="18" charset="0"/>
+                              </a:rPr>
+                              <m:t>𝜔</m:t>
+                            </m:r>
+                          </m:e>
+                          <m:sub>
+                            <m:r>
+                              <a:rPr lang="en-US" altLang="ko-KR" sz="1800" i="1">
+                                <a:latin typeface="Cambria Math" panose="02040503050406030204" pitchFamily="18" charset="0"/>
+                              </a:rPr>
+                              <m:t>𝑐</m:t>
+                            </m:r>
+                          </m:sub>
+                          <m:sup>
+                            <m:r>
+                              <a:rPr lang="en-US" altLang="ko-KR" sz="1800" i="1">
+                                <a:latin typeface="Cambria Math" panose="02040503050406030204" pitchFamily="18" charset="0"/>
+                              </a:rPr>
+                              <m:t>2</m:t>
+                            </m:r>
+                          </m:sup>
+                        </m:sSubSup>
+                      </m:num>
+                      <m:den>
+                        <m:sSub>
+                          <m:sSubPr>
+                            <m:ctrlPr>
+                              <a:rPr lang="en-US" altLang="ko-KR" sz="1800" i="1">
+                                <a:latin typeface="Cambria Math" panose="02040503050406030204" pitchFamily="18" charset="0"/>
+                              </a:rPr>
+                            </m:ctrlPr>
+                          </m:sSubPr>
+                          <m:e>
+                            <m:r>
+                              <a:rPr lang="en-US" altLang="ko-KR" sz="1800" i="1">
+                                <a:latin typeface="Cambria Math" panose="02040503050406030204" pitchFamily="18" charset="0"/>
+                              </a:rPr>
+                              <m:t>𝐾</m:t>
+                            </m:r>
+                          </m:e>
+                          <m:sub>
+                            <m:r>
+                              <a:rPr lang="en-US" altLang="ko-KR" sz="1800" i="1">
+                                <a:latin typeface="Cambria Math" panose="02040503050406030204" pitchFamily="18" charset="0"/>
+                              </a:rPr>
+                              <m:t>𝑚</m:t>
+                            </m:r>
+                          </m:sub>
+                        </m:sSub>
+                      </m:den>
+                    </m:f>
+                  </m:oMath>
+                </a14:m>
+                <a:endParaRPr lang="en-US" altLang="ko-KR" sz="1800" dirty="0">
+                  <a:latin typeface="+mn-lt"/>
+                </a:endParaRPr>
+              </a:p>
+              <a:p>
+                <a:endParaRPr lang="en-US" altLang="ko-KR" sz="1600" dirty="0">
+                  <a:latin typeface="+mn-lt"/>
+                </a:endParaRPr>
+              </a:p>
+              <a:p>
+                <a:pPr marL="285750" indent="-285750">
+                  <a:buFont typeface="Arial" panose="020B0604020202020204" pitchFamily="34" charset="0"/>
+                  <a:buChar char="•"/>
+                </a:pPr>
+                <a14:m>
+                  <m:oMath xmlns:m="http://schemas.openxmlformats.org/officeDocument/2006/math">
+                    <m:sSub>
+                      <m:sSubPr>
+                        <m:ctrlPr>
+                          <a:rPr lang="en-US" altLang="ko-KR" sz="1600" b="0" i="1" smtClean="0">
+                            <a:latin typeface="Cambria Math" panose="02040503050406030204" pitchFamily="18" charset="0"/>
+                          </a:rPr>
+                        </m:ctrlPr>
+                      </m:sSubPr>
+                      <m:e>
+                        <m:r>
+                          <a:rPr lang="en-US" altLang="ko-KR" sz="1600" b="0" i="1" smtClean="0">
+                            <a:latin typeface="Cambria Math" panose="02040503050406030204" pitchFamily="18" charset="0"/>
+                          </a:rPr>
+                          <m:t>𝐾</m:t>
+                        </m:r>
+                      </m:e>
+                      <m:sub>
+                        <m:r>
+                          <a:rPr lang="en-US" altLang="ko-KR" sz="1600" b="0" i="1" smtClean="0">
+                            <a:latin typeface="Cambria Math" panose="02040503050406030204" pitchFamily="18" charset="0"/>
+                          </a:rPr>
+                          <m:t>𝑑</m:t>
+                        </m:r>
+                      </m:sub>
+                    </m:sSub>
+                    <m:r>
+                      <a:rPr lang="en-US" altLang="ko-KR" sz="1600" b="0" i="1" smtClean="0">
+                        <a:latin typeface="Cambria Math" panose="02040503050406030204" pitchFamily="18" charset="0"/>
+                      </a:rPr>
+                      <m:t>=</m:t>
+                    </m:r>
+                    <m:f>
+                      <m:fPr>
+                        <m:ctrlPr>
+                          <a:rPr lang="en-US" altLang="ko-KR" sz="1600" b="0" i="1" smtClean="0">
+                            <a:latin typeface="Cambria Math" panose="02040503050406030204" pitchFamily="18" charset="0"/>
+                          </a:rPr>
+                        </m:ctrlPr>
+                      </m:fPr>
+                      <m:num>
+                        <m:sSub>
+                          <m:sSubPr>
+                            <m:ctrlPr>
+                              <a:rPr lang="en-US" altLang="ko-KR" sz="1600" b="0" i="1" smtClean="0">
+                                <a:latin typeface="Cambria Math" panose="02040503050406030204" pitchFamily="18" charset="0"/>
+                              </a:rPr>
+                            </m:ctrlPr>
+                          </m:sSubPr>
+                          <m:e>
+                            <m:r>
+                              <a:rPr lang="en-US" altLang="ko-KR" sz="1600" i="1">
+                                <a:latin typeface="Cambria Math" panose="02040503050406030204" pitchFamily="18" charset="0"/>
+                              </a:rPr>
+                              <m:t>2</m:t>
+                            </m:r>
+                            <m:r>
+                              <a:rPr lang="en-US" altLang="ko-KR" sz="1600" i="1">
+                                <a:latin typeface="Cambria Math" panose="02040503050406030204" pitchFamily="18" charset="0"/>
+                              </a:rPr>
+                              <m:t>𝜁</m:t>
+                            </m:r>
+                            <m:sSub>
+                              <m:sSubPr>
+                                <m:ctrlPr>
+                                  <a:rPr lang="en-US" altLang="ko-KR" sz="1600" i="1">
+                                    <a:latin typeface="Cambria Math" panose="02040503050406030204" pitchFamily="18" charset="0"/>
+                                  </a:rPr>
+                                </m:ctrlPr>
+                              </m:sSubPr>
+                              <m:e>
+                                <m:r>
+                                  <a:rPr lang="en-US" altLang="ko-KR" sz="1600" i="1">
+                                    <a:latin typeface="Cambria Math" panose="02040503050406030204" pitchFamily="18" charset="0"/>
+                                  </a:rPr>
+                                  <m:t>𝜔</m:t>
+                                </m:r>
+                              </m:e>
+                              <m:sub>
+                                <m:r>
+                                  <a:rPr lang="en-US" altLang="ko-KR" sz="1600" i="1">
+                                    <a:latin typeface="Cambria Math" panose="02040503050406030204" pitchFamily="18" charset="0"/>
+                                  </a:rPr>
+                                  <m:t>𝑐</m:t>
+                                </m:r>
+                              </m:sub>
+                            </m:sSub>
+                            <m:r>
+                              <a:rPr lang="en-US" altLang="ko-KR" sz="1600" i="1">
+                                <a:latin typeface="Cambria Math" panose="02040503050406030204" pitchFamily="18" charset="0"/>
+                              </a:rPr>
+                              <m:t>−</m:t>
+                            </m:r>
+                            <m:r>
+                              <a:rPr lang="en-US" altLang="ko-KR" sz="1600" b="0" i="1" smtClean="0">
+                                <a:latin typeface="Cambria Math" panose="02040503050406030204" pitchFamily="18" charset="0"/>
+                              </a:rPr>
+                              <m:t>𝑃</m:t>
+                            </m:r>
+                          </m:e>
+                          <m:sub>
+                            <m:r>
+                              <a:rPr lang="en-US" altLang="ko-KR" sz="1600" b="0" i="1" smtClean="0">
+                                <a:latin typeface="Cambria Math" panose="02040503050406030204" pitchFamily="18" charset="0"/>
+                              </a:rPr>
+                              <m:t>𝑚</m:t>
+                            </m:r>
+                          </m:sub>
+                        </m:sSub>
+                      </m:num>
+                      <m:den>
+                        <m:sSub>
+                          <m:sSubPr>
+                            <m:ctrlPr>
+                              <a:rPr lang="en-US" altLang="ko-KR" sz="1600" b="0" i="1" smtClean="0">
+                                <a:latin typeface="Cambria Math" panose="02040503050406030204" pitchFamily="18" charset="0"/>
+                              </a:rPr>
+                            </m:ctrlPr>
+                          </m:sSubPr>
+                          <m:e>
+                            <m:r>
+                              <a:rPr lang="en-US" altLang="ko-KR" sz="1600" b="0" i="1" smtClean="0">
+                                <a:latin typeface="Cambria Math" panose="02040503050406030204" pitchFamily="18" charset="0"/>
+                              </a:rPr>
+                              <m:t>𝐾</m:t>
+                            </m:r>
+                          </m:e>
+                          <m:sub>
+                            <m:r>
+                              <a:rPr lang="en-US" altLang="ko-KR" sz="1600" b="0" i="1" smtClean="0">
+                                <a:latin typeface="Cambria Math" panose="02040503050406030204" pitchFamily="18" charset="0"/>
+                              </a:rPr>
+                              <m:t>𝑚</m:t>
+                            </m:r>
+                          </m:sub>
+                        </m:sSub>
+                      </m:den>
+                    </m:f>
+                  </m:oMath>
+                </a14:m>
+                <a:endParaRPr lang="en-US" altLang="ko-KR" sz="1600" dirty="0">
+                  <a:latin typeface="+mn-lt"/>
+                </a:endParaRPr>
+              </a:p>
+              <a:p>
+                <a:endParaRPr lang="en-US" altLang="ko-KR" sz="1600" dirty="0">
+                  <a:latin typeface="+mn-lt"/>
+                </a:endParaRPr>
+              </a:p>
+            </p:txBody>
+          </p:sp>
+        </mc:Choice>
+        <mc:Fallback>
+          <p:sp>
+            <p:nvSpPr>
+              <p:cNvPr id="11" name="제목 6">
+                <a:extLst>
+                  <a:ext uri="{FF2B5EF4-FFF2-40B4-BE49-F238E27FC236}">
+                    <a16:creationId xmlns:a16="http://schemas.microsoft.com/office/drawing/2014/main" id="{C54F41C7-8B9B-48DB-03D2-4BB66BAADA78}"/>
+                  </a:ext>
+                </a:extLst>
+              </p:cNvPr>
+              <p:cNvSpPr txBox="1">
+                <a:spLocks noRot="1" noChangeAspect="1" noMove="1" noResize="1" noEditPoints="1" noAdjustHandles="1" noChangeArrowheads="1" noChangeShapeType="1" noTextEdit="1"/>
+              </p:cNvSpPr>
+              <p:nvPr/>
+            </p:nvSpPr>
+            <p:spPr>
+              <a:xfrm>
+                <a:off x="293699" y="3257477"/>
+                <a:ext cx="6322060" cy="2621280"/>
+              </a:xfrm>
+              <a:prstGeom prst="rect">
+                <a:avLst/>
+              </a:prstGeom>
+              <a:blipFill>
+                <a:blip r:embed="rId4"/>
+                <a:stretch>
+                  <a:fillRect l="-579" t="-1628"/>
+                </a:stretch>
+              </a:blipFill>
+            </p:spPr>
+            <p:txBody>
+              <a:bodyPr/>
+              <a:lstStyle/>
+              <a:p>
+                <a:r>
+                  <a:rPr lang="ko-KR" altLang="en-US">
+                    <a:noFill/>
+                  </a:rPr>
+                  <a:t> </a:t>
+                </a:r>
+              </a:p>
+            </p:txBody>
+          </p:sp>
+        </mc:Fallback>
+      </mc:AlternateContent>
     </p:spTree>
     <p:extLst>
       <p:ext uri="{BB962C8B-B14F-4D97-AF65-F5344CB8AC3E}">
@@ -9313,7 +9896,7 @@
         <p:cNvPr id="1" name="">
           <a:extLst>
             <a:ext uri="{FF2B5EF4-FFF2-40B4-BE49-F238E27FC236}">
-              <a16:creationId xmlns:a16="http://schemas.microsoft.com/office/drawing/2014/main" id="{FF6BBA52-0F34-D769-C561-C7C5C287714E}"/>
+              <a16:creationId xmlns:a16="http://schemas.microsoft.com/office/drawing/2014/main" id="{6481BDDE-CC77-DF9B-CA4F-BB50F7B70A72}"/>
             </a:ext>
           </a:extLst>
         </p:cNvPr>
@@ -9333,7 +9916,7 @@
           <p:cNvPr id="7" name="제목 6">
             <a:extLst>
               <a:ext uri="{FF2B5EF4-FFF2-40B4-BE49-F238E27FC236}">
-                <a16:creationId xmlns:a16="http://schemas.microsoft.com/office/drawing/2014/main" id="{C67562F4-4111-E784-8A9A-0090C82D2D43}"/>
+                <a16:creationId xmlns:a16="http://schemas.microsoft.com/office/drawing/2014/main" id="{90C66154-2671-FA19-21B8-589EBF9931F5}"/>
               </a:ext>
             </a:extLst>
           </p:cNvPr>
@@ -9352,28 +9935,11 @@
           <a:lstStyle/>
           <a:p>
             <a:r>
-              <a:rPr lang="en-US" altLang="ko-KR" sz="2400" b="1" dirty="0">
+              <a:rPr lang="en-US" altLang="ko-KR" b="1" dirty="0">
                 <a:latin typeface="+mn-lt"/>
                 <a:ea typeface="나눔스퀘어 Bold" panose="020B0600000101010101" pitchFamily="50" charset="-127"/>
               </a:rPr>
-              <a:t>4. </a:t>
-            </a:r>
-            <a:r>
-              <a:rPr kumimoji="0" lang="en-US" altLang="ko-KR" sz="2400" b="1" i="0" u="none" strike="noStrike" kern="1200" cap="none" spc="0" normalizeH="0" baseline="0" noProof="0" dirty="0">
-                <a:ln>
-                  <a:noFill/>
-                </a:ln>
-                <a:solidFill>
-                  <a:prstClr val="black"/>
-                </a:solidFill>
-                <a:effectLst/>
-                <a:uLnTx/>
-                <a:uFillTx/>
-                <a:latin typeface="Calibri"/>
-                <a:ea typeface="나눔스퀘어 Bold" panose="020B0600000101010101" pitchFamily="50" charset="-127"/>
-                <a:cs typeface="+mj-cs"/>
-              </a:rPr>
-              <a:t>Obtaining Transfer Function &amp; Validation</a:t>
+              <a:t>3. Model Design Method</a:t>
             </a:r>
             <a:endParaRPr lang="ko-KR" altLang="en-US" b="1" dirty="0">
               <a:latin typeface="+mn-lt"/>
@@ -9381,12 +9947,892 @@
           </a:p>
         </p:txBody>
       </p:sp>
-      <p:sp>
-        <p:nvSpPr>
-          <p:cNvPr id="10" name="제목 6">
+      <mc:AlternateContent xmlns:mc="http://schemas.openxmlformats.org/markup-compatibility/2006">
+        <mc:Choice xmlns:a14="http://schemas.microsoft.com/office/drawing/2010/main" Requires="a14">
+          <p:sp>
+            <p:nvSpPr>
+              <p:cNvPr id="10" name="제목 6">
+                <a:extLst>
+                  <a:ext uri="{FF2B5EF4-FFF2-40B4-BE49-F238E27FC236}">
+                    <a16:creationId xmlns:a16="http://schemas.microsoft.com/office/drawing/2014/main" id="{519B342D-85C4-5C52-4E2C-441424D2BE70}"/>
+                  </a:ext>
+                </a:extLst>
+              </p:cNvPr>
+              <p:cNvSpPr txBox="1">
+                <a:spLocks/>
+              </p:cNvSpPr>
+              <p:nvPr/>
+            </p:nvSpPr>
+            <p:spPr>
+              <a:xfrm>
+                <a:off x="495300" y="902940"/>
+                <a:ext cx="4362450" cy="5370860"/>
+              </a:xfrm>
+              <a:prstGeom prst="rect">
+                <a:avLst/>
+              </a:prstGeom>
+            </p:spPr>
+            <p:txBody>
+              <a:bodyPr vert="horz" lIns="91440" tIns="45720" rIns="91440" bIns="45720" rtlCol="0" anchor="t" anchorCtr="0">
+                <a:normAutofit fontScale="97500"/>
+              </a:bodyPr>
+              <a:lstStyle>
+                <a:lvl1pPr algn="l" defTabSz="914400" rtl="0" eaLnBrk="1" latinLnBrk="1" hangingPunct="1">
+                  <a:lnSpc>
+                    <a:spcPct val="90000"/>
+                  </a:lnSpc>
+                  <a:spcBef>
+                    <a:spcPct val="0"/>
+                  </a:spcBef>
+                  <a:buNone/>
+                  <a:defRPr sz="2400" kern="1200">
+                    <a:solidFill>
+                      <a:schemeClr val="tx1"/>
+                    </a:solidFill>
+                    <a:latin typeface="+mj-lt"/>
+                    <a:ea typeface="+mj-ea"/>
+                    <a:cs typeface="+mj-cs"/>
+                  </a:defRPr>
+                </a:lvl1pPr>
+              </a:lstStyle>
+              <a:p>
+                <a:pPr marL="342900" indent="-342900">
+                  <a:buAutoNum type="alphaUcPeriod"/>
+                </a:pPr>
+                <a:r>
+                  <a:rPr lang="en-US" altLang="ko-KR" sz="1600" b="1" dirty="0">
+                    <a:latin typeface="+mn-lt"/>
+                  </a:rPr>
+                  <a:t>Pole placement</a:t>
+                </a:r>
+              </a:p>
+              <a:p>
+                <a:r>
+                  <a:rPr lang="en-US" altLang="ko-KR" sz="1600" dirty="0">
+                    <a:latin typeface="+mn-lt"/>
+                  </a:rPr>
+                  <a:t>         Relative Stability</a:t>
+                </a:r>
+              </a:p>
+              <a:p>
+                <a:pPr marL="742950" lvl="1" indent="-285750">
+                  <a:lnSpc>
+                    <a:spcPct val="150000"/>
+                  </a:lnSpc>
+                  <a:buFont typeface="Arial" panose="020B0604020202020204" pitchFamily="34" charset="0"/>
+                  <a:buChar char="•"/>
+                </a:pPr>
+                <a14:m>
+                  <m:oMath xmlns:m="http://schemas.openxmlformats.org/officeDocument/2006/math">
+                    <m:r>
+                      <a:rPr lang="en-US" altLang="ko-KR" sz="1600" i="1">
+                        <a:latin typeface="Cambria Math" panose="02040503050406030204" pitchFamily="18" charset="0"/>
+                      </a:rPr>
+                      <m:t>%</m:t>
+                    </m:r>
+                    <m:r>
+                      <a:rPr lang="en-US" altLang="ko-KR" sz="1600" i="1">
+                        <a:latin typeface="Cambria Math" panose="02040503050406030204" pitchFamily="18" charset="0"/>
+                      </a:rPr>
+                      <m:t>𝑂𝑆</m:t>
+                    </m:r>
+                    <m:r>
+                      <a:rPr lang="en-US" altLang="ko-KR" sz="1600" i="1">
+                        <a:latin typeface="Cambria Math" panose="02040503050406030204" pitchFamily="18" charset="0"/>
+                      </a:rPr>
+                      <m:t>&lt;10%</m:t>
+                    </m:r>
+                  </m:oMath>
+                </a14:m>
+                <a:endParaRPr lang="en-US" altLang="ko-KR" sz="1600" i="1" dirty="0">
+                  <a:latin typeface="Cambria Math" panose="02040503050406030204" pitchFamily="18" charset="0"/>
+                </a:endParaRPr>
+              </a:p>
+              <a:p>
+                <a:pPr lvl="1">
+                  <a:lnSpc>
+                    <a:spcPct val="150000"/>
+                  </a:lnSpc>
+                </a:pPr>
+                <a:r>
+                  <a:rPr lang="en-US" altLang="ko-KR" sz="1600" dirty="0"/>
+                  <a:t>	</a:t>
+                </a:r>
+                <a14:m>
+                  <m:oMath xmlns:m="http://schemas.openxmlformats.org/officeDocument/2006/math">
+                    <m:sSup>
+                      <m:sSupPr>
+                        <m:ctrlPr>
+                          <a:rPr lang="en-US" altLang="ko-KR" sz="1600" i="1">
+                            <a:latin typeface="Cambria Math" panose="02040503050406030204" pitchFamily="18" charset="0"/>
+                          </a:rPr>
+                        </m:ctrlPr>
+                      </m:sSupPr>
+                      <m:e>
+                        <m:r>
+                          <a:rPr lang="en-US" altLang="ko-KR" sz="1600" i="1">
+                            <a:latin typeface="Cambria Math" panose="02040503050406030204" pitchFamily="18" charset="0"/>
+                          </a:rPr>
+                          <m:t>𝑒</m:t>
+                        </m:r>
+                      </m:e>
+                      <m:sup>
+                        <m:r>
+                          <a:rPr lang="en-US" altLang="ko-KR" sz="1600" i="1">
+                            <a:latin typeface="Cambria Math" panose="02040503050406030204" pitchFamily="18" charset="0"/>
+                          </a:rPr>
+                          <m:t>(−</m:t>
+                        </m:r>
+                        <m:r>
+                          <a:rPr lang="en-US" altLang="ko-KR" sz="1600" i="1">
+                            <a:latin typeface="Cambria Math" panose="02040503050406030204" pitchFamily="18" charset="0"/>
+                          </a:rPr>
+                          <m:t>𝜁</m:t>
+                        </m:r>
+                        <m:r>
+                          <a:rPr lang="en-US" altLang="ko-KR" sz="1600" i="1">
+                            <a:latin typeface="Cambria Math" panose="02040503050406030204" pitchFamily="18" charset="0"/>
+                          </a:rPr>
+                          <m:t>/√(1−</m:t>
+                        </m:r>
+                        <m:sSup>
+                          <m:sSupPr>
+                            <m:ctrlPr>
+                              <a:rPr lang="en-US" altLang="ko-KR" sz="1600" i="1">
+                                <a:latin typeface="Cambria Math" panose="02040503050406030204" pitchFamily="18" charset="0"/>
+                              </a:rPr>
+                            </m:ctrlPr>
+                          </m:sSupPr>
+                          <m:e>
+                            <m:r>
+                              <a:rPr lang="en-US" altLang="ko-KR" sz="1600" i="1">
+                                <a:latin typeface="Cambria Math" panose="02040503050406030204" pitchFamily="18" charset="0"/>
+                              </a:rPr>
+                              <m:t>𝜁</m:t>
+                            </m:r>
+                          </m:e>
+                          <m:sup>
+                            <m:r>
+                              <a:rPr lang="en-US" altLang="ko-KR" sz="1600" i="1">
+                                <a:latin typeface="Cambria Math" panose="02040503050406030204" pitchFamily="18" charset="0"/>
+                              </a:rPr>
+                              <m:t>2</m:t>
+                            </m:r>
+                          </m:sup>
+                        </m:sSup>
+                        <m:r>
+                          <a:rPr lang="en-US" altLang="ko-KR" sz="1600" i="1">
+                            <a:latin typeface="Cambria Math" panose="02040503050406030204" pitchFamily="18" charset="0"/>
+                          </a:rPr>
+                          <m:t>)</m:t>
+                        </m:r>
+                      </m:sup>
+                    </m:sSup>
+                    <m:r>
+                      <a:rPr lang="en-US" altLang="ko-KR" sz="1600" i="1">
+                        <a:latin typeface="Cambria Math" panose="02040503050406030204" pitchFamily="18" charset="0"/>
+                      </a:rPr>
+                      <m:t>×100&lt;10%</m:t>
+                    </m:r>
+                  </m:oMath>
+                </a14:m>
+                <a:endParaRPr lang="en-US" altLang="ko-KR" sz="1600" i="1" dirty="0">
+                  <a:latin typeface="Cambria Math" panose="02040503050406030204" pitchFamily="18" charset="0"/>
+                </a:endParaRPr>
+              </a:p>
+              <a:p>
+                <a:pPr lvl="1">
+                  <a:lnSpc>
+                    <a:spcPct val="150000"/>
+                  </a:lnSpc>
+                </a:pPr>
+                <a:r>
+                  <a:rPr lang="en-US" altLang="ko-KR" sz="1600" dirty="0"/>
+                  <a:t>	</a:t>
+                </a:r>
+                <a14:m>
+                  <m:oMath xmlns:m="http://schemas.openxmlformats.org/officeDocument/2006/math">
+                    <m:sSub>
+                      <m:sSubPr>
+                        <m:ctrlPr>
+                          <a:rPr lang="en-US" altLang="ko-KR" sz="1600" i="1">
+                            <a:latin typeface="Cambria Math" panose="02040503050406030204" pitchFamily="18" charset="0"/>
+                          </a:rPr>
+                        </m:ctrlPr>
+                      </m:sSubPr>
+                      <m:e>
+                        <m:r>
+                          <a:rPr lang="en-US" altLang="ko-KR" sz="1600" i="1">
+                            <a:latin typeface="Cambria Math" panose="02040503050406030204" pitchFamily="18" charset="0"/>
+                          </a:rPr>
+                          <m:t>𝜁</m:t>
+                        </m:r>
+                      </m:e>
+                      <m:sub>
+                        <m:r>
+                          <a:rPr lang="en-US" altLang="ko-KR" sz="1600" i="1">
+                            <a:latin typeface="Cambria Math" panose="02040503050406030204" pitchFamily="18" charset="0"/>
+                          </a:rPr>
+                          <m:t>𝑐</m:t>
+                        </m:r>
+                      </m:sub>
+                    </m:sSub>
+                    <m:r>
+                      <a:rPr lang="en-US" altLang="ko-KR" sz="1600" b="0" i="1" smtClean="0">
+                        <a:latin typeface="Cambria Math" panose="02040503050406030204" pitchFamily="18" charset="0"/>
+                      </a:rPr>
+                      <m:t>&gt;</m:t>
+                    </m:r>
+                    <m:r>
+                      <a:rPr lang="en-US" altLang="ko-KR" sz="1600" i="1">
+                        <a:latin typeface="Cambria Math" panose="02040503050406030204" pitchFamily="18" charset="0"/>
+                      </a:rPr>
+                      <m:t>0.59 [−] </m:t>
+                    </m:r>
+                  </m:oMath>
+                </a14:m>
+                <a:endParaRPr lang="en-US" altLang="ko-KR" sz="1600" dirty="0"/>
+              </a:p>
+              <a:p>
+                <a:pPr lvl="1">
+                  <a:lnSpc>
+                    <a:spcPct val="150000"/>
+                  </a:lnSpc>
+                </a:pPr>
+                <a14:m>
+                  <m:oMathPara xmlns:m="http://schemas.openxmlformats.org/officeDocument/2006/math">
+                    <m:oMathParaPr>
+                      <m:jc m:val="left"/>
+                    </m:oMathParaPr>
+                    <m:oMath xmlns:m="http://schemas.openxmlformats.org/officeDocument/2006/math">
+                      <m:sSub>
+                        <m:sSubPr>
+                          <m:ctrlPr>
+                            <a:rPr lang="en-US" altLang="ko-KR" sz="1600" i="1">
+                              <a:latin typeface="Cambria Math" panose="02040503050406030204" pitchFamily="18" charset="0"/>
+                            </a:rPr>
+                          </m:ctrlPr>
+                        </m:sSubPr>
+                        <m:e>
+                          <m:r>
+                            <a:rPr lang="en-US" altLang="ko-KR" sz="1600" i="1">
+                              <a:latin typeface="Cambria Math" panose="02040503050406030204" pitchFamily="18" charset="0"/>
+                            </a:rPr>
+                            <m:t>−0.59</m:t>
+                          </m:r>
+                          <m:r>
+                            <a:rPr lang="en-US" altLang="ko-KR" sz="1600" b="0" i="1" smtClean="0">
+                              <a:latin typeface="Cambria Math" panose="02040503050406030204" pitchFamily="18" charset="0"/>
+                            </a:rPr>
+                            <m:t>&gt;</m:t>
+                          </m:r>
+                          <m:r>
+                            <a:rPr lang="en-US" altLang="ko-KR" sz="1600" i="1">
+                              <a:latin typeface="Cambria Math" panose="02040503050406030204" pitchFamily="18" charset="0"/>
+                            </a:rPr>
+                            <m:t>𝜁</m:t>
+                          </m:r>
+                        </m:e>
+                        <m:sub>
+                          <m:r>
+                            <a:rPr lang="en-US" altLang="ko-KR" sz="1600" i="1">
+                              <a:latin typeface="Cambria Math" panose="02040503050406030204" pitchFamily="18" charset="0"/>
+                            </a:rPr>
+                            <m:t>𝑐</m:t>
+                          </m:r>
+                        </m:sub>
+                      </m:sSub>
+                    </m:oMath>
+                  </m:oMathPara>
+                </a14:m>
+                <a:endParaRPr lang="en-US" altLang="ko-KR" sz="1600" dirty="0"/>
+              </a:p>
+              <a:p>
+                <a:pPr lvl="1"/>
+                <a:endParaRPr lang="en-US" altLang="ko-KR" sz="1600" dirty="0"/>
+              </a:p>
+              <a:p>
+                <a:pPr marL="742950" lvl="1" indent="-285750">
+                  <a:lnSpc>
+                    <a:spcPct val="150000"/>
+                  </a:lnSpc>
+                  <a:buFont typeface="Arial" panose="020B0604020202020204" pitchFamily="34" charset="0"/>
+                  <a:buChar char="•"/>
+                </a:pPr>
+                <a14:m>
+                  <m:oMath xmlns:m="http://schemas.openxmlformats.org/officeDocument/2006/math">
+                    <m:sSubSup>
+                      <m:sSubSupPr>
+                        <m:ctrlPr>
+                          <a:rPr lang="en-US" altLang="ko-KR" sz="1600" i="1">
+                            <a:latin typeface="Cambria Math" panose="02040503050406030204" pitchFamily="18" charset="0"/>
+                          </a:rPr>
+                        </m:ctrlPr>
+                      </m:sSubSupPr>
+                      <m:e>
+                        <m:r>
+                          <a:rPr lang="en-US" altLang="ko-KR" sz="1600" i="1">
+                            <a:latin typeface="Cambria Math" panose="02040503050406030204" pitchFamily="18" charset="0"/>
+                          </a:rPr>
+                          <m:t>𝑡</m:t>
+                        </m:r>
+                      </m:e>
+                      <m:sub>
+                        <m:r>
+                          <a:rPr lang="en-US" altLang="ko-KR" sz="1600" i="1">
+                            <a:latin typeface="Cambria Math" panose="02040503050406030204" pitchFamily="18" charset="0"/>
+                          </a:rPr>
+                          <m:t>𝑟</m:t>
+                        </m:r>
+                      </m:sub>
+                      <m:sup>
+                        <m:r>
+                          <a:rPr lang="en-US" altLang="ko-KR" sz="1600" i="1">
+                            <a:latin typeface="Cambria Math" panose="02040503050406030204" pitchFamily="18" charset="0"/>
+                          </a:rPr>
+                          <m:t>90</m:t>
+                        </m:r>
+                      </m:sup>
+                    </m:sSubSup>
+                    <m:r>
+                      <a:rPr lang="en-US" altLang="ko-KR" sz="1600" i="1">
+                        <a:latin typeface="Cambria Math" panose="02040503050406030204" pitchFamily="18" charset="0"/>
+                      </a:rPr>
+                      <m:t>≤0.1 </m:t>
+                    </m:r>
+                    <m:d>
+                      <m:dPr>
+                        <m:begChr m:val="["/>
+                        <m:endChr m:val="]"/>
+                        <m:ctrlPr>
+                          <a:rPr lang="en-US" altLang="ko-KR" sz="1600" i="1">
+                            <a:latin typeface="Cambria Math" panose="02040503050406030204" pitchFamily="18" charset="0"/>
+                          </a:rPr>
+                        </m:ctrlPr>
+                      </m:dPr>
+                      <m:e>
+                        <m:r>
+                          <a:rPr lang="en-US" altLang="ko-KR" sz="1600" i="1">
+                            <a:latin typeface="Cambria Math" panose="02040503050406030204" pitchFamily="18" charset="0"/>
+                          </a:rPr>
+                          <m:t>𝑠𝑒𝑐</m:t>
+                        </m:r>
+                      </m:e>
+                    </m:d>
+                  </m:oMath>
+                </a14:m>
+                <a:endParaRPr lang="en-US" altLang="ko-KR" sz="1600" dirty="0"/>
+              </a:p>
+              <a:p>
+                <a:pPr lvl="1">
+                  <a:lnSpc>
+                    <a:spcPct val="150000"/>
+                  </a:lnSpc>
+                </a:pPr>
+                <a14:m>
+                  <m:oMathPara xmlns:m="http://schemas.openxmlformats.org/officeDocument/2006/math">
+                    <m:oMathParaPr>
+                      <m:jc m:val="centerGroup"/>
+                    </m:oMathParaPr>
+                    <m:oMath xmlns:m="http://schemas.openxmlformats.org/officeDocument/2006/math">
+                      <m:sSub>
+                        <m:sSubPr>
+                          <m:ctrlPr>
+                            <a:rPr lang="en-US" altLang="ko-KR" sz="1600" i="1">
+                              <a:latin typeface="Cambria Math" panose="02040503050406030204" pitchFamily="18" charset="0"/>
+                            </a:rPr>
+                          </m:ctrlPr>
+                        </m:sSubPr>
+                        <m:e>
+                          <m:r>
+                            <a:rPr lang="en-US" altLang="ko-KR" sz="1600" i="1">
+                              <a:latin typeface="Cambria Math" panose="02040503050406030204" pitchFamily="18" charset="0"/>
+                            </a:rPr>
+                            <m:t>𝜔</m:t>
+                          </m:r>
+                        </m:e>
+                        <m:sub>
+                          <m:r>
+                            <a:rPr lang="en-US" altLang="ko-KR" sz="1600" i="1">
+                              <a:latin typeface="Cambria Math" panose="02040503050406030204" pitchFamily="18" charset="0"/>
+                            </a:rPr>
+                            <m:t>𝑐</m:t>
+                          </m:r>
+                        </m:sub>
+                      </m:sSub>
+                      <m:r>
+                        <a:rPr lang="en-US" altLang="ko-KR" sz="1600" i="1">
+                          <a:latin typeface="Cambria Math" panose="02040503050406030204" pitchFamily="18" charset="0"/>
+                        </a:rPr>
+                        <m:t>&gt;26.546[</m:t>
+                      </m:r>
+                      <m:r>
+                        <a:rPr lang="en-US" altLang="ko-KR" sz="1600" i="1">
+                          <a:latin typeface="Cambria Math" panose="02040503050406030204" pitchFamily="18" charset="0"/>
+                        </a:rPr>
+                        <m:t>𝑟𝑎𝑑</m:t>
+                      </m:r>
+                      <m:r>
+                        <a:rPr lang="en-US" altLang="ko-KR" sz="1600" i="1">
+                          <a:latin typeface="Cambria Math" panose="02040503050406030204" pitchFamily="18" charset="0"/>
+                        </a:rPr>
+                        <m:t>/</m:t>
+                      </m:r>
+                      <m:r>
+                        <a:rPr lang="en-US" altLang="ko-KR" sz="1600" i="1">
+                          <a:latin typeface="Cambria Math" panose="02040503050406030204" pitchFamily="18" charset="0"/>
+                        </a:rPr>
+                        <m:t>𝑠</m:t>
+                      </m:r>
+                      <m:r>
+                        <a:rPr lang="en-US" altLang="ko-KR" sz="1600" i="1">
+                          <a:latin typeface="Cambria Math" panose="02040503050406030204" pitchFamily="18" charset="0"/>
+                        </a:rPr>
+                        <m:t>]</m:t>
+                      </m:r>
+                    </m:oMath>
+                  </m:oMathPara>
+                </a14:m>
+                <a:endParaRPr lang="en-US" altLang="ko-KR" sz="1600" dirty="0"/>
+              </a:p>
+              <a:p>
+                <a:pPr lvl="1">
+                  <a:lnSpc>
+                    <a:spcPct val="150000"/>
+                  </a:lnSpc>
+                </a:pPr>
+                <a:endParaRPr lang="en-US" altLang="ko-KR" sz="1600" dirty="0"/>
+              </a:p>
+              <a:p>
+                <a:pPr lvl="1">
+                  <a:lnSpc>
+                    <a:spcPct val="150000"/>
+                  </a:lnSpc>
+                </a:pPr>
+                <a:r>
+                  <a:rPr lang="en-US" altLang="ko-KR" sz="1600" dirty="0"/>
+                  <a:t>Result</a:t>
+                </a:r>
+              </a:p>
+              <a:p>
+                <a:pPr marL="742950" lvl="1" indent="-285750">
+                  <a:buFont typeface="Arial" panose="020B0604020202020204" pitchFamily="34" charset="0"/>
+                  <a:buChar char="•"/>
+                </a:pPr>
+                <a14:m>
+                  <m:oMath xmlns:m="http://schemas.openxmlformats.org/officeDocument/2006/math">
+                    <m:sSub>
+                      <m:sSubPr>
+                        <m:ctrlPr>
+                          <a:rPr lang="en-US" altLang="ko-KR" sz="1600" i="1">
+                            <a:latin typeface="Cambria Math" panose="02040503050406030204" pitchFamily="18" charset="0"/>
+                          </a:rPr>
+                        </m:ctrlPr>
+                      </m:sSubPr>
+                      <m:e>
+                        <m:r>
+                          <a:rPr lang="en-US" altLang="ko-KR" sz="1600" i="1">
+                            <a:latin typeface="Cambria Math" panose="02040503050406030204" pitchFamily="18" charset="0"/>
+                          </a:rPr>
+                          <m:t>𝜔</m:t>
+                        </m:r>
+                      </m:e>
+                      <m:sub>
+                        <m:r>
+                          <a:rPr lang="en-US" altLang="ko-KR" sz="1600" i="1">
+                            <a:latin typeface="Cambria Math" panose="02040503050406030204" pitchFamily="18" charset="0"/>
+                          </a:rPr>
+                          <m:t>𝑛</m:t>
+                        </m:r>
+                      </m:sub>
+                    </m:sSub>
+                    <m:r>
+                      <a:rPr lang="en-US" altLang="ko-KR" sz="1600" i="1">
+                        <a:latin typeface="Cambria Math" panose="02040503050406030204" pitchFamily="18" charset="0"/>
+                      </a:rPr>
+                      <m:t>=35 [</m:t>
+                    </m:r>
+                    <m:r>
+                      <a:rPr lang="en-US" altLang="ko-KR" sz="1600" i="1">
+                        <a:latin typeface="Cambria Math" panose="02040503050406030204" pitchFamily="18" charset="0"/>
+                      </a:rPr>
+                      <m:t>𝑟𝑎𝑑</m:t>
+                    </m:r>
+                    <m:r>
+                      <a:rPr lang="en-US" altLang="ko-KR" sz="1600" i="1">
+                        <a:latin typeface="Cambria Math" panose="02040503050406030204" pitchFamily="18" charset="0"/>
+                      </a:rPr>
+                      <m:t>/</m:t>
+                    </m:r>
+                    <m:r>
+                      <a:rPr lang="en-US" altLang="ko-KR" sz="1600" i="1">
+                        <a:latin typeface="Cambria Math" panose="02040503050406030204" pitchFamily="18" charset="0"/>
+                      </a:rPr>
+                      <m:t>𝑠</m:t>
+                    </m:r>
+                    <m:r>
+                      <a:rPr lang="en-US" altLang="ko-KR" sz="1600" i="1">
+                        <a:latin typeface="Cambria Math" panose="02040503050406030204" pitchFamily="18" charset="0"/>
+                      </a:rPr>
+                      <m:t>]</m:t>
+                    </m:r>
+                  </m:oMath>
+                </a14:m>
+                <a:endParaRPr lang="en-US" altLang="ko-KR" sz="1600" i="1" dirty="0">
+                  <a:latin typeface="Cambria Math" panose="02040503050406030204" pitchFamily="18" charset="0"/>
+                </a:endParaRPr>
+              </a:p>
+              <a:p>
+                <a:pPr marL="742950" lvl="1" indent="-285750">
+                  <a:buFont typeface="Arial" panose="020B0604020202020204" pitchFamily="34" charset="0"/>
+                  <a:buChar char="•"/>
+                </a:pPr>
+                <a:endParaRPr lang="en-US" altLang="ko-KR" sz="1600" i="1" dirty="0">
+                  <a:latin typeface="Cambria Math" panose="02040503050406030204" pitchFamily="18" charset="0"/>
+                </a:endParaRPr>
+              </a:p>
+              <a:p>
+                <a:pPr marL="742950" lvl="1" indent="-285750">
+                  <a:buFont typeface="Arial" panose="020B0604020202020204" pitchFamily="34" charset="0"/>
+                  <a:buChar char="•"/>
+                </a:pPr>
+                <a14:m>
+                  <m:oMath xmlns:m="http://schemas.openxmlformats.org/officeDocument/2006/math">
+                    <m:r>
+                      <a:rPr lang="en-US" altLang="ko-KR" sz="1600" i="1">
+                        <a:latin typeface="Cambria Math" panose="02040503050406030204" pitchFamily="18" charset="0"/>
+                      </a:rPr>
+                      <m:t>𝜁</m:t>
+                    </m:r>
+                    <m:r>
+                      <a:rPr lang="en-US" altLang="ko-KR" sz="1600" i="1">
+                        <a:latin typeface="Cambria Math" panose="02040503050406030204" pitchFamily="18" charset="0"/>
+                      </a:rPr>
+                      <m:t>=0.7 </m:t>
+                    </m:r>
+                    <m:d>
+                      <m:dPr>
+                        <m:begChr m:val="["/>
+                        <m:endChr m:val="]"/>
+                        <m:ctrlPr>
+                          <a:rPr lang="en-US" altLang="ko-KR" sz="1600" i="1">
+                            <a:latin typeface="Cambria Math" panose="02040503050406030204" pitchFamily="18" charset="0"/>
+                          </a:rPr>
+                        </m:ctrlPr>
+                      </m:dPr>
+                      <m:e>
+                        <m:r>
+                          <a:rPr lang="en-US" altLang="ko-KR" sz="1600" i="1">
+                            <a:latin typeface="Cambria Math" panose="02040503050406030204" pitchFamily="18" charset="0"/>
+                          </a:rPr>
+                          <m:t>−</m:t>
+                        </m:r>
+                      </m:e>
+                    </m:d>
+                  </m:oMath>
+                </a14:m>
+                <a:endParaRPr lang="en-US" altLang="ko-KR" sz="1600" i="1" dirty="0">
+                  <a:latin typeface="Cambria Math" panose="02040503050406030204" pitchFamily="18" charset="0"/>
+                </a:endParaRPr>
+              </a:p>
+              <a:p>
+                <a:pPr lvl="1">
+                  <a:lnSpc>
+                    <a:spcPct val="150000"/>
+                  </a:lnSpc>
+                </a:pPr>
+                <a:endParaRPr lang="en-US" altLang="ko-KR" sz="1600" dirty="0"/>
+              </a:p>
+              <a:p>
+                <a:pPr marL="628650" lvl="1" indent="-171450">
+                  <a:buFontTx/>
+                  <a:buChar char="-"/>
+                </a:pPr>
+                <a:endParaRPr lang="en-US" altLang="ko-KR" sz="1600" dirty="0">
+                  <a:latin typeface="+mn-lt"/>
+                </a:endParaRPr>
+              </a:p>
+              <a:p>
+                <a:pPr marL="628650" lvl="1" indent="-171450">
+                  <a:buFontTx/>
+                  <a:buChar char="-"/>
+                </a:pPr>
+                <a:endParaRPr lang="ko-KR" altLang="en-US" sz="1000" b="1" dirty="0">
+                  <a:latin typeface="+mn-lt"/>
+                </a:endParaRPr>
+              </a:p>
+            </p:txBody>
+          </p:sp>
+        </mc:Choice>
+        <mc:Fallback>
+          <p:sp>
+            <p:nvSpPr>
+              <p:cNvPr id="10" name="제목 6">
+                <a:extLst>
+                  <a:ext uri="{FF2B5EF4-FFF2-40B4-BE49-F238E27FC236}">
+                    <a16:creationId xmlns:a16="http://schemas.microsoft.com/office/drawing/2014/main" id="{519B342D-85C4-5C52-4E2C-441424D2BE70}"/>
+                  </a:ext>
+                </a:extLst>
+              </p:cNvPr>
+              <p:cNvSpPr txBox="1">
+                <a:spLocks noRot="1" noChangeAspect="1" noMove="1" noResize="1" noEditPoints="1" noAdjustHandles="1" noChangeArrowheads="1" noChangeShapeType="1" noTextEdit="1"/>
+              </p:cNvSpPr>
+              <p:nvPr/>
+            </p:nvSpPr>
+            <p:spPr>
+              <a:xfrm>
+                <a:off x="495300" y="902940"/>
+                <a:ext cx="4362450" cy="5370860"/>
+              </a:xfrm>
+              <a:prstGeom prst="rect">
+                <a:avLst/>
+              </a:prstGeom>
+              <a:blipFill>
+                <a:blip r:embed="rId3"/>
+                <a:stretch>
+                  <a:fillRect l="-698" t="-795"/>
+                </a:stretch>
+              </a:blipFill>
+            </p:spPr>
+            <p:txBody>
+              <a:bodyPr/>
+              <a:lstStyle/>
+              <a:p>
+                <a:r>
+                  <a:rPr lang="ko-KR" altLang="en-US">
+                    <a:noFill/>
+                  </a:rPr>
+                  <a:t> </a:t>
+                </a:r>
+              </a:p>
+            </p:txBody>
+          </p:sp>
+        </mc:Fallback>
+      </mc:AlternateContent>
+      <p:sp>
+        <p:nvSpPr>
+          <p:cNvPr id="2" name="슬라이드 번호 개체 틀 1">
             <a:extLst>
               <a:ext uri="{FF2B5EF4-FFF2-40B4-BE49-F238E27FC236}">
-                <a16:creationId xmlns:a16="http://schemas.microsoft.com/office/drawing/2014/main" id="{31C0AEBE-1957-23D2-4367-EF57085B0258}"/>
+                <a16:creationId xmlns:a16="http://schemas.microsoft.com/office/drawing/2014/main" id="{DAA9AE3C-7D8E-0EAF-6843-149A84F5FBE4}"/>
+              </a:ext>
+            </a:extLst>
+          </p:cNvPr>
+          <p:cNvSpPr>
+            <a:spLocks noGrp="1"/>
+          </p:cNvSpPr>
+          <p:nvPr>
+            <p:ph type="sldNum" sz="quarter" idx="12"/>
+          </p:nvPr>
+        </p:nvSpPr>
+        <p:spPr/>
+        <p:txBody>
+          <a:bodyPr/>
+          <a:lstStyle/>
+          <a:p>
+            <a:fld id="{57A7753D-33D3-4DE4-B918-257BB52428D1}" type="slidenum">
+              <a:rPr lang="ko-KR" altLang="en-US" smtClean="0"/>
+              <a:t>4</a:t>
+            </a:fld>
+            <a:endParaRPr lang="ko-KR" altLang="en-US"/>
+          </a:p>
+        </p:txBody>
+      </p:sp>
+      <p:pic>
+        <p:nvPicPr>
+          <p:cNvPr id="8" name="그림 7">
+            <a:extLst>
+              <a:ext uri="{FF2B5EF4-FFF2-40B4-BE49-F238E27FC236}">
+                <a16:creationId xmlns:a16="http://schemas.microsoft.com/office/drawing/2014/main" id="{AED457E3-E8D8-C64C-22E8-7EE0A567EE65}"/>
+              </a:ext>
+            </a:extLst>
+          </p:cNvPr>
+          <p:cNvPicPr>
+            <a:picLocks noChangeAspect="1"/>
+          </p:cNvPicPr>
+          <p:nvPr/>
+        </p:nvPicPr>
+        <p:blipFill>
+          <a:blip r:embed="rId4"/>
+          <a:stretch>
+            <a:fillRect/>
+          </a:stretch>
+        </p:blipFill>
+        <p:spPr>
+          <a:xfrm>
+            <a:off x="4495026" y="1110488"/>
+            <a:ext cx="4064774" cy="3911122"/>
+          </a:xfrm>
+          <a:prstGeom prst="rect">
+            <a:avLst/>
+          </a:prstGeom>
+        </p:spPr>
+      </p:pic>
+      <p:sp>
+        <p:nvSpPr>
+          <p:cNvPr id="9" name="직사각형 8">
+            <a:extLst>
+              <a:ext uri="{FF2B5EF4-FFF2-40B4-BE49-F238E27FC236}">
+                <a16:creationId xmlns:a16="http://schemas.microsoft.com/office/drawing/2014/main" id="{D1B8FA08-5050-37D7-7931-0D72717BAB05}"/>
+              </a:ext>
+            </a:extLst>
+          </p:cNvPr>
+          <p:cNvSpPr/>
+          <p:nvPr/>
+        </p:nvSpPr>
+        <p:spPr>
+          <a:xfrm>
+            <a:off x="7230533" y="2158562"/>
+            <a:ext cx="541867" cy="220133"/>
+          </a:xfrm>
+          <a:prstGeom prst="rect">
+            <a:avLst/>
+          </a:prstGeom>
+          <a:ln>
+            <a:solidFill>
+              <a:schemeClr val="bg1"/>
+            </a:solidFill>
+          </a:ln>
+        </p:spPr>
+        <p:style>
+          <a:lnRef idx="2">
+            <a:schemeClr val="dk1"/>
+          </a:lnRef>
+          <a:fillRef idx="1">
+            <a:schemeClr val="lt1"/>
+          </a:fillRef>
+          <a:effectRef idx="0">
+            <a:schemeClr val="dk1"/>
+          </a:effectRef>
+          <a:fontRef idx="minor">
+            <a:schemeClr val="dk1"/>
+          </a:fontRef>
+        </p:style>
+        <p:txBody>
+          <a:bodyPr rtlCol="0" anchor="ctr"/>
+          <a:lstStyle/>
+          <a:p>
+            <a:pPr algn="ctr"/>
+            <a:r>
+              <a:rPr lang="en-US" altLang="ko-KR" sz="1000" dirty="0"/>
+              <a:t>26.546</a:t>
+            </a:r>
+            <a:endParaRPr lang="ko-KR" altLang="en-US" sz="1000" dirty="0"/>
+          </a:p>
+        </p:txBody>
+      </p:sp>
+      <p:sp>
+        <p:nvSpPr>
+          <p:cNvPr id="13" name="직사각형 12">
+            <a:extLst>
+              <a:ext uri="{FF2B5EF4-FFF2-40B4-BE49-F238E27FC236}">
+                <a16:creationId xmlns:a16="http://schemas.microsoft.com/office/drawing/2014/main" id="{4B6221E8-01CA-B8CA-888F-D951C9BAE2B9}"/>
+              </a:ext>
+            </a:extLst>
+          </p:cNvPr>
+          <p:cNvSpPr/>
+          <p:nvPr/>
+        </p:nvSpPr>
+        <p:spPr>
+          <a:xfrm>
+            <a:off x="5621866" y="4334496"/>
+            <a:ext cx="609601" cy="220133"/>
+          </a:xfrm>
+          <a:prstGeom prst="rect">
+            <a:avLst/>
+          </a:prstGeom>
+          <a:ln>
+            <a:solidFill>
+              <a:schemeClr val="bg1"/>
+            </a:solidFill>
+          </a:ln>
+        </p:spPr>
+        <p:style>
+          <a:lnRef idx="2">
+            <a:schemeClr val="dk1"/>
+          </a:lnRef>
+          <a:fillRef idx="1">
+            <a:schemeClr val="lt1"/>
+          </a:fillRef>
+          <a:effectRef idx="0">
+            <a:schemeClr val="dk1"/>
+          </a:effectRef>
+          <a:fontRef idx="minor">
+            <a:schemeClr val="dk1"/>
+          </a:fontRef>
+        </p:style>
+        <p:txBody>
+          <a:bodyPr rtlCol="0" anchor="ctr"/>
+          <a:lstStyle/>
+          <a:p>
+            <a:pPr algn="ctr"/>
+            <a:r>
+              <a:rPr lang="en-US" altLang="ko-KR" sz="1000" dirty="0"/>
+              <a:t>- 0.59</a:t>
+            </a:r>
+            <a:endParaRPr lang="ko-KR" altLang="en-US" sz="1000" dirty="0"/>
+          </a:p>
+        </p:txBody>
+      </p:sp>
+      <p:sp>
+        <p:nvSpPr>
+          <p:cNvPr id="14" name="직사각형 13">
+            <a:extLst>
+              <a:ext uri="{FF2B5EF4-FFF2-40B4-BE49-F238E27FC236}">
+                <a16:creationId xmlns:a16="http://schemas.microsoft.com/office/drawing/2014/main" id="{BB174EAB-5FCB-C822-D505-A3ABE902223A}"/>
+              </a:ext>
+            </a:extLst>
+          </p:cNvPr>
+          <p:cNvSpPr/>
+          <p:nvPr/>
+        </p:nvSpPr>
+        <p:spPr>
+          <a:xfrm>
+            <a:off x="5588000" y="1599762"/>
+            <a:ext cx="541867" cy="220133"/>
+          </a:xfrm>
+          <a:prstGeom prst="rect">
+            <a:avLst/>
+          </a:prstGeom>
+          <a:ln>
+            <a:solidFill>
+              <a:schemeClr val="bg1"/>
+            </a:solidFill>
+          </a:ln>
+        </p:spPr>
+        <p:style>
+          <a:lnRef idx="2">
+            <a:schemeClr val="dk1"/>
+          </a:lnRef>
+          <a:fillRef idx="1">
+            <a:schemeClr val="lt1"/>
+          </a:fillRef>
+          <a:effectRef idx="0">
+            <a:schemeClr val="dk1"/>
+          </a:effectRef>
+          <a:fontRef idx="minor">
+            <a:schemeClr val="dk1"/>
+          </a:fontRef>
+        </p:style>
+        <p:txBody>
+          <a:bodyPr rtlCol="0" anchor="ctr"/>
+          <a:lstStyle/>
+          <a:p>
+            <a:pPr algn="ctr"/>
+            <a:r>
+              <a:rPr lang="en-US" altLang="ko-KR" sz="1000" dirty="0"/>
+              <a:t>0.59</a:t>
+            </a:r>
+            <a:endParaRPr lang="ko-KR" altLang="en-US" sz="1000" dirty="0"/>
+          </a:p>
+        </p:txBody>
+      </p:sp>
+      <p:sp>
+        <p:nvSpPr>
+          <p:cNvPr id="17" name="제목 6">
+            <a:extLst>
+              <a:ext uri="{FF2B5EF4-FFF2-40B4-BE49-F238E27FC236}">
+                <a16:creationId xmlns:a16="http://schemas.microsoft.com/office/drawing/2014/main" id="{1405729D-767E-4E3C-4F2E-A85741AFB3C8}"/>
               </a:ext>
             </a:extLst>
           </p:cNvPr>
@@ -9397,16 +10843,16 @@
         </p:nvSpPr>
         <p:spPr>
           <a:xfrm>
-            <a:off x="495300" y="902940"/>
-            <a:ext cx="3236690" cy="413292"/>
+            <a:off x="408296" y="3787814"/>
+            <a:ext cx="4362450" cy="1351904"/>
           </a:xfrm>
           <a:prstGeom prst="rect">
             <a:avLst/>
           </a:prstGeom>
         </p:spPr>
         <p:txBody>
-          <a:bodyPr vert="horz" lIns="91440" tIns="45720" rIns="91440" bIns="45720" rtlCol="0" anchor="ctr">
-            <a:normAutofit fontScale="90000"/>
+          <a:bodyPr vert="horz" lIns="91440" tIns="45720" rIns="91440" bIns="45720" rtlCol="0" anchor="t" anchorCtr="0">
+            <a:normAutofit fontScale="97500"/>
           </a:bodyPr>
           <a:lstStyle>
             <a:lvl1pPr algn="l" defTabSz="914400" rtl="0" eaLnBrk="1" latinLnBrk="1" hangingPunct="1">
@@ -9428,565 +10874,20 @@
             </a:lvl1pPr>
           </a:lstStyle>
           <a:p>
-            <a:r>
-              <a:rPr lang="en-US" altLang="ko-KR" sz="1600" b="1" dirty="0">
-                <a:latin typeface="+mn-lt"/>
-              </a:rPr>
-              <a:t>Obtaining Transfer function of Motor </a:t>
-            </a:r>
-            <a:endParaRPr lang="ko-KR" altLang="en-US" sz="1600" b="1" dirty="0">
+            <a:pPr marL="628650" lvl="1" indent="-171450">
+              <a:buFontTx/>
+              <a:buChar char="-"/>
+            </a:pPr>
+            <a:endParaRPr lang="ko-KR" altLang="en-US" sz="1000" b="1" dirty="0">
               <a:latin typeface="+mn-lt"/>
             </a:endParaRPr>
           </a:p>
         </p:txBody>
       </p:sp>
-      <p:sp>
-        <p:nvSpPr>
-          <p:cNvPr id="2" name="슬라이드 번호 개체 틀 1">
-            <a:extLst>
-              <a:ext uri="{FF2B5EF4-FFF2-40B4-BE49-F238E27FC236}">
-                <a16:creationId xmlns:a16="http://schemas.microsoft.com/office/drawing/2014/main" id="{15138D92-F8FD-BC9E-C128-2E0295847813}"/>
-              </a:ext>
-            </a:extLst>
-          </p:cNvPr>
-          <p:cNvSpPr>
-            <a:spLocks noGrp="1"/>
-          </p:cNvSpPr>
-          <p:nvPr>
-            <p:ph type="sldNum" sz="quarter" idx="12"/>
-          </p:nvPr>
-        </p:nvSpPr>
-        <p:spPr/>
-        <p:txBody>
-          <a:bodyPr/>
-          <a:lstStyle/>
-          <a:p>
-            <a:fld id="{57A7753D-33D3-4DE4-B918-257BB52428D1}" type="slidenum">
-              <a:rPr lang="ko-KR" altLang="en-US" smtClean="0"/>
-              <a:t>4</a:t>
-            </a:fld>
-            <a:endParaRPr lang="ko-KR" altLang="en-US"/>
-          </a:p>
-        </p:txBody>
-      </p:sp>
-      <mc:AlternateContent xmlns:mc="http://schemas.openxmlformats.org/markup-compatibility/2006">
-        <mc:Choice xmlns:a14="http://schemas.microsoft.com/office/drawing/2010/main" Requires="a14">
-          <p:sp>
-            <p:nvSpPr>
-              <p:cNvPr id="17" name="TextBox 16">
-                <a:extLst>
-                  <a:ext uri="{FF2B5EF4-FFF2-40B4-BE49-F238E27FC236}">
-                    <a16:creationId xmlns:a16="http://schemas.microsoft.com/office/drawing/2014/main" id="{8BD7CB46-4C0A-23E6-DE8D-37687F6E7977}"/>
-                  </a:ext>
-                </a:extLst>
-              </p:cNvPr>
-              <p:cNvSpPr txBox="1"/>
-              <p:nvPr/>
-            </p:nvSpPr>
-            <p:spPr>
-              <a:xfrm>
-                <a:off x="580380" y="1416183"/>
-                <a:ext cx="1733616" cy="276999"/>
-              </a:xfrm>
-              <a:prstGeom prst="rect">
-                <a:avLst/>
-              </a:prstGeom>
-              <a:noFill/>
-            </p:spPr>
-            <p:txBody>
-              <a:bodyPr wrap="none" lIns="0" tIns="0" rIns="0" bIns="0" rtlCol="0">
-                <a:spAutoFit/>
-              </a:bodyPr>
-              <a:lstStyle/>
-              <a:p>
-                <a14:m>
-                  <m:oMathPara xmlns:m="http://schemas.openxmlformats.org/officeDocument/2006/math">
-                    <m:oMathParaPr>
-                      <m:jc m:val="centerGroup"/>
-                    </m:oMathParaPr>
-                    <m:oMath xmlns:m="http://schemas.openxmlformats.org/officeDocument/2006/math">
-                      <m:r>
-                        <a:rPr lang="en-US" altLang="ko-KR" b="0" i="1" smtClean="0">
-                          <a:latin typeface="Cambria Math" panose="02040503050406030204" pitchFamily="18" charset="0"/>
-                        </a:rPr>
-                        <m:t>𝐺</m:t>
-                      </m:r>
-                      <m:d>
-                        <m:dPr>
-                          <m:ctrlPr>
-                            <a:rPr lang="en-US" altLang="ko-KR" b="0" i="1" smtClean="0">
-                              <a:latin typeface="Cambria Math" panose="02040503050406030204" pitchFamily="18" charset="0"/>
-                            </a:rPr>
-                          </m:ctrlPr>
-                        </m:dPr>
-                        <m:e>
-                          <m:r>
-                            <a:rPr lang="en-US" altLang="ko-KR" b="0" i="1" smtClean="0">
-                              <a:latin typeface="Cambria Math" panose="02040503050406030204" pitchFamily="18" charset="0"/>
-                            </a:rPr>
-                            <m:t>𝑠</m:t>
-                          </m:r>
-                        </m:e>
-                      </m:d>
-                      <m:r>
-                        <a:rPr lang="en-US" altLang="ko-KR" b="0" i="1" smtClean="0">
-                          <a:latin typeface="Cambria Math" panose="02040503050406030204" pitchFamily="18" charset="0"/>
-                        </a:rPr>
-                        <m:t>=</m:t>
-                      </m:r>
-                      <m:r>
-                        <a:rPr lang="en-US" altLang="ko-KR" b="0" i="1" smtClean="0">
-                          <a:latin typeface="Cambria Math" panose="02040503050406030204" pitchFamily="18" charset="0"/>
-                        </a:rPr>
-                        <m:t>𝐾</m:t>
-                      </m:r>
-                      <m:r>
-                        <a:rPr lang="en-US" altLang="ko-KR" b="0" i="1" smtClean="0">
-                          <a:latin typeface="Cambria Math" panose="02040503050406030204" pitchFamily="18" charset="0"/>
-                        </a:rPr>
-                        <m:t>∗</m:t>
-                      </m:r>
-                      <m:sSub>
-                        <m:sSubPr>
-                          <m:ctrlPr>
-                            <a:rPr lang="en-US" altLang="ko-KR" b="0" i="1" smtClean="0">
-                              <a:latin typeface="Cambria Math" panose="02040503050406030204" pitchFamily="18" charset="0"/>
-                            </a:rPr>
-                          </m:ctrlPr>
-                        </m:sSubPr>
-                        <m:e>
-                          <m:r>
-                            <a:rPr lang="en-US" altLang="ko-KR" b="0" i="1" smtClean="0">
-                              <a:latin typeface="Cambria Math" panose="02040503050406030204" pitchFamily="18" charset="0"/>
-                            </a:rPr>
-                            <m:t>𝐺</m:t>
-                          </m:r>
-                        </m:e>
-                        <m:sub>
-                          <m:r>
-                            <a:rPr lang="en-US" altLang="ko-KR" b="0" i="1" smtClean="0">
-                              <a:latin typeface="Cambria Math" panose="02040503050406030204" pitchFamily="18" charset="0"/>
-                            </a:rPr>
-                            <m:t>𝑐</m:t>
-                          </m:r>
-                        </m:sub>
-                      </m:sSub>
-                      <m:d>
-                        <m:dPr>
-                          <m:ctrlPr>
-                            <a:rPr lang="en-US" altLang="ko-KR" b="0" i="1" smtClean="0">
-                              <a:latin typeface="Cambria Math" panose="02040503050406030204" pitchFamily="18" charset="0"/>
-                            </a:rPr>
-                          </m:ctrlPr>
-                        </m:dPr>
-                        <m:e>
-                          <m:r>
-                            <a:rPr lang="en-US" altLang="ko-KR" b="0" i="1" smtClean="0">
-                              <a:latin typeface="Cambria Math" panose="02040503050406030204" pitchFamily="18" charset="0"/>
-                            </a:rPr>
-                            <m:t>𝑠</m:t>
-                          </m:r>
-                        </m:e>
-                      </m:d>
-                    </m:oMath>
-                  </m:oMathPara>
-                </a14:m>
-                <a:endParaRPr lang="en-US" altLang="ko-KR" b="0" dirty="0"/>
-              </a:p>
-            </p:txBody>
-          </p:sp>
-        </mc:Choice>
-        <mc:Fallback>
-          <p:sp>
-            <p:nvSpPr>
-              <p:cNvPr id="17" name="TextBox 16">
-                <a:extLst>
-                  <a:ext uri="{FF2B5EF4-FFF2-40B4-BE49-F238E27FC236}">
-                    <a16:creationId xmlns:a16="http://schemas.microsoft.com/office/drawing/2014/main" id="{8BD7CB46-4C0A-23E6-DE8D-37687F6E7977}"/>
-                  </a:ext>
-                </a:extLst>
-              </p:cNvPr>
-              <p:cNvSpPr txBox="1">
-                <a:spLocks noRot="1" noChangeAspect="1" noMove="1" noResize="1" noEditPoints="1" noAdjustHandles="1" noChangeArrowheads="1" noChangeShapeType="1" noTextEdit="1"/>
-              </p:cNvSpPr>
-              <p:nvPr/>
-            </p:nvSpPr>
-            <p:spPr>
-              <a:xfrm>
-                <a:off x="580380" y="1416183"/>
-                <a:ext cx="1733616" cy="276999"/>
-              </a:xfrm>
-              <a:prstGeom prst="rect">
-                <a:avLst/>
-              </a:prstGeom>
-              <a:blipFill>
-                <a:blip r:embed="rId3"/>
-                <a:stretch>
-                  <a:fillRect l="-2456" b="-8696"/>
-                </a:stretch>
-              </a:blipFill>
-            </p:spPr>
-            <p:txBody>
-              <a:bodyPr/>
-              <a:lstStyle/>
-              <a:p>
-                <a:r>
-                  <a:rPr lang="ko-KR" altLang="en-US">
-                    <a:noFill/>
-                  </a:rPr>
-                  <a:t> </a:t>
-                </a:r>
-              </a:p>
-            </p:txBody>
-          </p:sp>
-        </mc:Fallback>
-      </mc:AlternateContent>
-      <p:sp>
-        <p:nvSpPr>
-          <p:cNvPr id="18" name="화살표: 오른쪽 17">
-            <a:extLst>
-              <a:ext uri="{FF2B5EF4-FFF2-40B4-BE49-F238E27FC236}">
-                <a16:creationId xmlns:a16="http://schemas.microsoft.com/office/drawing/2014/main" id="{E237FC35-ED59-5C3B-7EE6-14246DEFF511}"/>
-              </a:ext>
-            </a:extLst>
-          </p:cNvPr>
-          <p:cNvSpPr/>
-          <p:nvPr/>
-        </p:nvSpPr>
-        <p:spPr>
-          <a:xfrm>
-            <a:off x="2586960" y="1348036"/>
-            <a:ext cx="431604" cy="413292"/>
-          </a:xfrm>
-          <a:prstGeom prst="rightArrow">
-            <a:avLst/>
-          </a:prstGeom>
-          <a:solidFill>
-            <a:srgbClr val="FF98CC"/>
-          </a:solidFill>
-          <a:ln>
-            <a:noFill/>
-          </a:ln>
-        </p:spPr>
-        <p:style>
-          <a:lnRef idx="2">
-            <a:schemeClr val="accent1">
-              <a:shade val="15000"/>
-            </a:schemeClr>
-          </a:lnRef>
-          <a:fillRef idx="1">
-            <a:schemeClr val="accent1"/>
-          </a:fillRef>
-          <a:effectRef idx="0">
-            <a:schemeClr val="accent1"/>
-          </a:effectRef>
-          <a:fontRef idx="minor">
-            <a:schemeClr val="lt1"/>
-          </a:fontRef>
-        </p:style>
-        <p:txBody>
-          <a:bodyPr rtlCol="0" anchor="ctr"/>
-          <a:lstStyle/>
-          <a:p>
-            <a:pPr algn="ctr"/>
-            <a:endParaRPr lang="ko-KR" altLang="en-US"/>
-          </a:p>
-        </p:txBody>
-      </p:sp>
-      <mc:AlternateContent xmlns:mc="http://schemas.openxmlformats.org/markup-compatibility/2006">
-        <mc:Choice xmlns:a14="http://schemas.microsoft.com/office/drawing/2010/main" Requires="a14">
-          <p:sp>
-            <p:nvSpPr>
-              <p:cNvPr id="20" name="TextBox 19">
-                <a:extLst>
-                  <a:ext uri="{FF2B5EF4-FFF2-40B4-BE49-F238E27FC236}">
-                    <a16:creationId xmlns:a16="http://schemas.microsoft.com/office/drawing/2014/main" id="{0420C7E1-E994-4210-6BAF-48BE017021C3}"/>
-                  </a:ext>
-                </a:extLst>
-              </p:cNvPr>
-              <p:cNvSpPr txBox="1"/>
-              <p:nvPr/>
-            </p:nvSpPr>
-            <p:spPr>
-              <a:xfrm>
-                <a:off x="3291528" y="1292174"/>
-                <a:ext cx="3494310" cy="525016"/>
-              </a:xfrm>
-              <a:prstGeom prst="rect">
-                <a:avLst/>
-              </a:prstGeom>
-              <a:noFill/>
-            </p:spPr>
-            <p:txBody>
-              <a:bodyPr wrap="square" lIns="0" tIns="0" rIns="0" bIns="0" rtlCol="0">
-                <a:spAutoFit/>
-              </a:bodyPr>
-              <a:lstStyle/>
-              <a:p>
-                <a14:m>
-                  <m:oMathPara xmlns:m="http://schemas.openxmlformats.org/officeDocument/2006/math">
-                    <m:oMathParaPr>
-                      <m:jc m:val="centerGroup"/>
-                    </m:oMathParaPr>
-                    <m:oMath xmlns:m="http://schemas.openxmlformats.org/officeDocument/2006/math">
-                      <m:r>
-                        <m:rPr>
-                          <m:sty m:val="p"/>
-                        </m:rPr>
-                        <a:rPr lang="en-US" altLang="ko-KR" b="0" i="0" smtClean="0">
-                          <a:latin typeface="Cambria Math" panose="02040503050406030204" pitchFamily="18" charset="0"/>
-                        </a:rPr>
-                        <m:t>G</m:t>
-                      </m:r>
-                      <m:d>
-                        <m:dPr>
-                          <m:ctrlPr>
-                            <a:rPr lang="en-US" altLang="ko-KR" b="0" i="0" smtClean="0">
-                              <a:latin typeface="Cambria Math" panose="02040503050406030204" pitchFamily="18" charset="0"/>
-                            </a:rPr>
-                          </m:ctrlPr>
-                        </m:dPr>
-                        <m:e>
-                          <m:r>
-                            <m:rPr>
-                              <m:sty m:val="p"/>
-                            </m:rPr>
-                            <a:rPr lang="en-US" altLang="ko-KR" b="0" i="0" smtClean="0">
-                              <a:latin typeface="Cambria Math" panose="02040503050406030204" pitchFamily="18" charset="0"/>
-                            </a:rPr>
-                            <m:t>s</m:t>
-                          </m:r>
-                        </m:e>
-                      </m:d>
-                      <m:r>
-                        <a:rPr lang="en-US" altLang="ko-KR" b="0" i="0" smtClean="0">
-                          <a:latin typeface="Cambria Math" panose="02040503050406030204" pitchFamily="18" charset="0"/>
-                        </a:rPr>
-                        <m:t>=</m:t>
-                      </m:r>
-                      <m:r>
-                        <a:rPr lang="en-US" altLang="ko-KR" smtClean="0">
-                          <a:latin typeface="Cambria Math" panose="02040503050406030204" pitchFamily="18" charset="0"/>
-                        </a:rPr>
-                        <m:t>1112.4385</m:t>
-                      </m:r>
-                      <m:r>
-                        <a:rPr lang="en-US" altLang="ko-KR" b="0" i="0" smtClean="0">
-                          <a:latin typeface="Cambria Math" panose="02040503050406030204" pitchFamily="18" charset="0"/>
-                        </a:rPr>
-                        <m:t>∗</m:t>
-                      </m:r>
-                      <m:f>
-                        <m:fPr>
-                          <m:ctrlPr>
-                            <a:rPr lang="en-US" altLang="ko-KR" i="1" smtClean="0">
-                              <a:latin typeface="Cambria Math" panose="02040503050406030204" pitchFamily="18" charset="0"/>
-                            </a:rPr>
-                          </m:ctrlPr>
-                        </m:fPr>
-                        <m:num>
-                          <m:r>
-                            <a:rPr lang="en-US" altLang="ko-KR" i="1">
-                              <a:latin typeface="Cambria Math" panose="02040503050406030204" pitchFamily="18" charset="0"/>
-                            </a:rPr>
-                            <m:t>10.6798</m:t>
-                          </m:r>
-                        </m:num>
-                        <m:den>
-                          <m:r>
-                            <a:rPr lang="en-US" altLang="ko-KR" i="1">
-                              <a:latin typeface="Cambria Math" panose="02040503050406030204" pitchFamily="18" charset="0"/>
-                            </a:rPr>
-                            <m:t>𝑠</m:t>
-                          </m:r>
-                          <m:r>
-                            <a:rPr lang="en-US" altLang="ko-KR" i="1">
-                              <a:latin typeface="Cambria Math" panose="02040503050406030204" pitchFamily="18" charset="0"/>
-                            </a:rPr>
-                            <m:t> +11.0963</m:t>
-                          </m:r>
-                        </m:den>
-                      </m:f>
-                    </m:oMath>
-                  </m:oMathPara>
-                </a14:m>
-                <a:endParaRPr lang="ko-KR" altLang="en-US" dirty="0"/>
-              </a:p>
-            </p:txBody>
-          </p:sp>
-        </mc:Choice>
-        <mc:Fallback>
-          <p:sp>
-            <p:nvSpPr>
-              <p:cNvPr id="20" name="TextBox 19">
-                <a:extLst>
-                  <a:ext uri="{FF2B5EF4-FFF2-40B4-BE49-F238E27FC236}">
-                    <a16:creationId xmlns:a16="http://schemas.microsoft.com/office/drawing/2014/main" id="{0420C7E1-E994-4210-6BAF-48BE017021C3}"/>
-                  </a:ext>
-                </a:extLst>
-              </p:cNvPr>
-              <p:cNvSpPr txBox="1">
-                <a:spLocks noRot="1" noChangeAspect="1" noMove="1" noResize="1" noEditPoints="1" noAdjustHandles="1" noChangeArrowheads="1" noChangeShapeType="1" noTextEdit="1"/>
-              </p:cNvSpPr>
-              <p:nvPr/>
-            </p:nvSpPr>
-            <p:spPr>
-              <a:xfrm>
-                <a:off x="3291528" y="1292174"/>
-                <a:ext cx="3494310" cy="525016"/>
-              </a:xfrm>
-              <a:prstGeom prst="rect">
-                <a:avLst/>
-              </a:prstGeom>
-              <a:blipFill>
-                <a:blip r:embed="rId4"/>
-                <a:stretch>
-                  <a:fillRect/>
-                </a:stretch>
-              </a:blipFill>
-            </p:spPr>
-            <p:txBody>
-              <a:bodyPr/>
-              <a:lstStyle/>
-              <a:p>
-                <a:r>
-                  <a:rPr lang="ko-KR" altLang="en-US">
-                    <a:noFill/>
-                  </a:rPr>
-                  <a:t> </a:t>
-                </a:r>
-              </a:p>
-            </p:txBody>
-          </p:sp>
-        </mc:Fallback>
-      </mc:AlternateContent>
-      <p:sp>
-        <p:nvSpPr>
-          <p:cNvPr id="8" name="Rectangle 8">
-            <a:extLst>
-              <a:ext uri="{FF2B5EF4-FFF2-40B4-BE49-F238E27FC236}">
-                <a16:creationId xmlns:a16="http://schemas.microsoft.com/office/drawing/2014/main" id="{E1E68A2E-EA1F-3EDA-5CD9-49548B46436C}"/>
-              </a:ext>
-            </a:extLst>
-          </p:cNvPr>
-          <p:cNvSpPr>
-            <a:spLocks noChangeArrowheads="1"/>
-          </p:cNvSpPr>
-          <p:nvPr/>
-        </p:nvSpPr>
-        <p:spPr bwMode="auto">
-          <a:xfrm>
-            <a:off x="7033889" y="4314355"/>
-            <a:ext cx="2582823" cy="296941"/>
-          </a:xfrm>
-          <a:prstGeom prst="rect">
-            <a:avLst/>
-          </a:prstGeom>
-          <a:noFill/>
-          <a:ln>
-            <a:noFill/>
-          </a:ln>
-          <a:effectLst/>
-          <a:extLst>
-            <a:ext uri="{909E8E84-426E-40DD-AFC4-6F175D3DCCD1}">
-              <a14:hiddenFill xmlns:a14="http://schemas.microsoft.com/office/drawing/2010/main">
-                <a:solidFill>
-                  <a:schemeClr val="accent1"/>
-                </a:solidFill>
-              </a14:hiddenFill>
-            </a:ext>
-            <a:ext uri="{91240B29-F687-4F45-9708-019B960494DF}">
-              <a14:hiddenLine xmlns:a14="http://schemas.microsoft.com/office/drawing/2010/main" w="9525">
-                <a:solidFill>
-                  <a:schemeClr val="tx1"/>
-                </a:solidFill>
-                <a:miter lim="800000"/>
-                <a:headEnd/>
-                <a:tailEnd/>
-              </a14:hiddenLine>
-            </a:ext>
-            <a:ext uri="{AF507438-7753-43E0-B8FC-AC1667EBCBE1}">
-              <a14:hiddenEffects xmlns:a14="http://schemas.microsoft.com/office/drawing/2010/main">
-                <a:effectLst>
-                  <a:outerShdw dist="35921" dir="2700000" algn="ctr" rotWithShape="0">
-                    <a:schemeClr val="bg2"/>
-                  </a:outerShdw>
-                </a:effectLst>
-              </a14:hiddenEffects>
-            </a:ext>
-          </a:extLst>
-        </p:spPr>
-        <p:txBody>
-          <a:bodyPr vert="horz" wrap="square" lIns="68580" tIns="34290" rIns="68580" bIns="34290" numCol="1" anchor="ctr" anchorCtr="0" compatLnSpc="1">
-            <a:prstTxWarp prst="textNoShape">
-              <a:avLst/>
-            </a:prstTxWarp>
-            <a:spAutoFit/>
-          </a:bodyPr>
-          <a:lstStyle/>
-          <a:p>
-            <a:pPr marL="214313" indent="-214313" defTabSz="685800" eaLnBrk="0" fontAlgn="base" hangingPunct="0">
-              <a:lnSpc>
-                <a:spcPct val="150000"/>
-              </a:lnSpc>
-              <a:spcBef>
-                <a:spcPct val="0"/>
-              </a:spcBef>
-              <a:spcAft>
-                <a:spcPct val="0"/>
-              </a:spcAft>
-              <a:buFont typeface="Wingdings" pitchFamily="2" charset="2"/>
-              <a:buChar char="§"/>
-            </a:pPr>
-            <a:r>
-              <a:rPr lang="en-US" altLang="ko-KR" sz="1100" dirty="0" err="1">
-                <a:cs typeface="Arial" panose="020B0604020202020204" pitchFamily="34" charset="0"/>
-              </a:rPr>
-              <a:t>Fitted_range</a:t>
-            </a:r>
-            <a:r>
-              <a:rPr lang="en-US" altLang="ko-KR" sz="1100" dirty="0">
-                <a:cs typeface="Arial" panose="020B0604020202020204" pitchFamily="34" charset="0"/>
-              </a:rPr>
-              <a:t>: 0.3 – 1.3 [Hz]</a:t>
-            </a:r>
-          </a:p>
-        </p:txBody>
-      </p:sp>
-      <p:pic>
-        <p:nvPicPr>
-          <p:cNvPr id="11" name="그림 10">
-            <a:extLst>
-              <a:ext uri="{FF2B5EF4-FFF2-40B4-BE49-F238E27FC236}">
-                <a16:creationId xmlns:a16="http://schemas.microsoft.com/office/drawing/2014/main" id="{FAD7BA0F-3BD9-C96E-7AC9-646FABE355C9}"/>
-              </a:ext>
-            </a:extLst>
-          </p:cNvPr>
-          <p:cNvPicPr>
-            <a:picLocks noChangeAspect="1"/>
-          </p:cNvPicPr>
-          <p:nvPr/>
-        </p:nvPicPr>
-        <p:blipFill>
-          <a:blip r:embed="rId5"/>
-          <a:stretch>
-            <a:fillRect/>
-          </a:stretch>
-        </p:blipFill>
-        <p:spPr>
-          <a:xfrm>
-            <a:off x="660402" y="2052968"/>
-            <a:ext cx="6125436" cy="4067604"/>
-          </a:xfrm>
-          <a:prstGeom prst="rect">
-            <a:avLst/>
-          </a:prstGeom>
-        </p:spPr>
-      </p:pic>
     </p:spTree>
     <p:extLst>
       <p:ext uri="{BB962C8B-B14F-4D97-AF65-F5344CB8AC3E}">
-        <p14:creationId xmlns:p14="http://schemas.microsoft.com/office/powerpoint/2010/main" val="644253006"/>
+        <p14:creationId xmlns:p14="http://schemas.microsoft.com/office/powerpoint/2010/main" val="3539214073"/>
       </p:ext>
     </p:extLst>
   </p:cSld>
@@ -10012,7 +10913,7 @@
         <p:cNvPr id="1" name="">
           <a:extLst>
             <a:ext uri="{FF2B5EF4-FFF2-40B4-BE49-F238E27FC236}">
-              <a16:creationId xmlns:a16="http://schemas.microsoft.com/office/drawing/2014/main" id="{25F4F7E0-985D-A1C7-A867-292857598BF4}"/>
+              <a16:creationId xmlns:a16="http://schemas.microsoft.com/office/drawing/2014/main" id="{FC1EE620-038D-DE8B-177B-C929795ED2C3}"/>
             </a:ext>
           </a:extLst>
         </p:cNvPr>
@@ -10027,12 +10928,42 @@
           <a:chExt cx="0" cy="0"/>
         </a:xfrm>
       </p:grpSpPr>
+      <p:pic>
+        <p:nvPicPr>
+          <p:cNvPr id="15" name="그림 14">
+            <a:extLst>
+              <a:ext uri="{FF2B5EF4-FFF2-40B4-BE49-F238E27FC236}">
+                <a16:creationId xmlns:a16="http://schemas.microsoft.com/office/drawing/2014/main" id="{CB129279-C8E3-EBAA-567D-89018F9E5C52}"/>
+              </a:ext>
+            </a:extLst>
+          </p:cNvPr>
+          <p:cNvPicPr>
+            <a:picLocks noChangeAspect="1"/>
+          </p:cNvPicPr>
+          <p:nvPr/>
+        </p:nvPicPr>
+        <p:blipFill>
+          <a:blip r:embed="rId3"/>
+          <a:stretch>
+            <a:fillRect/>
+          </a:stretch>
+        </p:blipFill>
+        <p:spPr>
+          <a:xfrm>
+            <a:off x="3862372" y="1096116"/>
+            <a:ext cx="5191155" cy="2718180"/>
+          </a:xfrm>
+          <a:prstGeom prst="rect">
+            <a:avLst/>
+          </a:prstGeom>
+        </p:spPr>
+      </p:pic>
       <p:sp>
         <p:nvSpPr>
           <p:cNvPr id="7" name="제목 6">
             <a:extLst>
               <a:ext uri="{FF2B5EF4-FFF2-40B4-BE49-F238E27FC236}">
-                <a16:creationId xmlns:a16="http://schemas.microsoft.com/office/drawing/2014/main" id="{D484947C-8AAE-C5BD-D97A-DFCBEE12757B}"/>
+                <a16:creationId xmlns:a16="http://schemas.microsoft.com/office/drawing/2014/main" id="{C0EC842D-A96F-7B50-3A36-D8A4CA0EFCCA}"/>
               </a:ext>
             </a:extLst>
           </p:cNvPr>
@@ -10051,28 +10982,11 @@
           <a:lstStyle/>
           <a:p>
             <a:r>
-              <a:rPr lang="en-US" altLang="ko-KR" sz="2400" b="1" dirty="0">
+              <a:rPr lang="en-US" altLang="ko-KR" b="1" dirty="0">
                 <a:latin typeface="+mn-lt"/>
                 <a:ea typeface="나눔스퀘어 Bold" panose="020B0600000101010101" pitchFamily="50" charset="-127"/>
               </a:rPr>
-              <a:t>6. </a:t>
-            </a:r>
-            <a:r>
-              <a:rPr kumimoji="0" lang="en-US" altLang="ko-KR" sz="2400" b="1" i="0" u="none" strike="noStrike" kern="1200" cap="none" spc="0" normalizeH="0" baseline="0" noProof="0" dirty="0">
-                <a:ln>
-                  <a:noFill/>
-                </a:ln>
-                <a:solidFill>
-                  <a:prstClr val="black"/>
-                </a:solidFill>
-                <a:effectLst/>
-                <a:uLnTx/>
-                <a:uFillTx/>
-                <a:latin typeface="Calibri"/>
-                <a:ea typeface="나눔스퀘어 Bold" panose="020B0600000101010101" pitchFamily="50" charset="-127"/>
-                <a:cs typeface="+mj-cs"/>
-              </a:rPr>
-              <a:t>Motor Validation</a:t>
+              <a:t>3. Model Design Method</a:t>
             </a:r>
             <a:endParaRPr lang="ko-KR" altLang="en-US" b="1" dirty="0">
               <a:latin typeface="+mn-lt"/>
@@ -10080,12 +10994,619 @@
           </a:p>
         </p:txBody>
       </p:sp>
-      <p:sp>
-        <p:nvSpPr>
-          <p:cNvPr id="10" name="제목 6">
+      <mc:AlternateContent xmlns:mc="http://schemas.openxmlformats.org/markup-compatibility/2006">
+        <mc:Choice xmlns:a14="http://schemas.microsoft.com/office/drawing/2010/main" Requires="a14">
+          <p:sp>
+            <p:nvSpPr>
+              <p:cNvPr id="10" name="제목 6">
+                <a:extLst>
+                  <a:ext uri="{FF2B5EF4-FFF2-40B4-BE49-F238E27FC236}">
+                    <a16:creationId xmlns:a16="http://schemas.microsoft.com/office/drawing/2014/main" id="{5EA88BA0-7F43-CB8A-5542-6206F7900931}"/>
+                  </a:ext>
+                </a:extLst>
+              </p:cNvPr>
+              <p:cNvSpPr txBox="1">
+                <a:spLocks/>
+              </p:cNvSpPr>
+              <p:nvPr/>
+            </p:nvSpPr>
+            <p:spPr>
+              <a:xfrm>
+                <a:off x="495300" y="902940"/>
+                <a:ext cx="4362450" cy="3624610"/>
+              </a:xfrm>
+              <a:prstGeom prst="rect">
+                <a:avLst/>
+              </a:prstGeom>
+            </p:spPr>
+            <p:txBody>
+              <a:bodyPr vert="horz" lIns="91440" tIns="45720" rIns="91440" bIns="45720" rtlCol="0" anchor="t" anchorCtr="0">
+                <a:normAutofit fontScale="97500" lnSpcReduction="10000"/>
+              </a:bodyPr>
+              <a:lstStyle>
+                <a:lvl1pPr algn="l" defTabSz="914400" rtl="0" eaLnBrk="1" latinLnBrk="1" hangingPunct="1">
+                  <a:lnSpc>
+                    <a:spcPct val="90000"/>
+                  </a:lnSpc>
+                  <a:spcBef>
+                    <a:spcPct val="0"/>
+                  </a:spcBef>
+                  <a:buNone/>
+                  <a:defRPr sz="2400" kern="1200">
+                    <a:solidFill>
+                      <a:schemeClr val="tx1"/>
+                    </a:solidFill>
+                    <a:latin typeface="+mj-lt"/>
+                    <a:ea typeface="+mj-ea"/>
+                    <a:cs typeface="+mj-cs"/>
+                  </a:defRPr>
+                </a:lvl1pPr>
+              </a:lstStyle>
+              <a:p>
+                <a:pPr marL="342900" indent="-342900">
+                  <a:buAutoNum type="alphaUcPeriod" startAt="2"/>
+                </a:pPr>
+                <a:r>
+                  <a:rPr lang="en-US" altLang="ko-KR" sz="1600" b="1" dirty="0">
+                    <a:latin typeface="+mn-lt"/>
+                  </a:rPr>
+                  <a:t>Control Gain Design</a:t>
+                </a:r>
+              </a:p>
+              <a:p>
+                <a:pPr marL="342900" indent="-342900">
+                  <a:buAutoNum type="alphaUcPeriod" startAt="2"/>
+                </a:pPr>
+                <a:endParaRPr lang="en-US" altLang="ko-KR" sz="2100" b="1" dirty="0">
+                  <a:latin typeface="+mn-lt"/>
+                </a:endParaRPr>
+              </a:p>
+              <a:p>
+                <a:pPr marL="628650" lvl="1" indent="-171450">
+                  <a:buFontTx/>
+                  <a:buChar char="-"/>
+                </a:pPr>
+                <a:r>
+                  <a:rPr lang="en-US" altLang="ko-KR" sz="2100" dirty="0"/>
+                  <a:t>Selected Values</a:t>
+                </a:r>
+              </a:p>
+              <a:p>
+                <a:pPr marL="742950" lvl="1" indent="-285750">
+                  <a:buFont typeface="Arial" panose="020B0604020202020204" pitchFamily="34" charset="0"/>
+                  <a:buChar char="•"/>
+                </a:pPr>
+                <a14:m>
+                  <m:oMath xmlns:m="http://schemas.openxmlformats.org/officeDocument/2006/math">
+                    <m:sSub>
+                      <m:sSubPr>
+                        <m:ctrlPr>
+                          <a:rPr lang="en-US" altLang="ko-KR" sz="2100" i="1">
+                            <a:latin typeface="Cambria Math" panose="02040503050406030204" pitchFamily="18" charset="0"/>
+                          </a:rPr>
+                        </m:ctrlPr>
+                      </m:sSubPr>
+                      <m:e>
+                        <m:r>
+                          <a:rPr lang="en-US" altLang="ko-KR" sz="2100" i="1">
+                            <a:latin typeface="Cambria Math" panose="02040503050406030204" pitchFamily="18" charset="0"/>
+                          </a:rPr>
+                          <m:t>𝜔</m:t>
+                        </m:r>
+                      </m:e>
+                      <m:sub>
+                        <m:r>
+                          <a:rPr lang="en-US" altLang="ko-KR" sz="2100" i="1">
+                            <a:latin typeface="Cambria Math" panose="02040503050406030204" pitchFamily="18" charset="0"/>
+                          </a:rPr>
+                          <m:t>𝑛</m:t>
+                        </m:r>
+                      </m:sub>
+                    </m:sSub>
+                    <m:r>
+                      <a:rPr lang="en-US" altLang="ko-KR" sz="2100" i="1">
+                        <a:latin typeface="Cambria Math" panose="02040503050406030204" pitchFamily="18" charset="0"/>
+                      </a:rPr>
+                      <m:t>=35 [</m:t>
+                    </m:r>
+                    <m:r>
+                      <a:rPr lang="en-US" altLang="ko-KR" sz="2100" i="1">
+                        <a:latin typeface="Cambria Math" panose="02040503050406030204" pitchFamily="18" charset="0"/>
+                      </a:rPr>
+                      <m:t>𝑟𝑎𝑑</m:t>
+                    </m:r>
+                    <m:r>
+                      <a:rPr lang="en-US" altLang="ko-KR" sz="2100" i="1">
+                        <a:latin typeface="Cambria Math" panose="02040503050406030204" pitchFamily="18" charset="0"/>
+                      </a:rPr>
+                      <m:t>/</m:t>
+                    </m:r>
+                    <m:r>
+                      <a:rPr lang="en-US" altLang="ko-KR" sz="2100" i="1">
+                        <a:latin typeface="Cambria Math" panose="02040503050406030204" pitchFamily="18" charset="0"/>
+                      </a:rPr>
+                      <m:t>𝑠</m:t>
+                    </m:r>
+                    <m:r>
+                      <a:rPr lang="en-US" altLang="ko-KR" sz="2100" i="1">
+                        <a:latin typeface="Cambria Math" panose="02040503050406030204" pitchFamily="18" charset="0"/>
+                      </a:rPr>
+                      <m:t>]</m:t>
+                    </m:r>
+                  </m:oMath>
+                </a14:m>
+                <a:endParaRPr lang="en-US" altLang="ko-KR" sz="2100" i="1" dirty="0">
+                  <a:latin typeface="Cambria Math" panose="02040503050406030204" pitchFamily="18" charset="0"/>
+                </a:endParaRPr>
+              </a:p>
+              <a:p>
+                <a:pPr marL="742950" lvl="1" indent="-285750">
+                  <a:buFont typeface="Arial" panose="020B0604020202020204" pitchFamily="34" charset="0"/>
+                  <a:buChar char="•"/>
+                </a:pPr>
+                <a:endParaRPr lang="en-US" altLang="ko-KR" sz="2100" i="1" dirty="0">
+                  <a:latin typeface="Cambria Math" panose="02040503050406030204" pitchFamily="18" charset="0"/>
+                </a:endParaRPr>
+              </a:p>
+              <a:p>
+                <a:pPr marL="742950" lvl="1" indent="-285750">
+                  <a:buFont typeface="Arial" panose="020B0604020202020204" pitchFamily="34" charset="0"/>
+                  <a:buChar char="•"/>
+                </a:pPr>
+                <a14:m>
+                  <m:oMath xmlns:m="http://schemas.openxmlformats.org/officeDocument/2006/math">
+                    <m:r>
+                      <a:rPr lang="en-US" altLang="ko-KR" sz="2100" i="1">
+                        <a:latin typeface="Cambria Math" panose="02040503050406030204" pitchFamily="18" charset="0"/>
+                      </a:rPr>
+                      <m:t>𝜁</m:t>
+                    </m:r>
+                    <m:r>
+                      <a:rPr lang="en-US" altLang="ko-KR" sz="2100" i="1">
+                        <a:latin typeface="Cambria Math" panose="02040503050406030204" pitchFamily="18" charset="0"/>
+                      </a:rPr>
+                      <m:t>=0.7 </m:t>
+                    </m:r>
+                    <m:d>
+                      <m:dPr>
+                        <m:begChr m:val="["/>
+                        <m:endChr m:val="]"/>
+                        <m:ctrlPr>
+                          <a:rPr lang="en-US" altLang="ko-KR" sz="2100" i="1">
+                            <a:latin typeface="Cambria Math" panose="02040503050406030204" pitchFamily="18" charset="0"/>
+                          </a:rPr>
+                        </m:ctrlPr>
+                      </m:dPr>
+                      <m:e>
+                        <m:r>
+                          <a:rPr lang="en-US" altLang="ko-KR" sz="2100" i="1">
+                            <a:latin typeface="Cambria Math" panose="02040503050406030204" pitchFamily="18" charset="0"/>
+                          </a:rPr>
+                          <m:t>−</m:t>
+                        </m:r>
+                      </m:e>
+                    </m:d>
+                  </m:oMath>
+                </a14:m>
+                <a:endParaRPr lang="en-US" altLang="ko-KR" sz="2100" i="1" dirty="0">
+                  <a:latin typeface="Cambria Math" panose="02040503050406030204" pitchFamily="18" charset="0"/>
+                </a:endParaRPr>
+              </a:p>
+              <a:p>
+                <a:pPr marL="742950" lvl="1" indent="-285750">
+                  <a:buFont typeface="Arial" panose="020B0604020202020204" pitchFamily="34" charset="0"/>
+                  <a:buChar char="•"/>
+                </a:pPr>
+                <a:endParaRPr lang="en-US" altLang="ko-KR" sz="2100" i="1" dirty="0">
+                  <a:latin typeface="Cambria Math" panose="02040503050406030204" pitchFamily="18" charset="0"/>
+                </a:endParaRPr>
+              </a:p>
+              <a:p>
+                <a:pPr marL="742950" lvl="1" indent="-285750">
+                  <a:buFont typeface="Arial" panose="020B0604020202020204" pitchFamily="34" charset="0"/>
+                  <a:buChar char="•"/>
+                </a:pPr>
+                <a:endParaRPr lang="en-US" altLang="ko-KR" sz="2100" i="1" dirty="0">
+                  <a:latin typeface="Cambria Math" panose="02040503050406030204" pitchFamily="18" charset="0"/>
+                </a:endParaRPr>
+              </a:p>
+              <a:p>
+                <a:pPr marL="628650" lvl="1" indent="-171450">
+                  <a:buFontTx/>
+                  <a:buChar char="-"/>
+                </a:pPr>
+                <a:r>
+                  <a:rPr lang="en-US" altLang="ko-KR" sz="2100" dirty="0"/>
+                  <a:t>Result</a:t>
+                </a:r>
+              </a:p>
+              <a:p>
+                <a:pPr marL="800100" lvl="1" indent="-342900">
+                  <a:buFont typeface="Arial" panose="020B0604020202020204" pitchFamily="34" charset="0"/>
+                  <a:buChar char="•"/>
+                </a:pPr>
+                <a14:m>
+                  <m:oMath xmlns:m="http://schemas.openxmlformats.org/officeDocument/2006/math">
+                    <m:sSub>
+                      <m:sSubPr>
+                        <m:ctrlPr>
+                          <a:rPr lang="en-US" altLang="ko-KR" sz="2100" i="1">
+                            <a:latin typeface="Cambria Math" panose="02040503050406030204" pitchFamily="18" charset="0"/>
+                          </a:rPr>
+                        </m:ctrlPr>
+                      </m:sSubPr>
+                      <m:e>
+                        <m:r>
+                          <a:rPr lang="en-US" altLang="ko-KR" sz="2100" i="1">
+                            <a:latin typeface="Cambria Math" panose="02040503050406030204" pitchFamily="18" charset="0"/>
+                          </a:rPr>
+                          <m:t>𝐾</m:t>
+                        </m:r>
+                      </m:e>
+                      <m:sub>
+                        <m:r>
+                          <a:rPr lang="en-US" altLang="ko-KR" sz="2100" i="1">
+                            <a:latin typeface="Cambria Math" panose="02040503050406030204" pitchFamily="18" charset="0"/>
+                          </a:rPr>
+                          <m:t>𝑝</m:t>
+                        </m:r>
+                      </m:sub>
+                    </m:sSub>
+                    <m:r>
+                      <a:rPr lang="en-US" altLang="ko-KR" sz="2100" i="1">
+                        <a:latin typeface="Cambria Math" panose="02040503050406030204" pitchFamily="18" charset="0"/>
+                      </a:rPr>
+                      <m:t>=</m:t>
+                    </m:r>
+                    <m:f>
+                      <m:fPr>
+                        <m:ctrlPr>
+                          <a:rPr lang="en-US" altLang="ko-KR" sz="2100" i="1">
+                            <a:latin typeface="Cambria Math" panose="02040503050406030204" pitchFamily="18" charset="0"/>
+                          </a:rPr>
+                        </m:ctrlPr>
+                      </m:fPr>
+                      <m:num>
+                        <m:sSubSup>
+                          <m:sSubSupPr>
+                            <m:ctrlPr>
+                              <a:rPr lang="en-US" altLang="ko-KR" sz="2100" i="1">
+                                <a:latin typeface="Cambria Math" panose="02040503050406030204" pitchFamily="18" charset="0"/>
+                              </a:rPr>
+                            </m:ctrlPr>
+                          </m:sSubSupPr>
+                          <m:e>
+                            <m:r>
+                              <a:rPr lang="en-US" altLang="ko-KR" sz="2100" i="1">
+                                <a:latin typeface="Cambria Math" panose="02040503050406030204" pitchFamily="18" charset="0"/>
+                              </a:rPr>
+                              <m:t>𝜔</m:t>
+                            </m:r>
+                          </m:e>
+                          <m:sub>
+                            <m:r>
+                              <a:rPr lang="en-US" altLang="ko-KR" sz="2100" i="1">
+                                <a:latin typeface="Cambria Math" panose="02040503050406030204" pitchFamily="18" charset="0"/>
+                              </a:rPr>
+                              <m:t>𝑐</m:t>
+                            </m:r>
+                          </m:sub>
+                          <m:sup>
+                            <m:r>
+                              <a:rPr lang="en-US" altLang="ko-KR" sz="2100" i="1">
+                                <a:latin typeface="Cambria Math" panose="02040503050406030204" pitchFamily="18" charset="0"/>
+                              </a:rPr>
+                              <m:t>2</m:t>
+                            </m:r>
+                          </m:sup>
+                        </m:sSubSup>
+                      </m:num>
+                      <m:den>
+                        <m:sSub>
+                          <m:sSubPr>
+                            <m:ctrlPr>
+                              <a:rPr lang="en-US" altLang="ko-KR" sz="2100" i="1">
+                                <a:latin typeface="Cambria Math" panose="02040503050406030204" pitchFamily="18" charset="0"/>
+                              </a:rPr>
+                            </m:ctrlPr>
+                          </m:sSubPr>
+                          <m:e>
+                            <m:r>
+                              <a:rPr lang="en-US" altLang="ko-KR" sz="2100" i="1">
+                                <a:latin typeface="Cambria Math" panose="02040503050406030204" pitchFamily="18" charset="0"/>
+                              </a:rPr>
+                              <m:t>𝐾</m:t>
+                            </m:r>
+                          </m:e>
+                          <m:sub>
+                            <m:r>
+                              <a:rPr lang="en-US" altLang="ko-KR" sz="2100" i="1">
+                                <a:latin typeface="Cambria Math" panose="02040503050406030204" pitchFamily="18" charset="0"/>
+                              </a:rPr>
+                              <m:t>𝑚</m:t>
+                            </m:r>
+                          </m:sub>
+                        </m:sSub>
+                      </m:den>
+                    </m:f>
+                    <m:r>
+                      <a:rPr lang="en-US" altLang="ko-KR" sz="2100" i="1">
+                        <a:latin typeface="Cambria Math" panose="02040503050406030204" pitchFamily="18" charset="0"/>
+                      </a:rPr>
+                      <m:t>=0.090363</m:t>
+                    </m:r>
+                  </m:oMath>
+                </a14:m>
+                <a:endParaRPr lang="en-US" altLang="ko-KR" sz="2100" dirty="0"/>
+              </a:p>
+              <a:p>
+                <a:pPr lvl="1"/>
+                <a:endParaRPr lang="en-US" altLang="ko-KR" sz="2100" dirty="0"/>
+              </a:p>
+              <a:p>
+                <a:pPr marL="742950" lvl="1" indent="-285750">
+                  <a:buFont typeface="Arial" panose="020B0604020202020204" pitchFamily="34" charset="0"/>
+                  <a:buChar char="•"/>
+                </a:pPr>
+                <a14:m>
+                  <m:oMath xmlns:m="http://schemas.openxmlformats.org/officeDocument/2006/math">
+                    <m:sSub>
+                      <m:sSubPr>
+                        <m:ctrlPr>
+                          <a:rPr lang="en-US" altLang="ko-KR" sz="2100" i="1">
+                            <a:latin typeface="Cambria Math" panose="02040503050406030204" pitchFamily="18" charset="0"/>
+                          </a:rPr>
+                        </m:ctrlPr>
+                      </m:sSubPr>
+                      <m:e>
+                        <m:r>
+                          <a:rPr lang="en-US" altLang="ko-KR" sz="2100" i="1">
+                            <a:latin typeface="Cambria Math" panose="02040503050406030204" pitchFamily="18" charset="0"/>
+                          </a:rPr>
+                          <m:t>𝐾</m:t>
+                        </m:r>
+                      </m:e>
+                      <m:sub>
+                        <m:r>
+                          <a:rPr lang="en-US" altLang="ko-KR" sz="2100" i="1">
+                            <a:latin typeface="Cambria Math" panose="02040503050406030204" pitchFamily="18" charset="0"/>
+                          </a:rPr>
+                          <m:t>𝑑</m:t>
+                        </m:r>
+                      </m:sub>
+                    </m:sSub>
+                    <m:r>
+                      <a:rPr lang="en-US" altLang="ko-KR" sz="2100" i="1">
+                        <a:latin typeface="Cambria Math" panose="02040503050406030204" pitchFamily="18" charset="0"/>
+                      </a:rPr>
+                      <m:t>=</m:t>
+                    </m:r>
+                    <m:f>
+                      <m:fPr>
+                        <m:ctrlPr>
+                          <a:rPr lang="en-US" altLang="ko-KR" sz="2100" i="1">
+                            <a:latin typeface="Cambria Math" panose="02040503050406030204" pitchFamily="18" charset="0"/>
+                          </a:rPr>
+                        </m:ctrlPr>
+                      </m:fPr>
+                      <m:num>
+                        <m:sSub>
+                          <m:sSubPr>
+                            <m:ctrlPr>
+                              <a:rPr lang="en-US" altLang="ko-KR" sz="2100" i="1">
+                                <a:latin typeface="Cambria Math" panose="02040503050406030204" pitchFamily="18" charset="0"/>
+                              </a:rPr>
+                            </m:ctrlPr>
+                          </m:sSubPr>
+                          <m:e>
+                            <m:r>
+                              <a:rPr lang="en-US" altLang="ko-KR" sz="2100" i="1">
+                                <a:latin typeface="Cambria Math" panose="02040503050406030204" pitchFamily="18" charset="0"/>
+                              </a:rPr>
+                              <m:t>2</m:t>
+                            </m:r>
+                            <m:r>
+                              <a:rPr lang="en-US" altLang="ko-KR" sz="2100" i="1">
+                                <a:latin typeface="Cambria Math" panose="02040503050406030204" pitchFamily="18" charset="0"/>
+                              </a:rPr>
+                              <m:t>𝜁</m:t>
+                            </m:r>
+                            <m:sSub>
+                              <m:sSubPr>
+                                <m:ctrlPr>
+                                  <a:rPr lang="en-US" altLang="ko-KR" sz="2100" i="1">
+                                    <a:latin typeface="Cambria Math" panose="02040503050406030204" pitchFamily="18" charset="0"/>
+                                  </a:rPr>
+                                </m:ctrlPr>
+                              </m:sSubPr>
+                              <m:e>
+                                <m:r>
+                                  <a:rPr lang="en-US" altLang="ko-KR" sz="2100" i="1">
+                                    <a:latin typeface="Cambria Math" panose="02040503050406030204" pitchFamily="18" charset="0"/>
+                                  </a:rPr>
+                                  <m:t>𝜔</m:t>
+                                </m:r>
+                              </m:e>
+                              <m:sub>
+                                <m:r>
+                                  <a:rPr lang="en-US" altLang="ko-KR" sz="2100" i="1">
+                                    <a:latin typeface="Cambria Math" panose="02040503050406030204" pitchFamily="18" charset="0"/>
+                                  </a:rPr>
+                                  <m:t>𝑐</m:t>
+                                </m:r>
+                              </m:sub>
+                            </m:sSub>
+                            <m:r>
+                              <a:rPr lang="en-US" altLang="ko-KR" sz="2100" i="1">
+                                <a:latin typeface="Cambria Math" panose="02040503050406030204" pitchFamily="18" charset="0"/>
+                              </a:rPr>
+                              <m:t>−</m:t>
+                            </m:r>
+                            <m:r>
+                              <a:rPr lang="en-US" altLang="ko-KR" sz="2100" i="1">
+                                <a:latin typeface="Cambria Math" panose="02040503050406030204" pitchFamily="18" charset="0"/>
+                              </a:rPr>
+                              <m:t>𝑃</m:t>
+                            </m:r>
+                          </m:e>
+                          <m:sub>
+                            <m:r>
+                              <a:rPr lang="en-US" altLang="ko-KR" sz="2100" i="1">
+                                <a:latin typeface="Cambria Math" panose="02040503050406030204" pitchFamily="18" charset="0"/>
+                              </a:rPr>
+                              <m:t>𝑚</m:t>
+                            </m:r>
+                          </m:sub>
+                        </m:sSub>
+                      </m:num>
+                      <m:den>
+                        <m:sSub>
+                          <m:sSubPr>
+                            <m:ctrlPr>
+                              <a:rPr lang="en-US" altLang="ko-KR" sz="2100" i="1">
+                                <a:latin typeface="Cambria Math" panose="02040503050406030204" pitchFamily="18" charset="0"/>
+                              </a:rPr>
+                            </m:ctrlPr>
+                          </m:sSubPr>
+                          <m:e>
+                            <m:r>
+                              <a:rPr lang="en-US" altLang="ko-KR" sz="2100" i="1">
+                                <a:latin typeface="Cambria Math" panose="02040503050406030204" pitchFamily="18" charset="0"/>
+                              </a:rPr>
+                              <m:t>𝐾</m:t>
+                            </m:r>
+                          </m:e>
+                          <m:sub>
+                            <m:r>
+                              <a:rPr lang="en-US" altLang="ko-KR" sz="2100" i="1">
+                                <a:latin typeface="Cambria Math" panose="02040503050406030204" pitchFamily="18" charset="0"/>
+                              </a:rPr>
+                              <m:t>𝑚</m:t>
+                            </m:r>
+                          </m:sub>
+                        </m:sSub>
+                      </m:den>
+                    </m:f>
+                    <m:r>
+                      <a:rPr lang="en-US" altLang="ko-KR" sz="2100" i="1">
+                        <a:latin typeface="Cambria Math" panose="02040503050406030204" pitchFamily="18" charset="0"/>
+                      </a:rPr>
+                      <m:t>=0.002846</m:t>
+                    </m:r>
+                  </m:oMath>
+                </a14:m>
+                <a:endParaRPr lang="en-US" altLang="ko-KR" sz="2100" dirty="0"/>
+              </a:p>
+              <a:p>
+                <a:pPr marL="742950" lvl="1" indent="-285750">
+                  <a:buFont typeface="Arial" panose="020B0604020202020204" pitchFamily="34" charset="0"/>
+                  <a:buChar char="•"/>
+                </a:pPr>
+                <a:endParaRPr lang="en-US" altLang="ko-KR" sz="1600" i="1" dirty="0">
+                  <a:latin typeface="Cambria Math" panose="02040503050406030204" pitchFamily="18" charset="0"/>
+                </a:endParaRPr>
+              </a:p>
+              <a:p>
+                <a:pPr marL="628650" lvl="1" indent="-171450">
+                  <a:buFontTx/>
+                  <a:buChar char="-"/>
+                </a:pPr>
+                <a:endParaRPr lang="en-US" altLang="ko-KR" sz="1600" dirty="0">
+                  <a:latin typeface="+mn-lt"/>
+                </a:endParaRPr>
+              </a:p>
+              <a:p>
+                <a:pPr marL="628650" lvl="1" indent="-171450">
+                  <a:buFontTx/>
+                  <a:buChar char="-"/>
+                </a:pPr>
+                <a:endParaRPr lang="ko-KR" altLang="en-US" sz="1000" b="1" dirty="0">
+                  <a:latin typeface="+mn-lt"/>
+                </a:endParaRPr>
+              </a:p>
+            </p:txBody>
+          </p:sp>
+        </mc:Choice>
+        <mc:Fallback>
+          <p:sp>
+            <p:nvSpPr>
+              <p:cNvPr id="10" name="제목 6">
+                <a:extLst>
+                  <a:ext uri="{FF2B5EF4-FFF2-40B4-BE49-F238E27FC236}">
+                    <a16:creationId xmlns:a16="http://schemas.microsoft.com/office/drawing/2014/main" id="{5EA88BA0-7F43-CB8A-5542-6206F7900931}"/>
+                  </a:ext>
+                </a:extLst>
+              </p:cNvPr>
+              <p:cNvSpPr txBox="1">
+                <a:spLocks noRot="1" noChangeAspect="1" noMove="1" noResize="1" noEditPoints="1" noAdjustHandles="1" noChangeArrowheads="1" noChangeShapeType="1" noTextEdit="1"/>
+              </p:cNvSpPr>
+              <p:nvPr/>
+            </p:nvSpPr>
+            <p:spPr>
+              <a:xfrm>
+                <a:off x="495300" y="902940"/>
+                <a:ext cx="4362450" cy="3624610"/>
+              </a:xfrm>
+              <a:prstGeom prst="rect">
+                <a:avLst/>
+              </a:prstGeom>
+              <a:blipFill>
+                <a:blip r:embed="rId4"/>
+                <a:stretch>
+                  <a:fillRect l="-698" t="-1681"/>
+                </a:stretch>
+              </a:blipFill>
+            </p:spPr>
+            <p:txBody>
+              <a:bodyPr/>
+              <a:lstStyle/>
+              <a:p>
+                <a:r>
+                  <a:rPr lang="ko-KR" altLang="en-US">
+                    <a:noFill/>
+                  </a:rPr>
+                  <a:t> </a:t>
+                </a:r>
+              </a:p>
+            </p:txBody>
+          </p:sp>
+        </mc:Fallback>
+      </mc:AlternateContent>
+      <p:sp>
+        <p:nvSpPr>
+          <p:cNvPr id="2" name="슬라이드 번호 개체 틀 1">
             <a:extLst>
               <a:ext uri="{FF2B5EF4-FFF2-40B4-BE49-F238E27FC236}">
-                <a16:creationId xmlns:a16="http://schemas.microsoft.com/office/drawing/2014/main" id="{DA5556BD-9CD0-21ED-707A-53417A1DB39C}"/>
+                <a16:creationId xmlns:a16="http://schemas.microsoft.com/office/drawing/2014/main" id="{CD3C6554-AAC4-38F2-83F5-D814DF46C687}"/>
+              </a:ext>
+            </a:extLst>
+          </p:cNvPr>
+          <p:cNvSpPr>
+            <a:spLocks noGrp="1"/>
+          </p:cNvSpPr>
+          <p:nvPr>
+            <p:ph type="sldNum" sz="quarter" idx="12"/>
+          </p:nvPr>
+        </p:nvSpPr>
+        <p:spPr/>
+        <p:txBody>
+          <a:bodyPr/>
+          <a:lstStyle/>
+          <a:p>
+            <a:fld id="{57A7753D-33D3-4DE4-B918-257BB52428D1}" type="slidenum">
+              <a:rPr lang="ko-KR" altLang="en-US" smtClean="0"/>
+              <a:t>5</a:t>
+            </a:fld>
+            <a:endParaRPr lang="ko-KR" altLang="en-US"/>
+          </a:p>
+        </p:txBody>
+      </p:sp>
+      <p:sp>
+        <p:nvSpPr>
+          <p:cNvPr id="17" name="제목 6">
+            <a:extLst>
+              <a:ext uri="{FF2B5EF4-FFF2-40B4-BE49-F238E27FC236}">
+                <a16:creationId xmlns:a16="http://schemas.microsoft.com/office/drawing/2014/main" id="{3D79B308-07CF-AF87-5FEE-B7B870835B1F}"/>
               </a:ext>
             </a:extLst>
           </p:cNvPr>
@@ -10096,15 +11617,15 @@
         </p:nvSpPr>
         <p:spPr>
           <a:xfrm>
-            <a:off x="495300" y="902940"/>
-            <a:ext cx="3236690" cy="413292"/>
+            <a:off x="584200" y="2462392"/>
+            <a:ext cx="4362450" cy="1351904"/>
           </a:xfrm>
           <a:prstGeom prst="rect">
             <a:avLst/>
           </a:prstGeom>
         </p:spPr>
         <p:txBody>
-          <a:bodyPr vert="horz" lIns="91440" tIns="45720" rIns="91440" bIns="45720" rtlCol="0" anchor="ctr">
+          <a:bodyPr vert="horz" lIns="91440" tIns="45720" rIns="91440" bIns="45720" rtlCol="0" anchor="t" anchorCtr="0">
             <a:normAutofit fontScale="97500"/>
           </a:bodyPr>
           <a:lstStyle>
@@ -10127,13 +11648,11 @@
             </a:lvl1pPr>
           </a:lstStyle>
           <a:p>
-            <a:r>
-              <a:rPr lang="en-US" altLang="ko-KR" sz="1600" b="1" dirty="0">
-                <a:latin typeface="+mn-lt"/>
-              </a:rPr>
-              <a:t>Representative Frequencies: </a:t>
-            </a:r>
-            <a:endParaRPr lang="ko-KR" altLang="en-US" sz="1600" b="1" dirty="0">
+            <a:pPr marL="628650" lvl="1" indent="-171450">
+              <a:buFontTx/>
+              <a:buChar char="-"/>
+            </a:pPr>
+            <a:endParaRPr lang="ko-KR" altLang="en-US" sz="1000" b="1" dirty="0">
               <a:latin typeface="+mn-lt"/>
             </a:endParaRPr>
           </a:p>
@@ -10141,97 +11660,134 @@
       </p:sp>
       <p:sp>
         <p:nvSpPr>
-          <p:cNvPr id="2" name="슬라이드 번호 개체 틀 1">
+          <p:cNvPr id="6" name="곱하기 기호 5">
             <a:extLst>
               <a:ext uri="{FF2B5EF4-FFF2-40B4-BE49-F238E27FC236}">
-                <a16:creationId xmlns:a16="http://schemas.microsoft.com/office/drawing/2014/main" id="{14486FAE-72F6-755D-75A5-E909A86F2511}"/>
+                <a16:creationId xmlns:a16="http://schemas.microsoft.com/office/drawing/2014/main" id="{BB77F5F3-5BC6-3D24-A78E-AA10EEB17695}"/>
               </a:ext>
             </a:extLst>
           </p:cNvPr>
-          <p:cNvSpPr>
-            <a:spLocks noGrp="1"/>
-          </p:cNvSpPr>
-          <p:nvPr>
-            <p:ph type="sldNum" sz="quarter" idx="12"/>
-          </p:nvPr>
-        </p:nvSpPr>
-        <p:spPr/>
-        <p:txBody>
-          <a:bodyPr/>
+          <p:cNvSpPr/>
+          <p:nvPr/>
+        </p:nvSpPr>
+        <p:spPr>
+          <a:xfrm>
+            <a:off x="7969251" y="1370769"/>
+            <a:ext cx="152400" cy="133350"/>
+          </a:xfrm>
+          <a:prstGeom prst="mathMultiply">
+            <a:avLst/>
+          </a:prstGeom>
+          <a:ln>
+            <a:solidFill>
+              <a:schemeClr val="accent1"/>
+            </a:solidFill>
+          </a:ln>
+        </p:spPr>
+        <p:style>
+          <a:lnRef idx="2">
+            <a:schemeClr val="accent1">
+              <a:shade val="15000"/>
+            </a:schemeClr>
+          </a:lnRef>
+          <a:fillRef idx="1">
+            <a:schemeClr val="accent1"/>
+          </a:fillRef>
+          <a:effectRef idx="0">
+            <a:schemeClr val="accent1"/>
+          </a:effectRef>
+          <a:fontRef idx="minor">
+            <a:schemeClr val="lt1"/>
+          </a:fontRef>
+        </p:style>
+        <p:txBody>
+          <a:bodyPr rtlCol="0" anchor="ctr"/>
           <a:lstStyle/>
           <a:p>
-            <a:fld id="{57A7753D-33D3-4DE4-B918-257BB52428D1}" type="slidenum">
-              <a:rPr lang="ko-KR" altLang="en-US" smtClean="0"/>
-              <a:t>5</a:t>
-            </a:fld>
-            <a:endParaRPr lang="ko-KR" altLang="en-US"/>
-          </a:p>
-        </p:txBody>
-      </p:sp>
-      <p:pic>
-        <p:nvPicPr>
-          <p:cNvPr id="12" name="그림 11">
+            <a:pPr algn="ctr"/>
+            <a:endParaRPr lang="ko-KR" altLang="en-US">
+              <a:ln w="0"/>
+              <a:solidFill>
+                <a:schemeClr val="accent1"/>
+              </a:solidFill>
+              <a:effectLst>
+                <a:outerShdw blurRad="38100" dist="25400" dir="5400000" algn="ctr" rotWithShape="0">
+                  <a:srgbClr val="6E747A">
+                    <a:alpha val="43000"/>
+                  </a:srgbClr>
+                </a:outerShdw>
+              </a:effectLst>
+            </a:endParaRPr>
+          </a:p>
+        </p:txBody>
+      </p:sp>
+      <p:sp>
+        <p:nvSpPr>
+          <p:cNvPr id="11" name="곱하기 기호 10">
             <a:extLst>
               <a:ext uri="{FF2B5EF4-FFF2-40B4-BE49-F238E27FC236}">
-                <a16:creationId xmlns:a16="http://schemas.microsoft.com/office/drawing/2014/main" id="{04CF4696-3DFE-E864-A2F9-8018C2E3BC54}"/>
+                <a16:creationId xmlns:a16="http://schemas.microsoft.com/office/drawing/2014/main" id="{C4C3889B-401D-F506-AD40-8CE454001928}"/>
               </a:ext>
             </a:extLst>
           </p:cNvPr>
-          <p:cNvPicPr>
-            <a:picLocks noChangeAspect="1"/>
-          </p:cNvPicPr>
+          <p:cNvSpPr/>
           <p:nvPr/>
-        </p:nvPicPr>
-        <p:blipFill>
-          <a:blip r:embed="rId3"/>
-          <a:stretch>
-            <a:fillRect/>
-          </a:stretch>
-        </p:blipFill>
+        </p:nvSpPr>
         <p:spPr>
           <a:xfrm>
-            <a:off x="495300" y="1684581"/>
-            <a:ext cx="4310387" cy="2992278"/>
+            <a:off x="7983009" y="3362325"/>
+            <a:ext cx="152400" cy="133350"/>
           </a:xfrm>
-          <a:prstGeom prst="rect">
+          <a:prstGeom prst="mathMultiply">
             <a:avLst/>
           </a:prstGeom>
+          <a:ln>
+            <a:solidFill>
+              <a:schemeClr val="accent1"/>
+            </a:solidFill>
+          </a:ln>
         </p:spPr>
-      </p:pic>
-      <p:pic>
-        <p:nvPicPr>
-          <p:cNvPr id="14" name="그림 13">
-            <a:extLst>
-              <a:ext uri="{FF2B5EF4-FFF2-40B4-BE49-F238E27FC236}">
-                <a16:creationId xmlns:a16="http://schemas.microsoft.com/office/drawing/2014/main" id="{E39F5530-14DD-0A91-E0E3-A183C5DAA1CE}"/>
-              </a:ext>
-            </a:extLst>
-          </p:cNvPr>
-          <p:cNvPicPr>
-            <a:picLocks noChangeAspect="1"/>
-          </p:cNvPicPr>
-          <p:nvPr/>
-        </p:nvPicPr>
-        <p:blipFill>
-          <a:blip r:embed="rId4"/>
-          <a:stretch>
-            <a:fillRect/>
-          </a:stretch>
-        </p:blipFill>
-        <p:spPr>
-          <a:xfrm>
-            <a:off x="4861379" y="1818059"/>
-            <a:ext cx="4034514" cy="2725322"/>
-          </a:xfrm>
-          <a:prstGeom prst="rect">
-            <a:avLst/>
-          </a:prstGeom>
-        </p:spPr>
-      </p:pic>
+        <p:style>
+          <a:lnRef idx="2">
+            <a:schemeClr val="accent1">
+              <a:shade val="15000"/>
+            </a:schemeClr>
+          </a:lnRef>
+          <a:fillRef idx="1">
+            <a:schemeClr val="accent1"/>
+          </a:fillRef>
+          <a:effectRef idx="0">
+            <a:schemeClr val="accent1"/>
+          </a:effectRef>
+          <a:fontRef idx="minor">
+            <a:schemeClr val="lt1"/>
+          </a:fontRef>
+        </p:style>
+        <p:txBody>
+          <a:bodyPr rtlCol="0" anchor="ctr"/>
+          <a:lstStyle/>
+          <a:p>
+            <a:pPr algn="ctr"/>
+            <a:endParaRPr lang="ko-KR" altLang="en-US">
+              <a:ln w="0"/>
+              <a:solidFill>
+                <a:schemeClr val="accent1"/>
+              </a:solidFill>
+              <a:effectLst>
+                <a:outerShdw blurRad="38100" dist="25400" dir="5400000" algn="ctr" rotWithShape="0">
+                  <a:srgbClr val="6E747A">
+                    <a:alpha val="43000"/>
+                  </a:srgbClr>
+                </a:outerShdw>
+              </a:effectLst>
+            </a:endParaRPr>
+          </a:p>
+        </p:txBody>
+      </p:sp>
     </p:spTree>
     <p:extLst>
       <p:ext uri="{BB962C8B-B14F-4D97-AF65-F5344CB8AC3E}">
-        <p14:creationId xmlns:p14="http://schemas.microsoft.com/office/powerpoint/2010/main" val="1965540210"/>
+        <p14:creationId xmlns:p14="http://schemas.microsoft.com/office/powerpoint/2010/main" val="2348408823"/>
       </p:ext>
     </p:extLst>
   </p:cSld>
@@ -10257,7 +11813,7 @@
         <p:cNvPr id="1" name="">
           <a:extLst>
             <a:ext uri="{FF2B5EF4-FFF2-40B4-BE49-F238E27FC236}">
-              <a16:creationId xmlns:a16="http://schemas.microsoft.com/office/drawing/2014/main" id="{DBAD69C9-44F8-30BA-E1FB-DCFBAE4306BC}"/>
+              <a16:creationId xmlns:a16="http://schemas.microsoft.com/office/drawing/2014/main" id="{6F7D5CCC-712B-89A8-31FC-1FB11C5F2501}"/>
             </a:ext>
           </a:extLst>
         </p:cNvPr>
@@ -10277,7 +11833,7 @@
           <p:cNvPr id="7" name="제목 6">
             <a:extLst>
               <a:ext uri="{FF2B5EF4-FFF2-40B4-BE49-F238E27FC236}">
-                <a16:creationId xmlns:a16="http://schemas.microsoft.com/office/drawing/2014/main" id="{5FEAC638-5B11-07D1-AFE5-B9E208A0BC03}"/>
+                <a16:creationId xmlns:a16="http://schemas.microsoft.com/office/drawing/2014/main" id="{A272025F-FBF7-B791-216C-2F0A7D6F5247}"/>
               </a:ext>
             </a:extLst>
           </p:cNvPr>
@@ -10296,90 +11852,14 @@
           <a:lstStyle/>
           <a:p>
             <a:r>
-              <a:rPr lang="en-US" altLang="ko-KR" sz="2400" b="1" dirty="0">
+              <a:rPr lang="en-US" altLang="ko-KR" b="1" dirty="0">
                 <a:latin typeface="+mn-lt"/>
                 <a:ea typeface="나눔스퀘어 Bold" panose="020B0600000101010101" pitchFamily="50" charset="-127"/>
               </a:rPr>
-              <a:t>6. </a:t>
-            </a:r>
-            <a:r>
-              <a:rPr kumimoji="0" lang="en-US" altLang="ko-KR" sz="2400" b="1" i="0" u="none" strike="noStrike" kern="1200" cap="none" spc="0" normalizeH="0" baseline="0" noProof="0" dirty="0">
-                <a:ln>
-                  <a:noFill/>
-                </a:ln>
-                <a:solidFill>
-                  <a:prstClr val="black"/>
-                </a:solidFill>
-                <a:effectLst/>
-                <a:uLnTx/>
-                <a:uFillTx/>
-                <a:latin typeface="Calibri"/>
-                <a:ea typeface="나눔스퀘어 Bold" panose="020B0600000101010101" pitchFamily="50" charset="-127"/>
-                <a:cs typeface="+mj-cs"/>
-              </a:rPr>
-              <a:t>Motor Validation</a:t>
+              <a:t>4. Design Model</a:t>
             </a:r>
             <a:endParaRPr lang="ko-KR" altLang="en-US" b="1" dirty="0">
-              <a:latin typeface="+mn-lt"/>
-            </a:endParaRPr>
-          </a:p>
-        </p:txBody>
-      </p:sp>
-      <p:sp>
-        <p:nvSpPr>
-          <p:cNvPr id="10" name="제목 6">
-            <a:extLst>
-              <a:ext uri="{FF2B5EF4-FFF2-40B4-BE49-F238E27FC236}">
-                <a16:creationId xmlns:a16="http://schemas.microsoft.com/office/drawing/2014/main" id="{9235C69B-E9B9-0DF3-C1BF-F356D4C79DC1}"/>
-              </a:ext>
-            </a:extLst>
-          </p:cNvPr>
-          <p:cNvSpPr txBox="1">
-            <a:spLocks/>
-          </p:cNvSpPr>
-          <p:nvPr/>
-        </p:nvSpPr>
-        <p:spPr>
-          <a:xfrm>
-            <a:off x="495300" y="902940"/>
-            <a:ext cx="3236690" cy="413292"/>
-          </a:xfrm>
-          <a:prstGeom prst="rect">
-            <a:avLst/>
-          </a:prstGeom>
-        </p:spPr>
-        <p:txBody>
-          <a:bodyPr vert="horz" lIns="91440" tIns="45720" rIns="91440" bIns="45720" rtlCol="0" anchor="ctr">
-            <a:normAutofit fontScale="97500"/>
-          </a:bodyPr>
-          <a:lstStyle>
-            <a:lvl1pPr algn="l" defTabSz="914400" rtl="0" eaLnBrk="1" latinLnBrk="1" hangingPunct="1">
-              <a:lnSpc>
-                <a:spcPct val="90000"/>
-              </a:lnSpc>
-              <a:spcBef>
-                <a:spcPct val="0"/>
-              </a:spcBef>
-              <a:buNone/>
-              <a:defRPr sz="2400" kern="1200">
-                <a:solidFill>
-                  <a:schemeClr val="tx1"/>
-                </a:solidFill>
-                <a:latin typeface="+mj-lt"/>
-                <a:ea typeface="+mj-ea"/>
-                <a:cs typeface="+mj-cs"/>
-              </a:defRPr>
-            </a:lvl1pPr>
-          </a:lstStyle>
-          <a:p>
-            <a:r>
-              <a:rPr lang="en-US" altLang="ko-KR" sz="1600" b="1" dirty="0">
-                <a:latin typeface="+mn-lt"/>
-              </a:rPr>
-              <a:t>Representative Frequencies: </a:t>
-            </a:r>
-            <a:endParaRPr lang="ko-KR" altLang="en-US" sz="1600" b="1" dirty="0">
-              <a:latin typeface="+mn-lt"/>
+              <a:latin typeface="+mj-ea"/>
             </a:endParaRPr>
           </a:p>
         </p:txBody>
@@ -10389,7 +11869,7 @@
           <p:cNvPr id="2" name="슬라이드 번호 개체 틀 1">
             <a:extLst>
               <a:ext uri="{FF2B5EF4-FFF2-40B4-BE49-F238E27FC236}">
-                <a16:creationId xmlns:a16="http://schemas.microsoft.com/office/drawing/2014/main" id="{AD58FBEE-9F38-1B25-3BB3-219414833551}"/>
+                <a16:creationId xmlns:a16="http://schemas.microsoft.com/office/drawing/2014/main" id="{84C19963-35BA-8791-23E3-8C3F19584C50}"/>
               </a:ext>
             </a:extLst>
           </p:cNvPr>
@@ -10415,10 +11895,10 @@
       </p:sp>
       <p:pic>
         <p:nvPicPr>
-          <p:cNvPr id="5" name="그림 4">
+          <p:cNvPr id="8" name="그림 7">
             <a:extLst>
               <a:ext uri="{FF2B5EF4-FFF2-40B4-BE49-F238E27FC236}">
-                <a16:creationId xmlns:a16="http://schemas.microsoft.com/office/drawing/2014/main" id="{E2210738-76F3-9A59-F017-2FF2C0F9934E}"/>
+                <a16:creationId xmlns:a16="http://schemas.microsoft.com/office/drawing/2014/main" id="{49E22F66-1324-ABD2-E595-5DA2F575CA8C}"/>
               </a:ext>
             </a:extLst>
           </p:cNvPr>
@@ -10435,38 +11915,8 @@
         </p:blipFill>
         <p:spPr>
           <a:xfrm>
-            <a:off x="366425" y="1395351"/>
-            <a:ext cx="4205575" cy="2861252"/>
-          </a:xfrm>
-          <a:prstGeom prst="rect">
-            <a:avLst/>
-          </a:prstGeom>
-        </p:spPr>
-      </p:pic>
-      <p:pic>
-        <p:nvPicPr>
-          <p:cNvPr id="8" name="그림 7">
-            <a:extLst>
-              <a:ext uri="{FF2B5EF4-FFF2-40B4-BE49-F238E27FC236}">
-                <a16:creationId xmlns:a16="http://schemas.microsoft.com/office/drawing/2014/main" id="{CECAD06E-6EF9-73FC-8911-9C0E4E113A3B}"/>
-              </a:ext>
-            </a:extLst>
-          </p:cNvPr>
-          <p:cNvPicPr>
-            <a:picLocks noChangeAspect="1"/>
-          </p:cNvPicPr>
-          <p:nvPr/>
-        </p:nvPicPr>
-        <p:blipFill>
-          <a:blip r:embed="rId4"/>
-          <a:stretch>
-            <a:fillRect/>
-          </a:stretch>
-        </p:blipFill>
-        <p:spPr>
-          <a:xfrm>
-            <a:off x="4948865" y="1480617"/>
-            <a:ext cx="4058459" cy="2775986"/>
+            <a:off x="416560" y="823821"/>
+            <a:ext cx="9144000" cy="5640993"/>
           </a:xfrm>
           <a:prstGeom prst="rect">
             <a:avLst/>
@@ -10476,7 +11926,7 @@
     </p:spTree>
     <p:extLst>
       <p:ext uri="{BB962C8B-B14F-4D97-AF65-F5344CB8AC3E}">
-        <p14:creationId xmlns:p14="http://schemas.microsoft.com/office/powerpoint/2010/main" val="1280831408"/>
+        <p14:creationId xmlns:p14="http://schemas.microsoft.com/office/powerpoint/2010/main" val="4151816580"/>
       </p:ext>
     </p:extLst>
   </p:cSld>
@@ -10502,7 +11952,7 @@
         <p:cNvPr id="1" name="">
           <a:extLst>
             <a:ext uri="{FF2B5EF4-FFF2-40B4-BE49-F238E27FC236}">
-              <a16:creationId xmlns:a16="http://schemas.microsoft.com/office/drawing/2014/main" id="{42D4E360-8048-41E1-7422-96727F0757AD}"/>
+              <a16:creationId xmlns:a16="http://schemas.microsoft.com/office/drawing/2014/main" id="{062E4C5A-8014-3F15-66D0-9E993786049C}"/>
             </a:ext>
           </a:extLst>
         </p:cNvPr>
@@ -10522,7 +11972,7 @@
           <p:cNvPr id="7" name="제목 6">
             <a:extLst>
               <a:ext uri="{FF2B5EF4-FFF2-40B4-BE49-F238E27FC236}">
-                <a16:creationId xmlns:a16="http://schemas.microsoft.com/office/drawing/2014/main" id="{DBA0FD4B-E0E1-544E-FF84-591B94BC61D9}"/>
+                <a16:creationId xmlns:a16="http://schemas.microsoft.com/office/drawing/2014/main" id="{0D092D08-D719-0C27-3649-01EAABD6FAC8}"/>
               </a:ext>
             </a:extLst>
           </p:cNvPr>
@@ -10545,21 +11995,7 @@
                 <a:latin typeface="+mn-lt"/>
                 <a:ea typeface="나눔스퀘어 Bold" panose="020B0600000101010101" pitchFamily="50" charset="-127"/>
               </a:rPr>
-              <a:t>6-1</a:t>
-            </a:r>
-            <a:r>
-              <a:rPr lang="en-US" altLang="ko-KR" sz="2400" b="1" dirty="0">
-                <a:latin typeface="+mn-lt"/>
-                <a:ea typeface="나눔스퀘어 Bold" panose="020B0600000101010101" pitchFamily="50" charset="-127"/>
-              </a:rPr>
-              <a:t>. Visualizing </a:t>
-            </a:r>
-            <a:r>
-              <a:rPr lang="en-US" altLang="ko-KR" b="1" dirty="0">
-                <a:latin typeface="+mn-lt"/>
-                <a:ea typeface="나눔스퀘어 Bold" panose="020B0600000101010101" pitchFamily="50" charset="-127"/>
-              </a:rPr>
-              <a:t>Errors </a:t>
+              <a:t>4. Performance Analysis</a:t>
             </a:r>
             <a:endParaRPr lang="ko-KR" altLang="en-US" b="1" dirty="0">
               <a:latin typeface="+mn-lt"/>
@@ -10572,7 +12008,7 @@
           <p:cNvPr id="2" name="슬라이드 번호 개체 틀 1">
             <a:extLst>
               <a:ext uri="{FF2B5EF4-FFF2-40B4-BE49-F238E27FC236}">
-                <a16:creationId xmlns:a16="http://schemas.microsoft.com/office/drawing/2014/main" id="{8FD5D253-9DAA-DD1B-0A25-20432A86E1CD}"/>
+                <a16:creationId xmlns:a16="http://schemas.microsoft.com/office/drawing/2014/main" id="{7152EB58-CC79-5C35-11D0-3DA7DD521183}"/>
               </a:ext>
             </a:extLst>
           </p:cNvPr>
@@ -10598,10 +12034,10 @@
       </p:sp>
       <p:pic>
         <p:nvPicPr>
-          <p:cNvPr id="4" name="그림 3">
+          <p:cNvPr id="8" name="그림 7">
             <a:extLst>
               <a:ext uri="{FF2B5EF4-FFF2-40B4-BE49-F238E27FC236}">
-                <a16:creationId xmlns:a16="http://schemas.microsoft.com/office/drawing/2014/main" id="{B19EC332-FDC7-68AD-CB5F-524DDB4C1068}"/>
+                <a16:creationId xmlns:a16="http://schemas.microsoft.com/office/drawing/2014/main" id="{173B1D32-7973-BC0D-20C6-D8AB8F7A249B}"/>
               </a:ext>
             </a:extLst>
           </p:cNvPr>
@@ -10618,523 +12054,20 @@
         </p:blipFill>
         <p:spPr>
           <a:xfrm>
-            <a:off x="495301" y="988513"/>
-            <a:ext cx="6215380" cy="5148679"/>
+            <a:off x="3378200" y="915530"/>
+            <a:ext cx="5492750" cy="2943610"/>
           </a:xfrm>
           <a:prstGeom prst="rect">
             <a:avLst/>
           </a:prstGeom>
         </p:spPr>
       </p:pic>
-      <p:sp>
-        <p:nvSpPr>
-          <p:cNvPr id="5" name="Rectangle 8">
+      <p:pic>
+        <p:nvPicPr>
+          <p:cNvPr id="15" name="그림 14">
             <a:extLst>
               <a:ext uri="{FF2B5EF4-FFF2-40B4-BE49-F238E27FC236}">
-                <a16:creationId xmlns:a16="http://schemas.microsoft.com/office/drawing/2014/main" id="{6AE7C713-10C7-2F87-72BF-8ABA71F36077}"/>
-              </a:ext>
-            </a:extLst>
-          </p:cNvPr>
-          <p:cNvSpPr>
-            <a:spLocks noChangeArrowheads="1"/>
-          </p:cNvSpPr>
-          <p:nvPr/>
-        </p:nvSpPr>
-        <p:spPr bwMode="auto">
-          <a:xfrm>
-            <a:off x="6849933" y="2770354"/>
-            <a:ext cx="2985220" cy="804772"/>
-          </a:xfrm>
-          <a:prstGeom prst="rect">
-            <a:avLst/>
-          </a:prstGeom>
-          <a:noFill/>
-          <a:ln>
-            <a:noFill/>
-          </a:ln>
-          <a:effectLst/>
-          <a:extLst>
-            <a:ext uri="{909E8E84-426E-40DD-AFC4-6F175D3DCCD1}">
-              <a14:hiddenFill xmlns:a14="http://schemas.microsoft.com/office/drawing/2010/main">
-                <a:solidFill>
-                  <a:schemeClr val="accent1"/>
-                </a:solidFill>
-              </a14:hiddenFill>
-            </a:ext>
-            <a:ext uri="{91240B29-F687-4F45-9708-019B960494DF}">
-              <a14:hiddenLine xmlns:a14="http://schemas.microsoft.com/office/drawing/2010/main" w="9525">
-                <a:solidFill>
-                  <a:schemeClr val="tx1"/>
-                </a:solidFill>
-                <a:miter lim="800000"/>
-                <a:headEnd/>
-                <a:tailEnd/>
-              </a14:hiddenLine>
-            </a:ext>
-            <a:ext uri="{AF507438-7753-43E0-B8FC-AC1667EBCBE1}">
-              <a14:hiddenEffects xmlns:a14="http://schemas.microsoft.com/office/drawing/2010/main">
-                <a:effectLst>
-                  <a:outerShdw dist="35921" dir="2700000" algn="ctr" rotWithShape="0">
-                    <a:schemeClr val="bg2"/>
-                  </a:outerShdw>
-                </a:effectLst>
-              </a14:hiddenEffects>
-            </a:ext>
-          </a:extLst>
-        </p:spPr>
-        <p:txBody>
-          <a:bodyPr vert="horz" wrap="square" lIns="68580" tIns="34290" rIns="68580" bIns="34290" numCol="1" anchor="ctr" anchorCtr="0" compatLnSpc="1">
-            <a:prstTxWarp prst="textNoShape">
-              <a:avLst/>
-            </a:prstTxWarp>
-            <a:spAutoFit/>
-          </a:bodyPr>
-          <a:lstStyle/>
-          <a:p>
-            <a:pPr marL="214313" indent="-214313" defTabSz="685800" eaLnBrk="0" fontAlgn="base" hangingPunct="0">
-              <a:lnSpc>
-                <a:spcPct val="150000"/>
-              </a:lnSpc>
-              <a:spcBef>
-                <a:spcPct val="0"/>
-              </a:spcBef>
-              <a:spcAft>
-                <a:spcPct val="0"/>
-              </a:spcAft>
-              <a:buFont typeface="Wingdings" pitchFamily="2" charset="2"/>
-              <a:buChar char="§"/>
-            </a:pPr>
-            <a:r>
-              <a:rPr lang="en-US" altLang="ko-KR" sz="1100" dirty="0">
-                <a:cs typeface="Arial" panose="020B0604020202020204" pitchFamily="34" charset="0"/>
-              </a:rPr>
-              <a:t>RMS fit: ~ 80 % following</a:t>
-            </a:r>
-          </a:p>
-          <a:p>
-            <a:pPr marL="214313" indent="-214313" defTabSz="685800" eaLnBrk="0" fontAlgn="base" hangingPunct="0">
-              <a:lnSpc>
-                <a:spcPct val="150000"/>
-              </a:lnSpc>
-              <a:spcBef>
-                <a:spcPct val="0"/>
-              </a:spcBef>
-              <a:spcAft>
-                <a:spcPct val="0"/>
-              </a:spcAft>
-              <a:buFont typeface="Wingdings" pitchFamily="2" charset="2"/>
-              <a:buChar char="§"/>
-            </a:pPr>
-            <a:r>
-              <a:rPr lang="en-US" altLang="ko-KR" sz="1100" dirty="0">
-                <a:cs typeface="Arial" panose="020B0604020202020204" pitchFamily="34" charset="0"/>
-              </a:rPr>
-              <a:t>Magnitude fit: ~ 90 % </a:t>
-            </a:r>
-          </a:p>
-          <a:p>
-            <a:pPr marL="214313" indent="-214313" defTabSz="685800" eaLnBrk="0" fontAlgn="base" hangingPunct="0">
-              <a:lnSpc>
-                <a:spcPct val="150000"/>
-              </a:lnSpc>
-              <a:spcBef>
-                <a:spcPct val="0"/>
-              </a:spcBef>
-              <a:spcAft>
-                <a:spcPct val="0"/>
-              </a:spcAft>
-              <a:buFont typeface="Wingdings" pitchFamily="2" charset="2"/>
-              <a:buChar char="§"/>
-            </a:pPr>
-            <a:r>
-              <a:rPr lang="en-US" altLang="ko-KR" sz="1100" dirty="0">
-                <a:cs typeface="Arial" panose="020B0604020202020204" pitchFamily="34" charset="0"/>
-              </a:rPr>
-              <a:t>Phase Error: Needs to be talked.</a:t>
-            </a:r>
-          </a:p>
-        </p:txBody>
-      </p:sp>
-      <p:sp>
-        <p:nvSpPr>
-          <p:cNvPr id="6" name="사각형: 둥근 모서리 5">
-            <a:extLst>
-              <a:ext uri="{FF2B5EF4-FFF2-40B4-BE49-F238E27FC236}">
-                <a16:creationId xmlns:a16="http://schemas.microsoft.com/office/drawing/2014/main" id="{0AD3A414-0167-39CF-62DB-301348F02293}"/>
-              </a:ext>
-            </a:extLst>
-          </p:cNvPr>
-          <p:cNvSpPr/>
-          <p:nvPr/>
-        </p:nvSpPr>
-        <p:spPr>
-          <a:xfrm>
-            <a:off x="878840" y="4607560"/>
-            <a:ext cx="2250440" cy="1036320"/>
-          </a:xfrm>
-          <a:prstGeom prst="roundRect">
-            <a:avLst>
-              <a:gd name="adj" fmla="val 9824"/>
-            </a:avLst>
-          </a:prstGeom>
-          <a:noFill/>
-          <a:ln w="28575">
-            <a:solidFill>
-              <a:schemeClr val="accent1">
-                <a:lumMod val="50000"/>
-              </a:schemeClr>
-            </a:solidFill>
-            <a:prstDash val="sysDot"/>
-          </a:ln>
-        </p:spPr>
-        <p:style>
-          <a:lnRef idx="2">
-            <a:schemeClr val="accent1">
-              <a:shade val="15000"/>
-            </a:schemeClr>
-          </a:lnRef>
-          <a:fillRef idx="1">
-            <a:schemeClr val="accent1"/>
-          </a:fillRef>
-          <a:effectRef idx="0">
-            <a:schemeClr val="accent1"/>
-          </a:effectRef>
-          <a:fontRef idx="minor">
-            <a:schemeClr val="lt1"/>
-          </a:fontRef>
-        </p:style>
-        <p:txBody>
-          <a:bodyPr rtlCol="0" anchor="ctr"/>
-          <a:lstStyle/>
-          <a:p>
-            <a:pPr algn="ctr"/>
-            <a:endParaRPr lang="ko-KR" altLang="en-US"/>
-          </a:p>
-        </p:txBody>
-      </p:sp>
-      <p:sp>
-        <p:nvSpPr>
-          <p:cNvPr id="8" name="화살표: 오른쪽 7">
-            <a:extLst>
-              <a:ext uri="{FF2B5EF4-FFF2-40B4-BE49-F238E27FC236}">
-                <a16:creationId xmlns:a16="http://schemas.microsoft.com/office/drawing/2014/main" id="{1A4D268A-49C8-E47B-8282-2D678EB671A5}"/>
-              </a:ext>
-            </a:extLst>
-          </p:cNvPr>
-          <p:cNvSpPr/>
-          <p:nvPr/>
-        </p:nvSpPr>
-        <p:spPr>
-          <a:xfrm>
-            <a:off x="3474818" y="4712428"/>
-            <a:ext cx="431604" cy="413292"/>
-          </a:xfrm>
-          <a:prstGeom prst="rightArrow">
-            <a:avLst/>
-          </a:prstGeom>
-          <a:solidFill>
-            <a:srgbClr val="FF98CC"/>
-          </a:solidFill>
-          <a:ln>
-            <a:noFill/>
-          </a:ln>
-        </p:spPr>
-        <p:style>
-          <a:lnRef idx="2">
-            <a:schemeClr val="accent1">
-              <a:shade val="15000"/>
-            </a:schemeClr>
-          </a:lnRef>
-          <a:fillRef idx="1">
-            <a:schemeClr val="accent1"/>
-          </a:fillRef>
-          <a:effectRef idx="0">
-            <a:schemeClr val="accent1"/>
-          </a:effectRef>
-          <a:fontRef idx="minor">
-            <a:schemeClr val="lt1"/>
-          </a:fontRef>
-        </p:style>
-        <p:txBody>
-          <a:bodyPr rtlCol="0" anchor="ctr"/>
-          <a:lstStyle/>
-          <a:p>
-            <a:pPr algn="ctr"/>
-            <a:endParaRPr lang="ko-KR" altLang="en-US"/>
-          </a:p>
-        </p:txBody>
-      </p:sp>
-      <p:sp>
-        <p:nvSpPr>
-          <p:cNvPr id="11" name="Rectangle 8">
-            <a:extLst>
-              <a:ext uri="{FF2B5EF4-FFF2-40B4-BE49-F238E27FC236}">
-                <a16:creationId xmlns:a16="http://schemas.microsoft.com/office/drawing/2014/main" id="{BD1AB494-3D75-676D-3D4D-A57ECA7F990A}"/>
-              </a:ext>
-            </a:extLst>
-          </p:cNvPr>
-          <p:cNvSpPr>
-            <a:spLocks noChangeArrowheads="1"/>
-          </p:cNvSpPr>
-          <p:nvPr/>
-        </p:nvSpPr>
-        <p:spPr bwMode="auto">
-          <a:xfrm>
-            <a:off x="6849933" y="4480602"/>
-            <a:ext cx="2985220" cy="1058688"/>
-          </a:xfrm>
-          <a:prstGeom prst="rect">
-            <a:avLst/>
-          </a:prstGeom>
-          <a:noFill/>
-          <a:ln>
-            <a:noFill/>
-          </a:ln>
-          <a:effectLst/>
-          <a:extLst>
-            <a:ext uri="{909E8E84-426E-40DD-AFC4-6F175D3DCCD1}">
-              <a14:hiddenFill xmlns:a14="http://schemas.microsoft.com/office/drawing/2010/main">
-                <a:solidFill>
-                  <a:schemeClr val="accent1"/>
-                </a:solidFill>
-              </a14:hiddenFill>
-            </a:ext>
-            <a:ext uri="{91240B29-F687-4F45-9708-019B960494DF}">
-              <a14:hiddenLine xmlns:a14="http://schemas.microsoft.com/office/drawing/2010/main" w="9525">
-                <a:solidFill>
-                  <a:schemeClr val="tx1"/>
-                </a:solidFill>
-                <a:miter lim="800000"/>
-                <a:headEnd/>
-                <a:tailEnd/>
-              </a14:hiddenLine>
-            </a:ext>
-            <a:ext uri="{AF507438-7753-43E0-B8FC-AC1667EBCBE1}">
-              <a14:hiddenEffects xmlns:a14="http://schemas.microsoft.com/office/drawing/2010/main">
-                <a:effectLst>
-                  <a:outerShdw dist="35921" dir="2700000" algn="ctr" rotWithShape="0">
-                    <a:schemeClr val="bg2"/>
-                  </a:outerShdw>
-                </a:effectLst>
-              </a14:hiddenEffects>
-            </a:ext>
-          </a:extLst>
-        </p:spPr>
-        <p:txBody>
-          <a:bodyPr vert="horz" wrap="square" lIns="68580" tIns="34290" rIns="68580" bIns="34290" numCol="1" anchor="ctr" anchorCtr="0" compatLnSpc="1">
-            <a:prstTxWarp prst="textNoShape">
-              <a:avLst/>
-            </a:prstTxWarp>
-            <a:spAutoFit/>
-          </a:bodyPr>
-          <a:lstStyle/>
-          <a:p>
-            <a:pPr marL="214313" indent="-214313" defTabSz="685800" eaLnBrk="0" fontAlgn="base" hangingPunct="0">
-              <a:lnSpc>
-                <a:spcPct val="150000"/>
-              </a:lnSpc>
-              <a:spcBef>
-                <a:spcPct val="0"/>
-              </a:spcBef>
-              <a:spcAft>
-                <a:spcPct val="0"/>
-              </a:spcAft>
-              <a:buFont typeface="Wingdings" pitchFamily="2" charset="2"/>
-              <a:buChar char="§"/>
-            </a:pPr>
-            <a:r>
-              <a:rPr lang="en-US" altLang="ko-KR" sz="1100" dirty="0">
-                <a:cs typeface="Arial" panose="020B0604020202020204" pitchFamily="34" charset="0"/>
-              </a:rPr>
-              <a:t>The leading terms in low frequency</a:t>
-            </a:r>
-          </a:p>
-          <a:p>
-            <a:pPr marL="214313" indent="-214313" defTabSz="685800" eaLnBrk="0" fontAlgn="base" hangingPunct="0">
-              <a:lnSpc>
-                <a:spcPct val="150000"/>
-              </a:lnSpc>
-              <a:spcBef>
-                <a:spcPct val="0"/>
-              </a:spcBef>
-              <a:spcAft>
-                <a:spcPct val="0"/>
-              </a:spcAft>
-              <a:buFont typeface="Wingdings" pitchFamily="2" charset="2"/>
-              <a:buChar char="§"/>
-            </a:pPr>
-            <a:r>
-              <a:rPr lang="en-US" altLang="ko-KR" sz="1100" dirty="0">
-                <a:cs typeface="Arial" panose="020B0604020202020204" pitchFamily="34" charset="0"/>
-              </a:rPr>
-              <a:t>Inertia is detected </a:t>
-            </a:r>
-          </a:p>
-          <a:p>
-            <a:pPr marL="214313" indent="-214313" defTabSz="685800" eaLnBrk="0" fontAlgn="base" hangingPunct="0">
-              <a:lnSpc>
-                <a:spcPct val="150000"/>
-              </a:lnSpc>
-              <a:spcBef>
-                <a:spcPct val="0"/>
-              </a:spcBef>
-              <a:spcAft>
-                <a:spcPct val="0"/>
-              </a:spcAft>
-              <a:buFont typeface="Wingdings" pitchFamily="2" charset="2"/>
-              <a:buChar char="§"/>
-            </a:pPr>
-            <a:r>
-              <a:rPr lang="en-US" altLang="ko-KR" sz="1100" dirty="0">
-                <a:cs typeface="Arial" panose="020B0604020202020204" pitchFamily="34" charset="0"/>
-              </a:rPr>
-              <a:t>Jump discontinuity in neg region</a:t>
-            </a:r>
-          </a:p>
-          <a:p>
-            <a:pPr marL="214313" indent="-214313" defTabSz="685800" eaLnBrk="0" fontAlgn="base" hangingPunct="0">
-              <a:lnSpc>
-                <a:spcPct val="150000"/>
-              </a:lnSpc>
-              <a:spcBef>
-                <a:spcPct val="0"/>
-              </a:spcBef>
-              <a:spcAft>
-                <a:spcPct val="0"/>
-              </a:spcAft>
-              <a:buFont typeface="Wingdings" pitchFamily="2" charset="2"/>
-              <a:buChar char="§"/>
-            </a:pPr>
-            <a:r>
-              <a:rPr lang="en-US" altLang="ko-KR" sz="1100" dirty="0" err="1">
-                <a:cs typeface="Arial" panose="020B0604020202020204" pitchFamily="34" charset="0"/>
-              </a:rPr>
-              <a:t>Deadzone</a:t>
-            </a:r>
-            <a:r>
-              <a:rPr lang="en-US" altLang="ko-KR" sz="1100" dirty="0">
-                <a:cs typeface="Arial" panose="020B0604020202020204" pitchFamily="34" charset="0"/>
-              </a:rPr>
-              <a:t> &amp; Backlash movement.	</a:t>
-            </a:r>
-          </a:p>
-        </p:txBody>
-      </p:sp>
-    </p:spTree>
-    <p:extLst>
-      <p:ext uri="{BB962C8B-B14F-4D97-AF65-F5344CB8AC3E}">
-        <p14:creationId xmlns:p14="http://schemas.microsoft.com/office/powerpoint/2010/main" val="3344032829"/>
-      </p:ext>
-    </p:extLst>
-  </p:cSld>
-  <p:clrMapOvr>
-    <a:masterClrMapping/>
-  </p:clrMapOvr>
-  <mc:AlternateContent xmlns:mc="http://schemas.openxmlformats.org/markup-compatibility/2006" xmlns:p14="http://schemas.microsoft.com/office/powerpoint/2010/main">
-    <mc:Choice Requires="p14">
-      <p:transition spd="slow" p14:dur="2000" advTm="86783"/>
-    </mc:Choice>
-    <mc:Fallback xmlns="">
-      <p:transition spd="slow" advTm="86783"/>
-    </mc:Fallback>
-  </mc:AlternateContent>
-</p:sld>
-</file>
-
-<file path=ppt/slides/slide8.xml><?xml version="1.0" encoding="utf-8"?>
-<p:sld xmlns:a="http://schemas.openxmlformats.org/drawingml/2006/main" xmlns:r="http://schemas.openxmlformats.org/officeDocument/2006/relationships" xmlns:p="http://schemas.openxmlformats.org/presentationml/2006/main">
-  <p:cSld>
-    <p:spTree>
-      <p:nvGrpSpPr>
-        <p:cNvPr id="1" name="">
-          <a:extLst>
-            <a:ext uri="{FF2B5EF4-FFF2-40B4-BE49-F238E27FC236}">
-              <a16:creationId xmlns:a16="http://schemas.microsoft.com/office/drawing/2014/main" id="{AB642D20-D04D-0D22-681E-CCCC2D7B99E1}"/>
-            </a:ext>
-          </a:extLst>
-        </p:cNvPr>
-        <p:cNvGrpSpPr/>
-        <p:nvPr/>
-      </p:nvGrpSpPr>
-      <p:grpSpPr>
-        <a:xfrm>
-          <a:off x="0" y="0"/>
-          <a:ext cx="0" cy="0"/>
-          <a:chOff x="0" y="0"/>
-          <a:chExt cx="0" cy="0"/>
-        </a:xfrm>
-      </p:grpSpPr>
-      <p:sp>
-        <p:nvSpPr>
-          <p:cNvPr id="7" name="제목 6">
-            <a:extLst>
-              <a:ext uri="{FF2B5EF4-FFF2-40B4-BE49-F238E27FC236}">
-                <a16:creationId xmlns:a16="http://schemas.microsoft.com/office/drawing/2014/main" id="{76731812-034D-3025-723C-AD62B8C7BA5E}"/>
-              </a:ext>
-            </a:extLst>
-          </p:cNvPr>
-          <p:cNvSpPr>
-            <a:spLocks noGrp="1"/>
-          </p:cNvSpPr>
-          <p:nvPr>
-            <p:ph type="title"/>
-          </p:nvPr>
-        </p:nvSpPr>
-        <p:spPr/>
-        <p:txBody>
-          <a:bodyPr>
-            <a:normAutofit fontScale="90000"/>
-          </a:bodyPr>
-          <a:lstStyle/>
-          <a:p>
-            <a:r>
-              <a:rPr lang="en-US" altLang="ko-KR" b="1" dirty="0">
-                <a:latin typeface="+mn-lt"/>
-                <a:ea typeface="나눔스퀘어 Bold" panose="020B0600000101010101" pitchFamily="50" charset="-127"/>
-              </a:rPr>
-              <a:t>Appendix </a:t>
-            </a:r>
-            <a:endParaRPr lang="ko-KR" altLang="en-US" b="1" dirty="0">
-              <a:latin typeface="+mn-lt"/>
-            </a:endParaRPr>
-          </a:p>
-        </p:txBody>
-      </p:sp>
-      <p:sp>
-        <p:nvSpPr>
-          <p:cNvPr id="2" name="슬라이드 번호 개체 틀 1">
-            <a:extLst>
-              <a:ext uri="{FF2B5EF4-FFF2-40B4-BE49-F238E27FC236}">
-                <a16:creationId xmlns:a16="http://schemas.microsoft.com/office/drawing/2014/main" id="{7223356A-9D01-64F0-4C17-5445A818C108}"/>
-              </a:ext>
-            </a:extLst>
-          </p:cNvPr>
-          <p:cNvSpPr>
-            <a:spLocks noGrp="1"/>
-          </p:cNvSpPr>
-          <p:nvPr>
-            <p:ph type="sldNum" sz="quarter" idx="12"/>
-          </p:nvPr>
-        </p:nvSpPr>
-        <p:spPr/>
-        <p:txBody>
-          <a:bodyPr/>
-          <a:lstStyle/>
-          <a:p>
-            <a:fld id="{57A7753D-33D3-4DE4-B918-257BB52428D1}" type="slidenum">
-              <a:rPr lang="ko-KR" altLang="en-US" smtClean="0"/>
-              <a:t>8</a:t>
-            </a:fld>
-            <a:endParaRPr lang="ko-KR" altLang="en-US"/>
-          </a:p>
-        </p:txBody>
-      </p:sp>
-      <p:pic>
-        <p:nvPicPr>
-          <p:cNvPr id="9" name="그림 8">
-            <a:extLst>
-              <a:ext uri="{FF2B5EF4-FFF2-40B4-BE49-F238E27FC236}">
-                <a16:creationId xmlns:a16="http://schemas.microsoft.com/office/drawing/2014/main" id="{CD787DE2-3C54-7F16-A9C3-56543CDEF4AF}"/>
+                <a16:creationId xmlns:a16="http://schemas.microsoft.com/office/drawing/2014/main" id="{35AA7C23-AEC1-E575-3F7C-1DF287AD7BA4}"/>
               </a:ext>
             </a:extLst>
           </p:cNvPr>
@@ -11144,90 +12077,440 @@
           <p:nvPr/>
         </p:nvPicPr>
         <p:blipFill>
-          <a:blip r:embed="rId3"/>
+          <a:blip r:embed="rId4"/>
           <a:stretch>
             <a:fillRect/>
           </a:stretch>
         </p:blipFill>
         <p:spPr>
           <a:xfrm>
-            <a:off x="495300" y="1487200"/>
-            <a:ext cx="5547360" cy="3487360"/>
+            <a:off x="3329723" y="3670331"/>
+            <a:ext cx="5642827" cy="2931963"/>
           </a:xfrm>
           <a:prstGeom prst="rect">
             <a:avLst/>
           </a:prstGeom>
         </p:spPr>
       </p:pic>
-      <p:sp>
-        <p:nvSpPr>
-          <p:cNvPr id="10" name="제목 6">
-            <a:extLst>
-              <a:ext uri="{FF2B5EF4-FFF2-40B4-BE49-F238E27FC236}">
-                <a16:creationId xmlns:a16="http://schemas.microsoft.com/office/drawing/2014/main" id="{81AEE5A7-E5B4-BD41-779B-BF3580A7C5F6}"/>
-              </a:ext>
-            </a:extLst>
-          </p:cNvPr>
-          <p:cNvSpPr txBox="1">
-            <a:spLocks/>
-          </p:cNvSpPr>
-          <p:nvPr/>
-        </p:nvSpPr>
-        <p:spPr>
-          <a:xfrm>
-            <a:off x="495300" y="902940"/>
-            <a:ext cx="3236690" cy="413292"/>
-          </a:xfrm>
-          <a:prstGeom prst="rect">
-            <a:avLst/>
-          </a:prstGeom>
-        </p:spPr>
-        <p:txBody>
-          <a:bodyPr vert="horz" lIns="91440" tIns="45720" rIns="91440" bIns="45720" rtlCol="0" anchor="ctr">
-            <a:normAutofit fontScale="97500"/>
-          </a:bodyPr>
-          <a:lstStyle>
-            <a:lvl1pPr algn="l" defTabSz="914400" rtl="0" eaLnBrk="1" latinLnBrk="1" hangingPunct="1">
-              <a:lnSpc>
-                <a:spcPct val="90000"/>
-              </a:lnSpc>
-              <a:spcBef>
-                <a:spcPct val="0"/>
-              </a:spcBef>
-              <a:buNone/>
-              <a:defRPr sz="2400" kern="1200">
-                <a:solidFill>
-                  <a:schemeClr val="tx1"/>
-                </a:solidFill>
-                <a:latin typeface="+mj-lt"/>
-                <a:ea typeface="+mj-ea"/>
-                <a:cs typeface="+mj-cs"/>
-              </a:defRPr>
-            </a:lvl1pPr>
-          </a:lstStyle>
-          <a:p>
-            <a:r>
-              <a:rPr lang="en-US" altLang="ko-KR" sz="1600" b="1" dirty="0" err="1">
-                <a:latin typeface="+mn-lt"/>
-              </a:rPr>
-              <a:t>invFreq</a:t>
-            </a:r>
-            <a:r>
-              <a:rPr lang="en-US" altLang="ko-KR" sz="1600" b="1" dirty="0">
-                <a:latin typeface="+mn-lt"/>
-              </a:rPr>
-              <a:t>(1,2): </a:t>
-            </a:r>
-            <a:endParaRPr lang="ko-KR" altLang="en-US" sz="1600" b="1" dirty="0">
-              <a:latin typeface="+mn-lt"/>
-            </a:endParaRPr>
-          </a:p>
-        </p:txBody>
-      </p:sp>
+      <mc:AlternateContent xmlns:mc="http://schemas.openxmlformats.org/markup-compatibility/2006">
+        <mc:Choice xmlns:a14="http://schemas.microsoft.com/office/drawing/2010/main" Requires="a14">
+          <p:sp>
+            <p:nvSpPr>
+              <p:cNvPr id="16" name="제목 6">
+                <a:extLst>
+                  <a:ext uri="{FF2B5EF4-FFF2-40B4-BE49-F238E27FC236}">
+                    <a16:creationId xmlns:a16="http://schemas.microsoft.com/office/drawing/2014/main" id="{944C184D-498F-EF6E-F0CA-E34CE0F9CED1}"/>
+                  </a:ext>
+                </a:extLst>
+              </p:cNvPr>
+              <p:cNvSpPr txBox="1">
+                <a:spLocks/>
+              </p:cNvSpPr>
+              <p:nvPr/>
+            </p:nvSpPr>
+            <p:spPr>
+              <a:xfrm>
+                <a:off x="495300" y="902940"/>
+                <a:ext cx="4362450" cy="3624610"/>
+              </a:xfrm>
+              <a:prstGeom prst="rect">
+                <a:avLst/>
+              </a:prstGeom>
+            </p:spPr>
+            <p:txBody>
+              <a:bodyPr vert="horz" lIns="91440" tIns="45720" rIns="91440" bIns="45720" rtlCol="0" anchor="t" anchorCtr="0">
+                <a:normAutofit fontScale="97500"/>
+              </a:bodyPr>
+              <a:lstStyle>
+                <a:lvl1pPr algn="l" defTabSz="914400" rtl="0" eaLnBrk="1" latinLnBrk="1" hangingPunct="1">
+                  <a:lnSpc>
+                    <a:spcPct val="90000"/>
+                  </a:lnSpc>
+                  <a:spcBef>
+                    <a:spcPct val="0"/>
+                  </a:spcBef>
+                  <a:buNone/>
+                  <a:defRPr sz="2400" kern="1200">
+                    <a:solidFill>
+                      <a:schemeClr val="tx1"/>
+                    </a:solidFill>
+                    <a:latin typeface="+mj-lt"/>
+                    <a:ea typeface="+mj-ea"/>
+                    <a:cs typeface="+mj-cs"/>
+                  </a:defRPr>
+                </a:lvl1pPr>
+              </a:lstStyle>
+              <a:p>
+                <a:pPr marL="342900" indent="-342900">
+                  <a:buAutoNum type="alphaUcPeriod"/>
+                </a:pPr>
+                <a:r>
+                  <a:rPr lang="en-US" altLang="ko-KR" sz="1600" b="1" dirty="0">
+                    <a:latin typeface="+mn-lt"/>
+                  </a:rPr>
+                  <a:t>Control Gain Design</a:t>
+                </a:r>
+              </a:p>
+              <a:p>
+                <a:pPr marL="342900" indent="-342900">
+                  <a:buAutoNum type="alphaUcPeriod"/>
+                </a:pPr>
+                <a:endParaRPr lang="en-US" altLang="ko-KR" sz="1600" b="1" dirty="0">
+                  <a:latin typeface="+mn-lt"/>
+                </a:endParaRPr>
+              </a:p>
+              <a:p>
+                <a:pPr marL="742950" lvl="1" indent="-285750">
+                  <a:buFont typeface="Arial" panose="020B0604020202020204" pitchFamily="34" charset="0"/>
+                  <a:buChar char="•"/>
+                </a:pPr>
+                <a14:m>
+                  <m:oMath xmlns:m="http://schemas.openxmlformats.org/officeDocument/2006/math">
+                    <m:r>
+                      <a:rPr lang="en-US" altLang="ko-KR" i="1">
+                        <a:latin typeface="Cambria Math" panose="02040503050406030204" pitchFamily="18" charset="0"/>
+                      </a:rPr>
+                      <m:t>%</m:t>
+                    </m:r>
+                    <m:r>
+                      <a:rPr lang="en-US" altLang="ko-KR" i="1">
+                        <a:latin typeface="Cambria Math" panose="02040503050406030204" pitchFamily="18" charset="0"/>
+                      </a:rPr>
+                      <m:t>𝑂𝑆</m:t>
+                    </m:r>
+                    <m:r>
+                      <a:rPr lang="en-US" altLang="ko-KR" b="0" i="1" smtClean="0">
+                        <a:latin typeface="Cambria Math" panose="02040503050406030204" pitchFamily="18" charset="0"/>
+                      </a:rPr>
+                      <m:t>=4.42</m:t>
+                    </m:r>
+                    <m:r>
+                      <a:rPr lang="en-US" altLang="ko-KR" i="1">
+                        <a:latin typeface="Cambria Math" panose="02040503050406030204" pitchFamily="18" charset="0"/>
+                      </a:rPr>
+                      <m:t>%</m:t>
+                    </m:r>
+                  </m:oMath>
+                </a14:m>
+                <a:endParaRPr lang="en-US" altLang="ko-KR" i="1" dirty="0">
+                  <a:latin typeface="Cambria Math" panose="02040503050406030204" pitchFamily="18" charset="0"/>
+                </a:endParaRPr>
+              </a:p>
+              <a:p>
+                <a:pPr lvl="1"/>
+                <a:endParaRPr lang="en-US" altLang="ko-KR" dirty="0"/>
+              </a:p>
+              <a:p>
+                <a:pPr marL="742950" lvl="1" indent="-285750">
+                  <a:buFont typeface="Arial" panose="020B0604020202020204" pitchFamily="34" charset="0"/>
+                  <a:buChar char="•"/>
+                </a:pPr>
+                <a14:m>
+                  <m:oMath xmlns:m="http://schemas.openxmlformats.org/officeDocument/2006/math">
+                    <m:sSubSup>
+                      <m:sSubSupPr>
+                        <m:ctrlPr>
+                          <a:rPr lang="en-US" altLang="ko-KR" i="1">
+                            <a:latin typeface="Cambria Math" panose="02040503050406030204" pitchFamily="18" charset="0"/>
+                          </a:rPr>
+                        </m:ctrlPr>
+                      </m:sSubSupPr>
+                      <m:e>
+                        <m:r>
+                          <a:rPr lang="en-US" altLang="ko-KR" i="1">
+                            <a:latin typeface="Cambria Math" panose="02040503050406030204" pitchFamily="18" charset="0"/>
+                          </a:rPr>
+                          <m:t>𝑡</m:t>
+                        </m:r>
+                      </m:e>
+                      <m:sub>
+                        <m:r>
+                          <a:rPr lang="en-US" altLang="ko-KR" i="1">
+                            <a:latin typeface="Cambria Math" panose="02040503050406030204" pitchFamily="18" charset="0"/>
+                          </a:rPr>
+                          <m:t>𝑟</m:t>
+                        </m:r>
+                      </m:sub>
+                      <m:sup>
+                        <m:r>
+                          <a:rPr lang="en-US" altLang="ko-KR" i="1">
+                            <a:latin typeface="Cambria Math" panose="02040503050406030204" pitchFamily="18" charset="0"/>
+                          </a:rPr>
+                          <m:t>90</m:t>
+                        </m:r>
+                      </m:sup>
+                    </m:sSubSup>
+                    <m:r>
+                      <a:rPr lang="en-US" altLang="ko-KR" b="0" i="1" smtClean="0">
+                        <a:latin typeface="Cambria Math" panose="02040503050406030204" pitchFamily="18" charset="0"/>
+                      </a:rPr>
+                      <m:t>=0.086</m:t>
+                    </m:r>
+                    <m:r>
+                      <a:rPr lang="en-US" altLang="ko-KR" i="1">
+                        <a:latin typeface="Cambria Math" panose="02040503050406030204" pitchFamily="18" charset="0"/>
+                      </a:rPr>
+                      <m:t> </m:t>
+                    </m:r>
+                    <m:d>
+                      <m:dPr>
+                        <m:begChr m:val="["/>
+                        <m:endChr m:val="]"/>
+                        <m:ctrlPr>
+                          <a:rPr lang="en-US" altLang="ko-KR" i="1">
+                            <a:latin typeface="Cambria Math" panose="02040503050406030204" pitchFamily="18" charset="0"/>
+                          </a:rPr>
+                        </m:ctrlPr>
+                      </m:dPr>
+                      <m:e>
+                        <m:r>
+                          <a:rPr lang="en-US" altLang="ko-KR" i="1">
+                            <a:latin typeface="Cambria Math" panose="02040503050406030204" pitchFamily="18" charset="0"/>
+                          </a:rPr>
+                          <m:t>𝑠𝑒𝑐</m:t>
+                        </m:r>
+                      </m:e>
+                    </m:d>
+                  </m:oMath>
+                </a14:m>
+                <a:endParaRPr lang="en-US" altLang="ko-KR" dirty="0"/>
+              </a:p>
+              <a:p>
+                <a:pPr marL="742950" lvl="1" indent="-285750">
+                  <a:buFont typeface="Arial" panose="020B0604020202020204" pitchFamily="34" charset="0"/>
+                  <a:buChar char="•"/>
+                </a:pPr>
+                <a:endParaRPr lang="en-US" altLang="ko-KR" dirty="0"/>
+              </a:p>
+              <a:p>
+                <a:pPr marL="742950" lvl="1" indent="-285750">
+                  <a:buFont typeface="Arial" panose="020B0604020202020204" pitchFamily="34" charset="0"/>
+                  <a:buChar char="•"/>
+                </a:pPr>
+                <a14:m>
+                  <m:oMath xmlns:m="http://schemas.openxmlformats.org/officeDocument/2006/math">
+                    <m:sSub>
+                      <m:sSubPr>
+                        <m:ctrlPr>
+                          <a:rPr lang="en-US" altLang="ko-KR" b="0" i="1" smtClean="0">
+                            <a:latin typeface="Cambria Math" panose="02040503050406030204" pitchFamily="18" charset="0"/>
+                          </a:rPr>
+                        </m:ctrlPr>
+                      </m:sSubPr>
+                      <m:e>
+                        <m:r>
+                          <a:rPr lang="en-US" altLang="ko-KR" b="0" i="1" smtClean="0">
+                            <a:latin typeface="Cambria Math" panose="02040503050406030204" pitchFamily="18" charset="0"/>
+                          </a:rPr>
+                          <m:t>𝑒</m:t>
+                        </m:r>
+                      </m:e>
+                      <m:sub>
+                        <m:r>
+                          <a:rPr lang="en-US" altLang="ko-KR" b="0" i="1" smtClean="0">
+                            <a:latin typeface="Cambria Math" panose="02040503050406030204" pitchFamily="18" charset="0"/>
+                          </a:rPr>
+                          <m:t>𝑠𝑠</m:t>
+                        </m:r>
+                      </m:sub>
+                    </m:sSub>
+                    <m:r>
+                      <a:rPr lang="en-US" altLang="ko-KR" b="0" i="1" smtClean="0">
+                        <a:latin typeface="Cambria Math" panose="02040503050406030204" pitchFamily="18" charset="0"/>
+                      </a:rPr>
+                      <m:t>=0.0025 [</m:t>
+                    </m:r>
+                    <m:r>
+                      <a:rPr lang="en-US" altLang="ko-KR" b="0" i="1" smtClean="0">
+                        <a:latin typeface="Cambria Math" panose="02040503050406030204" pitchFamily="18" charset="0"/>
+                      </a:rPr>
+                      <m:t>𝑑𝑒𝑔</m:t>
+                    </m:r>
+                    <m:r>
+                      <a:rPr lang="en-US" altLang="ko-KR" b="0" i="1" smtClean="0">
+                        <a:latin typeface="Cambria Math" panose="02040503050406030204" pitchFamily="18" charset="0"/>
+                      </a:rPr>
+                      <m:t>]</m:t>
+                    </m:r>
+                  </m:oMath>
+                </a14:m>
+                <a:endParaRPr lang="en-US" altLang="ko-KR" dirty="0"/>
+              </a:p>
+              <a:p>
+                <a:pPr marL="742950" lvl="1" indent="-285750">
+                  <a:buFont typeface="Arial" panose="020B0604020202020204" pitchFamily="34" charset="0"/>
+                  <a:buChar char="•"/>
+                </a:pPr>
+                <a:endParaRPr lang="en-US" altLang="ko-KR" i="1" dirty="0">
+                  <a:latin typeface="Cambria Math" panose="02040503050406030204" pitchFamily="18" charset="0"/>
+                </a:endParaRPr>
+              </a:p>
+              <a:p>
+                <a:pPr marL="742950" lvl="1" indent="-285750">
+                  <a:buFont typeface="Arial" panose="020B0604020202020204" pitchFamily="34" charset="0"/>
+                  <a:buChar char="•"/>
+                </a:pPr>
+                <a14:m>
+                  <m:oMath xmlns:m="http://schemas.openxmlformats.org/officeDocument/2006/math">
+                    <m:r>
+                      <a:rPr lang="en-US" altLang="ko-KR" b="0" i="1" smtClean="0">
+                        <a:latin typeface="Cambria Math" panose="02040503050406030204" pitchFamily="18" charset="0"/>
+                      </a:rPr>
+                      <m:t>𝑃𝑀</m:t>
+                    </m:r>
+                    <m:r>
+                      <a:rPr lang="en-US" altLang="ko-KR" b="0" i="1" smtClean="0">
+                        <a:latin typeface="Cambria Math" panose="02040503050406030204" pitchFamily="18" charset="0"/>
+                      </a:rPr>
+                      <m:t>=65.15 </m:t>
+                    </m:r>
+                    <m:d>
+                      <m:dPr>
+                        <m:begChr m:val="["/>
+                        <m:endChr m:val="]"/>
+                        <m:ctrlPr>
+                          <a:rPr lang="en-US" altLang="ko-KR" b="0" i="1" smtClean="0">
+                            <a:latin typeface="Cambria Math" panose="02040503050406030204" pitchFamily="18" charset="0"/>
+                          </a:rPr>
+                        </m:ctrlPr>
+                      </m:dPr>
+                      <m:e>
+                        <m:r>
+                          <a:rPr lang="en-US" altLang="ko-KR" b="0" i="1" smtClean="0">
+                            <a:latin typeface="Cambria Math" panose="02040503050406030204" pitchFamily="18" charset="0"/>
+                          </a:rPr>
+                          <m:t>𝑑𝑒𝑔</m:t>
+                        </m:r>
+                      </m:e>
+                    </m:d>
+                  </m:oMath>
+                </a14:m>
+                <a:endParaRPr lang="en-US" altLang="ko-KR" b="0" i="1" dirty="0">
+                  <a:latin typeface="Cambria Math" panose="02040503050406030204" pitchFamily="18" charset="0"/>
+                </a:endParaRPr>
+              </a:p>
+              <a:p>
+                <a:pPr marL="742950" lvl="1" indent="-285750">
+                  <a:buFont typeface="Arial" panose="020B0604020202020204" pitchFamily="34" charset="0"/>
+                  <a:buChar char="•"/>
+                </a:pPr>
+                <a:endParaRPr lang="en-US" altLang="ko-KR" i="1" dirty="0">
+                  <a:latin typeface="Cambria Math" panose="02040503050406030204" pitchFamily="18" charset="0"/>
+                </a:endParaRPr>
+              </a:p>
+              <a:p>
+                <a:pPr marL="742950" lvl="1" indent="-285750">
+                  <a:buFont typeface="Arial" panose="020B0604020202020204" pitchFamily="34" charset="0"/>
+                  <a:buChar char="•"/>
+                </a:pPr>
+                <a14:m>
+                  <m:oMath xmlns:m="http://schemas.openxmlformats.org/officeDocument/2006/math">
+                    <m:r>
+                      <a:rPr lang="en-US" altLang="ko-KR" b="0" i="1" smtClean="0">
+                        <a:latin typeface="Cambria Math" panose="02040503050406030204" pitchFamily="18" charset="0"/>
+                      </a:rPr>
+                      <m:t>𝐺𝑀</m:t>
+                    </m:r>
+                    <m:r>
+                      <a:rPr lang="en-US" altLang="ko-KR" b="0" i="1" smtClean="0">
+                        <a:latin typeface="Cambria Math" panose="02040503050406030204" pitchFamily="18" charset="0"/>
+                      </a:rPr>
+                      <m:t>=</m:t>
+                    </m:r>
+                    <m:r>
+                      <a:rPr lang="en-US" altLang="ko-KR" b="0" i="1" smtClean="0">
+                        <a:latin typeface="Cambria Math" panose="02040503050406030204" pitchFamily="18" charset="0"/>
+                      </a:rPr>
+                      <m:t>𝐼𝑛𝑓</m:t>
+                    </m:r>
+                    <m:r>
+                      <a:rPr lang="en-US" altLang="ko-KR" b="0" i="1" smtClean="0">
+                        <a:latin typeface="Cambria Math" panose="02040503050406030204" pitchFamily="18" charset="0"/>
+                      </a:rPr>
+                      <m:t> </m:t>
+                    </m:r>
+                    <m:r>
+                      <a:rPr lang="en-US" altLang="ko-KR" b="0" i="1" smtClean="0">
+                        <a:latin typeface="Cambria Math" panose="02040503050406030204" pitchFamily="18" charset="0"/>
+                      </a:rPr>
+                      <m:t>𝑑𝐵</m:t>
+                    </m:r>
+                  </m:oMath>
+                </a14:m>
+                <a:endParaRPr lang="en-US" altLang="ko-KR" i="1" dirty="0">
+                  <a:latin typeface="Cambria Math" panose="02040503050406030204" pitchFamily="18" charset="0"/>
+                </a:endParaRPr>
+              </a:p>
+              <a:p>
+                <a:pPr marL="628650" lvl="1" indent="-171450">
+                  <a:buFontTx/>
+                  <a:buChar char="-"/>
+                </a:pPr>
+                <a:endParaRPr lang="en-US" altLang="ko-KR" sz="1600" dirty="0">
+                  <a:latin typeface="+mn-lt"/>
+                </a:endParaRPr>
+              </a:p>
+              <a:p>
+                <a:pPr marL="628650" lvl="1" indent="-171450">
+                  <a:buFontTx/>
+                  <a:buChar char="-"/>
+                </a:pPr>
+                <a:endParaRPr lang="ko-KR" altLang="en-US" sz="1000" b="1" dirty="0">
+                  <a:latin typeface="+mn-lt"/>
+                </a:endParaRPr>
+              </a:p>
+            </p:txBody>
+          </p:sp>
+        </mc:Choice>
+        <mc:Fallback>
+          <p:sp>
+            <p:nvSpPr>
+              <p:cNvPr id="16" name="제목 6">
+                <a:extLst>
+                  <a:ext uri="{FF2B5EF4-FFF2-40B4-BE49-F238E27FC236}">
+                    <a16:creationId xmlns:a16="http://schemas.microsoft.com/office/drawing/2014/main" id="{944C184D-498F-EF6E-F0CA-E34CE0F9CED1}"/>
+                  </a:ext>
+                </a:extLst>
+              </p:cNvPr>
+              <p:cNvSpPr txBox="1">
+                <a:spLocks noRot="1" noChangeAspect="1" noMove="1" noResize="1" noEditPoints="1" noAdjustHandles="1" noChangeArrowheads="1" noChangeShapeType="1" noTextEdit="1"/>
+              </p:cNvSpPr>
+              <p:nvPr/>
+            </p:nvSpPr>
+            <p:spPr>
+              <a:xfrm>
+                <a:off x="495300" y="902940"/>
+                <a:ext cx="4362450" cy="3624610"/>
+              </a:xfrm>
+              <a:prstGeom prst="rect">
+                <a:avLst/>
+              </a:prstGeom>
+              <a:blipFill>
+                <a:blip r:embed="rId5"/>
+                <a:stretch>
+                  <a:fillRect l="-698" t="-1176"/>
+                </a:stretch>
+              </a:blipFill>
+            </p:spPr>
+            <p:txBody>
+              <a:bodyPr/>
+              <a:lstStyle/>
+              <a:p>
+                <a:r>
+                  <a:rPr lang="ko-KR" altLang="en-US">
+                    <a:noFill/>
+                  </a:rPr>
+                  <a:t> </a:t>
+                </a:r>
+              </a:p>
+            </p:txBody>
+          </p:sp>
+        </mc:Fallback>
+      </mc:AlternateContent>
     </p:spTree>
     <p:extLst>
       <p:ext uri="{BB962C8B-B14F-4D97-AF65-F5344CB8AC3E}">
-        <p14:creationId xmlns:p14="http://schemas.microsoft.com/office/powerpoint/2010/main" val="1695048646"/>
+        <p14:creationId xmlns:p14="http://schemas.microsoft.com/office/powerpoint/2010/main" val="3595679211"/>
       </p:ext>
     </p:extLst>
   </p:cSld>
@@ -12037,14 +13320,12 @@
 </file>
 
 <file path=customXml/item1.xml><?xml version="1.0" encoding="utf-8"?>
-<p:properties xmlns:p="http://schemas.microsoft.com/office/2006/metadata/properties" xmlns:xsi="http://www.w3.org/2001/XMLSchema-instance" xmlns:pc="http://schemas.microsoft.com/office/infopath/2007/PartnerControls">
-  <documentManagement>
-    <TaxCatchAll xmlns="400cfd5d-5799-4231-b04c-96401190256d" xsi:nil="true"/>
-    <lcf76f155ced4ddcb4097134ff3c332f xmlns="ecb78d4e-e55c-4e7d-8ea6-0e0f2bb207af">
-      <Terms xmlns="http://schemas.microsoft.com/office/infopath/2007/PartnerControls"/>
-    </lcf76f155ced4ddcb4097134ff3c332f>
-  </documentManagement>
-</p:properties>
+<?mso-contentType ?>
+<FormTemplates xmlns="http://schemas.microsoft.com/sharepoint/v3/contenttype/forms">
+  <Display>DocumentLibraryForm</Display>
+  <Edit>DocumentLibraryForm</Edit>
+  <New>DocumentLibraryForm</New>
+</FormTemplates>
 </file>
 
 <file path=customXml/item2.xml><?xml version="1.0" encoding="utf-8"?>
@@ -12291,27 +13572,20 @@
 </file>
 
 <file path=customXml/item3.xml><?xml version="1.0" encoding="utf-8"?>
-<?mso-contentType ?>
-<FormTemplates xmlns="http://schemas.microsoft.com/sharepoint/v3/contenttype/forms">
-  <Display>DocumentLibraryForm</Display>
-  <Edit>DocumentLibraryForm</Edit>
-  <New>DocumentLibraryForm</New>
-</FormTemplates>
+<p:properties xmlns:p="http://schemas.microsoft.com/office/2006/metadata/properties" xmlns:xsi="http://www.w3.org/2001/XMLSchema-instance" xmlns:pc="http://schemas.microsoft.com/office/infopath/2007/PartnerControls">
+  <documentManagement>
+    <TaxCatchAll xmlns="400cfd5d-5799-4231-b04c-96401190256d" xsi:nil="true"/>
+    <lcf76f155ced4ddcb4097134ff3c332f xmlns="ecb78d4e-e55c-4e7d-8ea6-0e0f2bb207af">
+      <Terms xmlns="http://schemas.microsoft.com/office/infopath/2007/PartnerControls"/>
+    </lcf76f155ced4ddcb4097134ff3c332f>
+  </documentManagement>
+</p:properties>
 </file>
 
 <file path=customXml/itemProps1.xml><?xml version="1.0" encoding="utf-8"?>
-<ds:datastoreItem xmlns:ds="http://schemas.openxmlformats.org/officeDocument/2006/customXml" ds:itemID="{6056FF71-086F-4364-AB42-761853C03E2E}">
+<ds:datastoreItem xmlns:ds="http://schemas.openxmlformats.org/officeDocument/2006/customXml" ds:itemID="{2AD3A792-1ED0-417E-9576-F1CD3FA67C34}">
   <ds:schemaRefs>
-    <ds:schemaRef ds:uri="http://schemas.microsoft.com/office/infopath/2007/PartnerControls"/>
-    <ds:schemaRef ds:uri="http://purl.org/dc/dcmitype/"/>
-    <ds:schemaRef ds:uri="http://schemas.microsoft.com/office/2006/metadata/properties"/>
-    <ds:schemaRef ds:uri="http://www.w3.org/XML/1998/namespace"/>
-    <ds:schemaRef ds:uri="http://purl.org/dc/elements/1.1/"/>
-    <ds:schemaRef ds:uri="http://schemas.microsoft.com/office/2006/documentManagement/types"/>
-    <ds:schemaRef ds:uri="ecb78d4e-e55c-4e7d-8ea6-0e0f2bb207af"/>
-    <ds:schemaRef ds:uri="400cfd5d-5799-4231-b04c-96401190256d"/>
-    <ds:schemaRef ds:uri="http://purl.org/dc/terms/"/>
-    <ds:schemaRef ds:uri="http://schemas.openxmlformats.org/package/2006/metadata/core-properties"/>
+    <ds:schemaRef ds:uri="http://schemas.microsoft.com/sharepoint/v3/contenttype/forms"/>
   </ds:schemaRefs>
 </ds:datastoreItem>
 </file>
@@ -12336,9 +13610,18 @@
 </file>
 
 <file path=customXml/itemProps3.xml><?xml version="1.0" encoding="utf-8"?>
-<ds:datastoreItem xmlns:ds="http://schemas.openxmlformats.org/officeDocument/2006/customXml" ds:itemID="{2AD3A792-1ED0-417E-9576-F1CD3FA67C34}">
+<ds:datastoreItem xmlns:ds="http://schemas.openxmlformats.org/officeDocument/2006/customXml" ds:itemID="{6056FF71-086F-4364-AB42-761853C03E2E}">
   <ds:schemaRefs>
-    <ds:schemaRef ds:uri="http://schemas.microsoft.com/sharepoint/v3/contenttype/forms"/>
+    <ds:schemaRef ds:uri="http://schemas.microsoft.com/office/infopath/2007/PartnerControls"/>
+    <ds:schemaRef ds:uri="http://purl.org/dc/dcmitype/"/>
+    <ds:schemaRef ds:uri="http://schemas.microsoft.com/office/2006/metadata/properties"/>
+    <ds:schemaRef ds:uri="http://www.w3.org/XML/1998/namespace"/>
+    <ds:schemaRef ds:uri="http://purl.org/dc/elements/1.1/"/>
+    <ds:schemaRef ds:uri="http://schemas.microsoft.com/office/2006/documentManagement/types"/>
+    <ds:schemaRef ds:uri="ecb78d4e-e55c-4e7d-8ea6-0e0f2bb207af"/>
+    <ds:schemaRef ds:uri="400cfd5d-5799-4231-b04c-96401190256d"/>
+    <ds:schemaRef ds:uri="http://purl.org/dc/terms/"/>
+    <ds:schemaRef ds:uri="http://schemas.openxmlformats.org/package/2006/metadata/core-properties"/>
   </ds:schemaRefs>
 </ds:datastoreItem>
 </file>